--- a/presentation/cdata-interview.pptx
+++ b/presentation/cdata-interview.pptx
@@ -50,6 +50,7 @@
     <p:sldId id="298" r:id="rId50"/>
     <p:sldId id="299" r:id="rId51"/>
     <p:sldId id="300" r:id="rId52"/>
+    <p:sldId id="301" r:id="rId53"/>
   </p:sldIdLst>
   <p:sldSz cx="12192000" cy="6858000" type="custom"/>
   <p:notesSz cx="6858000" cy="9144000"/>
@@ -151,16 +152,16 @@
   <p:embeddedFontLst>
     <p:embeddedFont>
       <p:font typeface="Geist" charset="0" pitchFamily="34"/>
-      <p:regular r:id="rId53" uniqueId="{B8C31365-EB08-47AB-A061-39DCE35C7C6D}"/>
-      <p:bold r:id="rId54" uniqueId="{1D99A269-0067-4CA7-B019-30B4C9E21E0F}"/>
+      <p:regular r:id="rId54" uniqueId="{AEF5E271-9345-4E21-9894-2AD8A374ADA0}"/>
+      <p:bold r:id="rId55" uniqueId="{C833CB93-73C5-46F6-8217-7E3231B6D9AE}"/>
     </p:embeddedFont>
     <p:embeddedFont>
       <p:font typeface="Geist ExtraBold" charset="0" pitchFamily="34"/>
-      <p:regular r:id="rId55" uniqueId="{E1421B59-2FDA-48E4-9BC9-DEA9B33B6BB1}"/>
+      <p:regular r:id="rId56" uniqueId="{94DCD17E-4BC1-4641-9F12-F79B888F2A28}"/>
     </p:embeddedFont>
     <p:embeddedFont>
       <p:font typeface="DM Sans" charset="0" pitchFamily="34"/>
-      <p:regular r:id="rId56" uniqueId="{8D7BFC75-48D1-4AD9-897B-232C97E21277}"/>
+      <p:regular r:id="rId57" uniqueId="{C205D328-76D4-46A7-813A-FC2CFB4235E9}"/>
     </p:embeddedFont>
   </p:embeddedFontLst>
 </p:presentation>
@@ -15587,7 +15588,7 @@
                 </a:solidFill>
                 <a:latin typeface="DM Sans"/>
               </a:rPr>
-              <a:t>DAYS 1–30</a:t>
+              <a:t>DAYS 1–30 · DX FINDING</a:t>
             </a:r>
           </a:p>
         </p:txBody>
@@ -15601,7 +15602,7 @@
         <p:spPr>
           <a:xfrm>
             <a:off x="685628" y="620000"/>
-            <a:ext cx="10820744" cy="800000"/>
+            <a:ext cx="10820744" cy="700000"/>
           </a:xfrm>
           <a:prstGeom prst="rect">
             <a:avLst/>
@@ -15622,27 +15623,27 @@
                 </a:solidFill>
                 <a:latin typeface="Geist ExtraBold"/>
               </a:rPr>
-              <a:t>AI developer entry point.</a:t>
-            </a:r>
-          </a:p>
-        </p:txBody>
-      </p:sp>
-      <p:sp>
-        <p:nvSpPr>
-          <p:cNvPr id="5" name="Rounded Rectangle 4"/>
+              <a:t>The Quick Start Problem.</a:t>
+            </a:r>
+          </a:p>
+        </p:txBody>
+      </p:sp>
+      <p:sp>
+        <p:nvSpPr>
+          <p:cNvPr id="5" name="Rectangle 4"/>
           <p:cNvSpPr/>
           <p:nvPr/>
         </p:nvSpPr>
         <p:spPr>
           <a:xfrm>
-            <a:off x="685628" y="1900000"/>
-            <a:ext cx="10820744" cy="1600000"/>
-          </a:xfrm>
-          <a:prstGeom prst="roundRect">
+            <a:off x="685628" y="1550000"/>
+            <a:ext cx="5210372" cy="280000"/>
+          </a:xfrm>
+          <a:prstGeom prst="rect">
             <a:avLst/>
           </a:prstGeom>
           <a:solidFill>
-            <a:srgbClr val="ECEDE8"/>
+            <a:srgbClr val="1A1A1A"/>
           </a:solidFill>
           <a:ln>
             <a:noFill/>
@@ -15678,8 +15679,86 @@
         </p:nvSpPr>
         <p:spPr>
           <a:xfrm>
-            <a:off x="1085628" y="2200000"/>
-            <a:ext cx="10020744" cy="600000"/>
+            <a:off x="805628" y="1610000"/>
+            <a:ext cx="4970372" cy="200000"/>
+          </a:xfrm>
+          <a:prstGeom prst="rect">
+            <a:avLst/>
+          </a:prstGeom>
+          <a:noFill/>
+        </p:spPr>
+        <p:txBody>
+          <a:bodyPr wrap="none">
+            <a:spAutoFit/>
+          </a:bodyPr>
+          <a:lstStyle/>
+          <a:p>
+            <a:pPr algn="l"/>
+            <a:r>
+              <a:rPr sz="1300" b="0" i="0">
+                <a:solidFill>
+                  <a:srgbClr val="F5F5F0"/>
+                </a:solidFill>
+                <a:latin typeface="Geist ExtraBold"/>
+              </a:rPr>
+              <a:t>Current Quick Start</a:t>
+            </a:r>
+          </a:p>
+        </p:txBody>
+      </p:sp>
+      <p:sp>
+        <p:nvSpPr>
+          <p:cNvPr id="7" name="Rectangle 6"/>
+          <p:cNvSpPr/>
+          <p:nvPr/>
+        </p:nvSpPr>
+        <p:spPr>
+          <a:xfrm>
+            <a:off x="685628" y="1980000"/>
+            <a:ext cx="8000" cy="200000"/>
+          </a:xfrm>
+          <a:prstGeom prst="rect">
+            <a:avLst/>
+          </a:prstGeom>
+          <a:solidFill>
+            <a:srgbClr val="808080"/>
+          </a:solidFill>
+          <a:ln>
+            <a:noFill/>
+          </a:ln>
+        </p:spPr>
+        <p:style>
+          <a:lnRef idx="1">
+            <a:schemeClr val="accent1"/>
+          </a:lnRef>
+          <a:fillRef idx="3">
+            <a:schemeClr val="accent1"/>
+          </a:fillRef>
+          <a:effectRef idx="2">
+            <a:schemeClr val="accent1"/>
+          </a:effectRef>
+          <a:fontRef idx="minor">
+            <a:schemeClr val="lt1"/>
+          </a:fontRef>
+        </p:style>
+        <p:txBody>
+          <a:bodyPr rtlCol="0" anchor="ctr"/>
+          <a:lstStyle/>
+          <a:p>
+            <a:pPr algn="ctr"/>
+          </a:p>
+        </p:txBody>
+      </p:sp>
+      <p:sp>
+        <p:nvSpPr>
+          <p:cNvPr id="8" name="TextBox 7"/>
+          <p:cNvSpPr txBox="1"/>
+          <p:nvPr/>
+        </p:nvSpPr>
+        <p:spPr>
+          <a:xfrm>
+            <a:off x="865628" y="1910000"/>
+            <a:ext cx="5030372" cy="320000"/>
           </a:xfrm>
           <a:prstGeom prst="rect">
             <a:avLst/>
@@ -15694,27 +15773,495 @@
           <a:p>
             <a:pPr algn="l"/>
             <a:r>
-              <a:rPr sz="2600" b="1" i="0">
+              <a:rPr sz="1400" b="0" i="0">
+                <a:solidFill>
+                  <a:srgbClr val="4A4A4A"/>
+                </a:solidFill>
+                <a:latin typeface="Geist"/>
+              </a:rPr>
+              <a:t>Walks you through connecting a source</a:t>
+            </a:r>
+          </a:p>
+        </p:txBody>
+      </p:sp>
+      <p:sp>
+        <p:nvSpPr>
+          <p:cNvPr id="9" name="Rectangle 8"/>
+          <p:cNvSpPr/>
+          <p:nvPr/>
+        </p:nvSpPr>
+        <p:spPr>
+          <a:xfrm>
+            <a:off x="685628" y="2360000"/>
+            <a:ext cx="8000" cy="200000"/>
+          </a:xfrm>
+          <a:prstGeom prst="rect">
+            <a:avLst/>
+          </a:prstGeom>
+          <a:solidFill>
+            <a:srgbClr val="808080"/>
+          </a:solidFill>
+          <a:ln>
+            <a:noFill/>
+          </a:ln>
+        </p:spPr>
+        <p:style>
+          <a:lnRef idx="1">
+            <a:schemeClr val="accent1"/>
+          </a:lnRef>
+          <a:fillRef idx="3">
+            <a:schemeClr val="accent1"/>
+          </a:fillRef>
+          <a:effectRef idx="2">
+            <a:schemeClr val="accent1"/>
+          </a:effectRef>
+          <a:fontRef idx="minor">
+            <a:schemeClr val="lt1"/>
+          </a:fontRef>
+        </p:style>
+        <p:txBody>
+          <a:bodyPr rtlCol="0" anchor="ctr"/>
+          <a:lstStyle/>
+          <a:p>
+            <a:pPr algn="ctr"/>
+          </a:p>
+        </p:txBody>
+      </p:sp>
+      <p:sp>
+        <p:nvSpPr>
+          <p:cNvPr id="10" name="TextBox 9"/>
+          <p:cNvSpPr txBox="1"/>
+          <p:nvPr/>
+        </p:nvSpPr>
+        <p:spPr>
+          <a:xfrm>
+            <a:off x="865628" y="2290000"/>
+            <a:ext cx="5030372" cy="320000"/>
+          </a:xfrm>
+          <a:prstGeom prst="rect">
+            <a:avLst/>
+          </a:prstGeom>
+          <a:noFill/>
+        </p:spPr>
+        <p:txBody>
+          <a:bodyPr wrap="square">
+            <a:spAutoFit/>
+          </a:bodyPr>
+          <a:lstStyle/>
+          <a:p>
+            <a:pPr algn="l"/>
+            <a:r>
+              <a:rPr sz="1400" b="0" i="0">
+                <a:solidFill>
+                  <a:srgbClr val="4A4A4A"/>
+                </a:solidFill>
+                <a:latin typeface="Geist"/>
+              </a:rPr>
+              <a:t>Branches: Power BI · Excel · Tableau · REST · OData</a:t>
+            </a:r>
+          </a:p>
+        </p:txBody>
+      </p:sp>
+      <p:sp>
+        <p:nvSpPr>
+          <p:cNvPr id="11" name="Rectangle 10"/>
+          <p:cNvSpPr/>
+          <p:nvPr/>
+        </p:nvSpPr>
+        <p:spPr>
+          <a:xfrm>
+            <a:off x="685628" y="2740000"/>
+            <a:ext cx="8000" cy="200000"/>
+          </a:xfrm>
+          <a:prstGeom prst="rect">
+            <a:avLst/>
+          </a:prstGeom>
+          <a:solidFill>
+            <a:srgbClr val="808080"/>
+          </a:solidFill>
+          <a:ln>
+            <a:noFill/>
+          </a:ln>
+        </p:spPr>
+        <p:style>
+          <a:lnRef idx="1">
+            <a:schemeClr val="accent1"/>
+          </a:lnRef>
+          <a:fillRef idx="3">
+            <a:schemeClr val="accent1"/>
+          </a:fillRef>
+          <a:effectRef idx="2">
+            <a:schemeClr val="accent1"/>
+          </a:effectRef>
+          <a:fontRef idx="minor">
+            <a:schemeClr val="lt1"/>
+          </a:fontRef>
+        </p:style>
+        <p:txBody>
+          <a:bodyPr rtlCol="0" anchor="ctr"/>
+          <a:lstStyle/>
+          <a:p>
+            <a:pPr algn="ctr"/>
+          </a:p>
+        </p:txBody>
+      </p:sp>
+      <p:sp>
+        <p:nvSpPr>
+          <p:cNvPr id="12" name="TextBox 11"/>
+          <p:cNvSpPr txBox="1"/>
+          <p:nvPr/>
+        </p:nvSpPr>
+        <p:spPr>
+          <a:xfrm>
+            <a:off x="865628" y="2670000"/>
+            <a:ext cx="5030372" cy="320000"/>
+          </a:xfrm>
+          <a:prstGeom prst="rect">
+            <a:avLst/>
+          </a:prstGeom>
+          <a:noFill/>
+        </p:spPr>
+        <p:txBody>
+          <a:bodyPr wrap="square">
+            <a:spAutoFit/>
+          </a:bodyPr>
+          <a:lstStyle/>
+          <a:p>
+            <a:pPr algn="l"/>
+            <a:r>
+              <a:rPr sz="1400" b="0" i="0">
+                <a:solidFill>
+                  <a:srgbClr val="4A4A4A"/>
+                </a:solidFill>
+                <a:latin typeface="Geist"/>
+              </a:rPr>
+              <a:t>No expected output shown</a:t>
+            </a:r>
+          </a:p>
+        </p:txBody>
+      </p:sp>
+      <p:sp>
+        <p:nvSpPr>
+          <p:cNvPr id="13" name="Rectangle 12"/>
+          <p:cNvSpPr/>
+          <p:nvPr/>
+        </p:nvSpPr>
+        <p:spPr>
+          <a:xfrm>
+            <a:off x="685628" y="3120000"/>
+            <a:ext cx="8000" cy="200000"/>
+          </a:xfrm>
+          <a:prstGeom prst="rect">
+            <a:avLst/>
+          </a:prstGeom>
+          <a:solidFill>
+            <a:srgbClr val="808080"/>
+          </a:solidFill>
+          <a:ln>
+            <a:noFill/>
+          </a:ln>
+        </p:spPr>
+        <p:style>
+          <a:lnRef idx="1">
+            <a:schemeClr val="accent1"/>
+          </a:lnRef>
+          <a:fillRef idx="3">
+            <a:schemeClr val="accent1"/>
+          </a:fillRef>
+          <a:effectRef idx="2">
+            <a:schemeClr val="accent1"/>
+          </a:effectRef>
+          <a:fontRef idx="minor">
+            <a:schemeClr val="lt1"/>
+          </a:fontRef>
+        </p:style>
+        <p:txBody>
+          <a:bodyPr rtlCol="0" anchor="ctr"/>
+          <a:lstStyle/>
+          <a:p>
+            <a:pPr algn="ctr"/>
+          </a:p>
+        </p:txBody>
+      </p:sp>
+      <p:sp>
+        <p:nvSpPr>
+          <p:cNvPr id="14" name="TextBox 13"/>
+          <p:cNvSpPr txBox="1"/>
+          <p:nvPr/>
+        </p:nvSpPr>
+        <p:spPr>
+          <a:xfrm>
+            <a:off x="865628" y="3050000"/>
+            <a:ext cx="5030372" cy="320000"/>
+          </a:xfrm>
+          <a:prstGeom prst="rect">
+            <a:avLst/>
+          </a:prstGeom>
+          <a:noFill/>
+        </p:spPr>
+        <p:txBody>
+          <a:bodyPr wrap="square">
+            <a:spAutoFit/>
+          </a:bodyPr>
+          <a:lstStyle/>
+          <a:p>
+            <a:pPr algn="l"/>
+            <a:r>
+              <a:rPr sz="1400" b="0" i="0">
+                <a:solidFill>
+                  <a:srgbClr val="4A4A4A"/>
+                </a:solidFill>
+                <a:latin typeface="Geist"/>
+              </a:rPr>
+              <a:t>Ends at "here are your options"</a:t>
+            </a:r>
+          </a:p>
+        </p:txBody>
+      </p:sp>
+      <p:sp>
+        <p:nvSpPr>
+          <p:cNvPr id="15" name="Rectangle 14"/>
+          <p:cNvSpPr/>
+          <p:nvPr/>
+        </p:nvSpPr>
+        <p:spPr>
+          <a:xfrm>
+            <a:off x="685628" y="3500000"/>
+            <a:ext cx="8000" cy="200000"/>
+          </a:xfrm>
+          <a:prstGeom prst="rect">
+            <a:avLst/>
+          </a:prstGeom>
+          <a:solidFill>
+            <a:srgbClr val="808080"/>
+          </a:solidFill>
+          <a:ln>
+            <a:noFill/>
+          </a:ln>
+        </p:spPr>
+        <p:style>
+          <a:lnRef idx="1">
+            <a:schemeClr val="accent1"/>
+          </a:lnRef>
+          <a:fillRef idx="3">
+            <a:schemeClr val="accent1"/>
+          </a:fillRef>
+          <a:effectRef idx="2">
+            <a:schemeClr val="accent1"/>
+          </a:effectRef>
+          <a:fontRef idx="minor">
+            <a:schemeClr val="lt1"/>
+          </a:fontRef>
+        </p:style>
+        <p:txBody>
+          <a:bodyPr rtlCol="0" anchor="ctr"/>
+          <a:lstStyle/>
+          <a:p>
+            <a:pPr algn="ctr"/>
+          </a:p>
+        </p:txBody>
+      </p:sp>
+      <p:sp>
+        <p:nvSpPr>
+          <p:cNvPr id="16" name="TextBox 15"/>
+          <p:cNvSpPr txBox="1"/>
+          <p:nvPr/>
+        </p:nvSpPr>
+        <p:spPr>
+          <a:xfrm>
+            <a:off x="865628" y="3430000"/>
+            <a:ext cx="5030372" cy="320000"/>
+          </a:xfrm>
+          <a:prstGeom prst="rect">
+            <a:avLst/>
+          </a:prstGeom>
+          <a:noFill/>
+        </p:spPr>
+        <p:txBody>
+          <a:bodyPr wrap="square">
+            <a:spAutoFit/>
+          </a:bodyPr>
+          <a:lstStyle/>
+          <a:p>
+            <a:pPr algn="l"/>
+            <a:r>
+              <a:rPr sz="1400" b="0" i="0">
+                <a:solidFill>
+                  <a:srgbClr val="4A4A4A"/>
+                </a:solidFill>
+                <a:latin typeface="Geist"/>
+              </a:rPr>
+              <a:t>MCP server and Python SDK: invisible</a:t>
+            </a:r>
+          </a:p>
+        </p:txBody>
+      </p:sp>
+      <p:sp>
+        <p:nvSpPr>
+          <p:cNvPr id="17" name="TextBox 16"/>
+          <p:cNvSpPr txBox="1"/>
+          <p:nvPr/>
+        </p:nvSpPr>
+        <p:spPr>
+          <a:xfrm>
+            <a:off x="5996000" y="2450000"/>
+            <a:ext cx="220000" cy="400000"/>
+          </a:xfrm>
+          <a:prstGeom prst="rect">
+            <a:avLst/>
+          </a:prstGeom>
+          <a:noFill/>
+        </p:spPr>
+        <p:txBody>
+          <a:bodyPr wrap="none">
+            <a:spAutoFit/>
+          </a:bodyPr>
+          <a:lstStyle/>
+          <a:p>
+            <a:pPr algn="l"/>
+            <a:r>
+              <a:rPr sz="3600" b="0" i="0">
+                <a:solidFill>
+                  <a:srgbClr val="FFE500"/>
+                </a:solidFill>
+                <a:latin typeface="Geist ExtraBold"/>
+              </a:rPr>
+              <a:t>→</a:t>
+            </a:r>
+          </a:p>
+        </p:txBody>
+      </p:sp>
+      <p:sp>
+        <p:nvSpPr>
+          <p:cNvPr id="18" name="Rectangle 17"/>
+          <p:cNvSpPr/>
+          <p:nvPr/>
+        </p:nvSpPr>
+        <p:spPr>
+          <a:xfrm>
+            <a:off x="6296000" y="1550000"/>
+            <a:ext cx="5210372" cy="280000"/>
+          </a:xfrm>
+          <a:prstGeom prst="rect">
+            <a:avLst/>
+          </a:prstGeom>
+          <a:solidFill>
+            <a:srgbClr val="FFE500"/>
+          </a:solidFill>
+          <a:ln>
+            <a:noFill/>
+          </a:ln>
+        </p:spPr>
+        <p:style>
+          <a:lnRef idx="1">
+            <a:schemeClr val="accent1"/>
+          </a:lnRef>
+          <a:fillRef idx="3">
+            <a:schemeClr val="accent1"/>
+          </a:fillRef>
+          <a:effectRef idx="2">
+            <a:schemeClr val="accent1"/>
+          </a:effectRef>
+          <a:fontRef idx="minor">
+            <a:schemeClr val="lt1"/>
+          </a:fontRef>
+        </p:style>
+        <p:txBody>
+          <a:bodyPr rtlCol="0" anchor="ctr"/>
+          <a:lstStyle/>
+          <a:p>
+            <a:pPr algn="ctr"/>
+          </a:p>
+        </p:txBody>
+      </p:sp>
+      <p:sp>
+        <p:nvSpPr>
+          <p:cNvPr id="19" name="TextBox 18"/>
+          <p:cNvSpPr txBox="1"/>
+          <p:nvPr/>
+        </p:nvSpPr>
+        <p:spPr>
+          <a:xfrm>
+            <a:off x="6416000" y="1610000"/>
+            <a:ext cx="4970372" cy="200000"/>
+          </a:xfrm>
+          <a:prstGeom prst="rect">
+            <a:avLst/>
+          </a:prstGeom>
+          <a:noFill/>
+        </p:spPr>
+        <p:txBody>
+          <a:bodyPr wrap="none">
+            <a:spAutoFit/>
+          </a:bodyPr>
+          <a:lstStyle/>
+          <a:p>
+            <a:pPr algn="l"/>
+            <a:r>
+              <a:rPr sz="1300" b="0" i="0">
                 <a:solidFill>
                   <a:srgbClr val="1A1A1A"/>
                 </a:solidFill>
-                <a:latin typeface="Courier New"/>
-              </a:rPr>
-              <a:t>"Building with Claude? Start here."</a:t>
-            </a:r>
-          </a:p>
-        </p:txBody>
-      </p:sp>
-      <p:sp>
-        <p:nvSpPr>
-          <p:cNvPr id="7" name="TextBox 6"/>
-          <p:cNvSpPr txBox="1"/>
-          <p:nvPr/>
-        </p:nvSpPr>
-        <p:spPr>
-          <a:xfrm>
-            <a:off x="685628" y="3800000"/>
-            <a:ext cx="10820744" cy="700000"/>
+                <a:latin typeface="Geist ExtraBold"/>
+              </a:rPr>
+              <a:t>What it should be</a:t>
+            </a:r>
+          </a:p>
+        </p:txBody>
+      </p:sp>
+      <p:sp>
+        <p:nvSpPr>
+          <p:cNvPr id="20" name="Rectangle 19"/>
+          <p:cNvSpPr/>
+          <p:nvPr/>
+        </p:nvSpPr>
+        <p:spPr>
+          <a:xfrm>
+            <a:off x="6296000" y="1980000"/>
+            <a:ext cx="8000" cy="200000"/>
+          </a:xfrm>
+          <a:prstGeom prst="rect">
+            <a:avLst/>
+          </a:prstGeom>
+          <a:solidFill>
+            <a:srgbClr val="1A1A1A"/>
+          </a:solidFill>
+          <a:ln>
+            <a:noFill/>
+          </a:ln>
+        </p:spPr>
+        <p:style>
+          <a:lnRef idx="1">
+            <a:schemeClr val="accent1"/>
+          </a:lnRef>
+          <a:fillRef idx="3">
+            <a:schemeClr val="accent1"/>
+          </a:fillRef>
+          <a:effectRef idx="2">
+            <a:schemeClr val="accent1"/>
+          </a:effectRef>
+          <a:fontRef idx="minor">
+            <a:schemeClr val="lt1"/>
+          </a:fontRef>
+        </p:style>
+        <p:txBody>
+          <a:bodyPr rtlCol="0" anchor="ctr"/>
+          <a:lstStyle/>
+          <a:p>
+            <a:pPr algn="ctr"/>
+          </a:p>
+        </p:txBody>
+      </p:sp>
+      <p:sp>
+        <p:nvSpPr>
+          <p:cNvPr id="21" name="TextBox 20"/>
+          <p:cNvSpPr txBox="1"/>
+          <p:nvPr/>
+        </p:nvSpPr>
+        <p:spPr>
+          <a:xfrm>
+            <a:off x="6476000" y="1910000"/>
+            <a:ext cx="5030372" cy="320000"/>
           </a:xfrm>
           <a:prstGeom prst="rect">
             <a:avLst/>
@@ -15729,27 +16276,70 @@
           <a:p>
             <a:pPr algn="l"/>
             <a:r>
-              <a:rPr sz="2000" b="0" i="0">
-                <a:solidFill>
-                  <a:srgbClr val="4A4A4A"/>
+              <a:rPr sz="1400" b="0" i="0">
+                <a:solidFill>
+                  <a:srgbClr val="1A1A1A"/>
                 </a:solidFill>
                 <a:latin typeface="Geist"/>
               </a:rPr>
-              <a:t>Build an agent-specific path into the existing quickstart. Link it from the Connect AI page.</a:t>
-            </a:r>
-          </a:p>
-        </p:txBody>
-      </p:sp>
-      <p:sp>
-        <p:nvSpPr>
-          <p:cNvPr id="8" name="TextBox 7"/>
-          <p:cNvSpPr txBox="1"/>
-          <p:nvPr/>
-        </p:nvSpPr>
-        <p:spPr>
-          <a:xfrm>
-            <a:off x="685628" y="4600000"/>
-            <a:ext cx="10820744" cy="600000"/>
+              <a:t>pip install cdata-connect-ai</a:t>
+            </a:r>
+          </a:p>
+        </p:txBody>
+      </p:sp>
+      <p:sp>
+        <p:nvSpPr>
+          <p:cNvPr id="22" name="Rectangle 21"/>
+          <p:cNvSpPr/>
+          <p:nvPr/>
+        </p:nvSpPr>
+        <p:spPr>
+          <a:xfrm>
+            <a:off x="6296000" y="2360000"/>
+            <a:ext cx="8000" cy="200000"/>
+          </a:xfrm>
+          <a:prstGeom prst="rect">
+            <a:avLst/>
+          </a:prstGeom>
+          <a:solidFill>
+            <a:srgbClr val="1A1A1A"/>
+          </a:solidFill>
+          <a:ln>
+            <a:noFill/>
+          </a:ln>
+        </p:spPr>
+        <p:style>
+          <a:lnRef idx="1">
+            <a:schemeClr val="accent1"/>
+          </a:lnRef>
+          <a:fillRef idx="3">
+            <a:schemeClr val="accent1"/>
+          </a:fillRef>
+          <a:effectRef idx="2">
+            <a:schemeClr val="accent1"/>
+          </a:effectRef>
+          <a:fontRef idx="minor">
+            <a:schemeClr val="lt1"/>
+          </a:fontRef>
+        </p:style>
+        <p:txBody>
+          <a:bodyPr rtlCol="0" anchor="ctr"/>
+          <a:lstStyle/>
+          <a:p>
+            <a:pPr algn="ctr"/>
+          </a:p>
+        </p:txBody>
+      </p:sp>
+      <p:sp>
+        <p:nvSpPr>
+          <p:cNvPr id="23" name="TextBox 22"/>
+          <p:cNvSpPr txBox="1"/>
+          <p:nvPr/>
+        </p:nvSpPr>
+        <p:spPr>
+          <a:xfrm>
+            <a:off x="6476000" y="2290000"/>
+            <a:ext cx="5030372" cy="320000"/>
           </a:xfrm>
           <a:prstGeom prst="rect">
             <a:avLst/>
@@ -15764,13 +16354,282 @@
           <a:p>
             <a:pPr algn="l"/>
             <a:r>
+              <a:rPr sz="1400" b="0" i="0">
+                <a:solidFill>
+                  <a:srgbClr val="1A1A1A"/>
+                </a:solidFill>
+                <a:latin typeface="Geist"/>
+              </a:rPr>
+              <a:t>Credentials: one step, not five</a:t>
+            </a:r>
+          </a:p>
+        </p:txBody>
+      </p:sp>
+      <p:sp>
+        <p:nvSpPr>
+          <p:cNvPr id="24" name="Rectangle 23"/>
+          <p:cNvSpPr/>
+          <p:nvPr/>
+        </p:nvSpPr>
+        <p:spPr>
+          <a:xfrm>
+            <a:off x="6296000" y="2740000"/>
+            <a:ext cx="8000" cy="200000"/>
+          </a:xfrm>
+          <a:prstGeom prst="rect">
+            <a:avLst/>
+          </a:prstGeom>
+          <a:solidFill>
+            <a:srgbClr val="1A1A1A"/>
+          </a:solidFill>
+          <a:ln>
+            <a:noFill/>
+          </a:ln>
+        </p:spPr>
+        <p:style>
+          <a:lnRef idx="1">
+            <a:schemeClr val="accent1"/>
+          </a:lnRef>
+          <a:fillRef idx="3">
+            <a:schemeClr val="accent1"/>
+          </a:fillRef>
+          <a:effectRef idx="2">
+            <a:schemeClr val="accent1"/>
+          </a:effectRef>
+          <a:fontRef idx="minor">
+            <a:schemeClr val="lt1"/>
+          </a:fontRef>
+        </p:style>
+        <p:txBody>
+          <a:bodyPr rtlCol="0" anchor="ctr"/>
+          <a:lstStyle/>
+          <a:p>
+            <a:pPr algn="ctr"/>
+          </a:p>
+        </p:txBody>
+      </p:sp>
+      <p:sp>
+        <p:nvSpPr>
+          <p:cNvPr id="25" name="TextBox 24"/>
+          <p:cNvSpPr txBox="1"/>
+          <p:nvPr/>
+        </p:nvSpPr>
+        <p:spPr>
+          <a:xfrm>
+            <a:off x="6476000" y="2670000"/>
+            <a:ext cx="5030372" cy="320000"/>
+          </a:xfrm>
+          <a:prstGeom prst="rect">
+            <a:avLst/>
+          </a:prstGeom>
+          <a:noFill/>
+        </p:spPr>
+        <p:txBody>
+          <a:bodyPr wrap="square">
+            <a:spAutoFit/>
+          </a:bodyPr>
+          <a:lstStyle/>
+          <a:p>
+            <a:pPr algn="l"/>
+            <a:r>
+              <a:rPr sz="1400" b="0" i="0">
+                <a:solidFill>
+                  <a:srgbClr val="1A1A1A"/>
+                </a:solidFill>
+                <a:latin typeface="Geist"/>
+              </a:rPr>
+              <a:t>10 lines of code → run it → see output</a:t>
+            </a:r>
+          </a:p>
+        </p:txBody>
+      </p:sp>
+      <p:sp>
+        <p:nvSpPr>
+          <p:cNvPr id="26" name="Rectangle 25"/>
+          <p:cNvSpPr/>
+          <p:nvPr/>
+        </p:nvSpPr>
+        <p:spPr>
+          <a:xfrm>
+            <a:off x="6296000" y="3120000"/>
+            <a:ext cx="8000" cy="200000"/>
+          </a:xfrm>
+          <a:prstGeom prst="rect">
+            <a:avLst/>
+          </a:prstGeom>
+          <a:solidFill>
+            <a:srgbClr val="1A1A1A"/>
+          </a:solidFill>
+          <a:ln>
+            <a:noFill/>
+          </a:ln>
+        </p:spPr>
+        <p:style>
+          <a:lnRef idx="1">
+            <a:schemeClr val="accent1"/>
+          </a:lnRef>
+          <a:fillRef idx="3">
+            <a:schemeClr val="accent1"/>
+          </a:fillRef>
+          <a:effectRef idx="2">
+            <a:schemeClr val="accent1"/>
+          </a:effectRef>
+          <a:fontRef idx="minor">
+            <a:schemeClr val="lt1"/>
+          </a:fontRef>
+        </p:style>
+        <p:txBody>
+          <a:bodyPr rtlCol="0" anchor="ctr"/>
+          <a:lstStyle/>
+          <a:p>
+            <a:pPr algn="ctr"/>
+          </a:p>
+        </p:txBody>
+      </p:sp>
+      <p:sp>
+        <p:nvSpPr>
+          <p:cNvPr id="27" name="TextBox 26"/>
+          <p:cNvSpPr txBox="1"/>
+          <p:nvPr/>
+        </p:nvSpPr>
+        <p:spPr>
+          <a:xfrm>
+            <a:off x="6476000" y="3050000"/>
+            <a:ext cx="5030372" cy="320000"/>
+          </a:xfrm>
+          <a:prstGeom prst="rect">
+            <a:avLst/>
+          </a:prstGeom>
+          <a:noFill/>
+        </p:spPr>
+        <p:txBody>
+          <a:bodyPr wrap="square">
+            <a:spAutoFit/>
+          </a:bodyPr>
+          <a:lstStyle/>
+          <a:p>
+            <a:pPr algn="l"/>
+            <a:r>
+              <a:rPr sz="1400" b="0" i="0">
+                <a:solidFill>
+                  <a:srgbClr val="1A1A1A"/>
+                </a:solidFill>
+                <a:latin typeface="Geist"/>
+              </a:rPr>
+              <a:t>Shows exactly what success looks like</a:t>
+            </a:r>
+          </a:p>
+        </p:txBody>
+      </p:sp>
+      <p:sp>
+        <p:nvSpPr>
+          <p:cNvPr id="28" name="Rectangle 27"/>
+          <p:cNvSpPr/>
+          <p:nvPr/>
+        </p:nvSpPr>
+        <p:spPr>
+          <a:xfrm>
+            <a:off x="6296000" y="3500000"/>
+            <a:ext cx="8000" cy="200000"/>
+          </a:xfrm>
+          <a:prstGeom prst="rect">
+            <a:avLst/>
+          </a:prstGeom>
+          <a:solidFill>
+            <a:srgbClr val="1A1A1A"/>
+          </a:solidFill>
+          <a:ln>
+            <a:noFill/>
+          </a:ln>
+        </p:spPr>
+        <p:style>
+          <a:lnRef idx="1">
+            <a:schemeClr val="accent1"/>
+          </a:lnRef>
+          <a:fillRef idx="3">
+            <a:schemeClr val="accent1"/>
+          </a:fillRef>
+          <a:effectRef idx="2">
+            <a:schemeClr val="accent1"/>
+          </a:effectRef>
+          <a:fontRef idx="minor">
+            <a:schemeClr val="lt1"/>
+          </a:fontRef>
+        </p:style>
+        <p:txBody>
+          <a:bodyPr rtlCol="0" anchor="ctr"/>
+          <a:lstStyle/>
+          <a:p>
+            <a:pPr algn="ctr"/>
+          </a:p>
+        </p:txBody>
+      </p:sp>
+      <p:sp>
+        <p:nvSpPr>
+          <p:cNvPr id="29" name="TextBox 28"/>
+          <p:cNvSpPr txBox="1"/>
+          <p:nvPr/>
+        </p:nvSpPr>
+        <p:spPr>
+          <a:xfrm>
+            <a:off x="6476000" y="3430000"/>
+            <a:ext cx="5030372" cy="320000"/>
+          </a:xfrm>
+          <a:prstGeom prst="rect">
+            <a:avLst/>
+          </a:prstGeom>
+          <a:noFill/>
+        </p:spPr>
+        <p:txBody>
+          <a:bodyPr wrap="square">
+            <a:spAutoFit/>
+          </a:bodyPr>
+          <a:lstStyle/>
+          <a:p>
+            <a:pPr algn="l"/>
+            <a:r>
+              <a:rPr sz="1400" b="0" i="0">
+                <a:solidFill>
+                  <a:srgbClr val="1A1A1A"/>
+                </a:solidFill>
+                <a:latin typeface="Geist"/>
+              </a:rPr>
+              <a:t>Ends with a working agent querying real data</a:t>
+            </a:r>
+          </a:p>
+        </p:txBody>
+      </p:sp>
+      <p:sp>
+        <p:nvSpPr>
+          <p:cNvPr id="30" name="TextBox 29"/>
+          <p:cNvSpPr txBox="1"/>
+          <p:nvPr/>
+        </p:nvSpPr>
+        <p:spPr>
+          <a:xfrm>
+            <a:off x="685628" y="4700000"/>
+            <a:ext cx="10820744" cy="500000"/>
+          </a:xfrm>
+          <a:prstGeom prst="rect">
+            <a:avLst/>
+          </a:prstGeom>
+          <a:noFill/>
+        </p:spPr>
+        <p:txBody>
+          <a:bodyPr wrap="square">
+            <a:spAutoFit/>
+          </a:bodyPr>
+          <a:lstStyle/>
+          <a:p>
+            <a:pPr algn="l"/>
+            <a:r>
               <a:rPr sz="1800" b="0" i="0">
                 <a:solidFill>
-                  <a:srgbClr val="808080"/>
-                </a:solidFill>
-                <a:latin typeface="Geist"/>
-              </a:rPr>
-              <a:t>This is content work, not a product change. Tested with a stopwatch before it ships.</a:t>
+                  <a:srgbClr val="1A1A1A"/>
+                </a:solidFill>
+                <a:latin typeface="Geist ExtraBold"/>
+              </a:rPr>
+              <a:t>Time-to-first-successful-query is the metric. Right now we're not measuring it — and it shows.</a:t>
             </a:r>
           </a:p>
         </p:txBody>
@@ -15855,7 +16714,7 @@
                 </a:solidFill>
                 <a:latin typeface="DM Sans"/>
               </a:rPr>
-              <a:t>DAYS 31–60</a:t>
+              <a:t>DAYS 1–30</a:t>
             </a:r>
           </a:p>
         </p:txBody>
@@ -15869,7 +16728,7 @@
         <p:spPr>
           <a:xfrm>
             <a:off x="685628" y="620000"/>
-            <a:ext cx="10820744" cy="500000"/>
+            <a:ext cx="10820744" cy="800000"/>
           </a:xfrm>
           <a:prstGeom prst="rect">
             <a:avLst/>
@@ -15884,384 +16743,29 @@
           <a:p>
             <a:pPr algn="l"/>
             <a:r>
-              <a:rPr sz="3200" b="0" i="0">
+              <a:rPr sz="4400" b="0" i="0">
                 <a:solidFill>
                   <a:srgbClr val="1A1A1A"/>
                 </a:solidFill>
                 <a:latin typeface="Geist ExtraBold"/>
               </a:rPr>
-              <a:t>Two tracks. One ships Day 31 — the other follows data.</a:t>
-            </a:r>
-          </a:p>
-        </p:txBody>
-      </p:sp>
-      <p:sp>
-        <p:nvSpPr>
-          <p:cNvPr id="5" name="Rectangle 4"/>
+              <a:t>AI developer entry point.</a:t>
+            </a:r>
+          </a:p>
+        </p:txBody>
+      </p:sp>
+      <p:sp>
+        <p:nvSpPr>
+          <p:cNvPr id="5" name="Rounded Rectangle 4"/>
           <p:cNvSpPr/>
           <p:nvPr/>
         </p:nvSpPr>
         <p:spPr>
           <a:xfrm>
-            <a:off x="685628" y="1350000"/>
-            <a:ext cx="4900000" cy="280000"/>
-          </a:xfrm>
-          <a:prstGeom prst="rect">
-            <a:avLst/>
-          </a:prstGeom>
-          <a:solidFill>
-            <a:srgbClr val="FFE500"/>
-          </a:solidFill>
-          <a:ln>
-            <a:noFill/>
-          </a:ln>
-        </p:spPr>
-        <p:style>
-          <a:lnRef idx="1">
-            <a:schemeClr val="accent1"/>
-          </a:lnRef>
-          <a:fillRef idx="3">
-            <a:schemeClr val="accent1"/>
-          </a:fillRef>
-          <a:effectRef idx="2">
-            <a:schemeClr val="accent1"/>
-          </a:effectRef>
-          <a:fontRef idx="minor">
-            <a:schemeClr val="lt1"/>
-          </a:fontRef>
-        </p:style>
-        <p:txBody>
-          <a:bodyPr rtlCol="0" anchor="ctr"/>
-          <a:lstStyle/>
-          <a:p>
-            <a:pPr algn="ctr"/>
-          </a:p>
-        </p:txBody>
-      </p:sp>
-      <p:sp>
-        <p:nvSpPr>
-          <p:cNvPr id="6" name="TextBox 5"/>
-          <p:cNvSpPr txBox="1"/>
-          <p:nvPr/>
-        </p:nvSpPr>
-        <p:spPr>
-          <a:xfrm>
-            <a:off x="805628" y="1400000"/>
-            <a:ext cx="4660000" cy="200000"/>
-          </a:xfrm>
-          <a:prstGeom prst="rect">
-            <a:avLst/>
-          </a:prstGeom>
-          <a:noFill/>
-        </p:spPr>
-        <p:txBody>
-          <a:bodyPr wrap="none">
-            <a:spAutoFit/>
-          </a:bodyPr>
-          <a:lstStyle/>
-          <a:p>
-            <a:pPr algn="l"/>
-            <a:r>
-              <a:rPr sz="1300" b="0" i="0">
-                <a:solidFill>
-                  <a:srgbClr val="1A1A1A"/>
-                </a:solidFill>
-                <a:latin typeface="Geist ExtraBold"/>
-              </a:rPr>
-              <a:t>Ships Day 31 — no signal needed</a:t>
-            </a:r>
-          </a:p>
-        </p:txBody>
-      </p:sp>
-      <p:sp>
-        <p:nvSpPr>
-          <p:cNvPr id="7" name="Rectangle 6"/>
-          <p:cNvSpPr/>
-          <p:nvPr/>
-        </p:nvSpPr>
-        <p:spPr>
-          <a:xfrm>
-            <a:off x="685628" y="1770000"/>
-            <a:ext cx="8000" cy="200000"/>
-          </a:xfrm>
-          <a:prstGeom prst="rect">
-            <a:avLst/>
-          </a:prstGeom>
-          <a:solidFill>
-            <a:srgbClr val="1A1A1A"/>
-          </a:solidFill>
-          <a:ln>
-            <a:noFill/>
-          </a:ln>
-        </p:spPr>
-        <p:style>
-          <a:lnRef idx="1">
-            <a:schemeClr val="accent1"/>
-          </a:lnRef>
-          <a:fillRef idx="3">
-            <a:schemeClr val="accent1"/>
-          </a:fillRef>
-          <a:effectRef idx="2">
-            <a:schemeClr val="accent1"/>
-          </a:effectRef>
-          <a:fontRef idx="minor">
-            <a:schemeClr val="lt1"/>
-          </a:fontRef>
-        </p:style>
-        <p:txBody>
-          <a:bodyPr rtlCol="0" anchor="ctr"/>
-          <a:lstStyle/>
-          <a:p>
-            <a:pPr algn="ctr"/>
-          </a:p>
-        </p:txBody>
-      </p:sp>
-      <p:sp>
-        <p:nvSpPr>
-          <p:cNvPr id="8" name="TextBox 7"/>
-          <p:cNvSpPr txBox="1"/>
-          <p:nvPr/>
-        </p:nvSpPr>
-        <p:spPr>
-          <a:xfrm>
-            <a:off x="865628" y="1710000"/>
-            <a:ext cx="4720000" cy="320000"/>
-          </a:xfrm>
-          <a:prstGeom prst="rect">
-            <a:avLst/>
-          </a:prstGeom>
-          <a:noFill/>
-        </p:spPr>
-        <p:txBody>
-          <a:bodyPr wrap="square">
-            <a:spAutoFit/>
-          </a:bodyPr>
-          <a:lstStyle/>
-          <a:p>
-            <a:pPr algn="l"/>
-            <a:r>
-              <a:rPr sz="1500" b="0" i="0">
-                <a:solidFill>
-                  <a:srgbClr val="1A1A1A"/>
-                </a:solidFill>
-                <a:latin typeface="Geist"/>
-              </a:rPr>
-              <a:t>Re-run LLM baseline — day 60 vs day 30</a:t>
-            </a:r>
-          </a:p>
-        </p:txBody>
-      </p:sp>
-      <p:sp>
-        <p:nvSpPr>
-          <p:cNvPr id="9" name="Rectangle 8"/>
-          <p:cNvSpPr/>
-          <p:nvPr/>
-        </p:nvSpPr>
-        <p:spPr>
-          <a:xfrm>
-            <a:off x="685628" y="2170000"/>
-            <a:ext cx="8000" cy="200000"/>
-          </a:xfrm>
-          <a:prstGeom prst="rect">
-            <a:avLst/>
-          </a:prstGeom>
-          <a:solidFill>
-            <a:srgbClr val="1A1A1A"/>
-          </a:solidFill>
-          <a:ln>
-            <a:noFill/>
-          </a:ln>
-        </p:spPr>
-        <p:style>
-          <a:lnRef idx="1">
-            <a:schemeClr val="accent1"/>
-          </a:lnRef>
-          <a:fillRef idx="3">
-            <a:schemeClr val="accent1"/>
-          </a:fillRef>
-          <a:effectRef idx="2">
-            <a:schemeClr val="accent1"/>
-          </a:effectRef>
-          <a:fontRef idx="minor">
-            <a:schemeClr val="lt1"/>
-          </a:fontRef>
-        </p:style>
-        <p:txBody>
-          <a:bodyPr rtlCol="0" anchor="ctr"/>
-          <a:lstStyle/>
-          <a:p>
-            <a:pPr algn="ctr"/>
-          </a:p>
-        </p:txBody>
-      </p:sp>
-      <p:sp>
-        <p:nvSpPr>
-          <p:cNvPr id="10" name="TextBox 9"/>
-          <p:cNvSpPr txBox="1"/>
-          <p:nvPr/>
-        </p:nvSpPr>
-        <p:spPr>
-          <a:xfrm>
-            <a:off x="865628" y="2110000"/>
-            <a:ext cx="4720000" cy="320000"/>
-          </a:xfrm>
-          <a:prstGeom prst="rect">
-            <a:avLst/>
-          </a:prstGeom>
-          <a:noFill/>
-        </p:spPr>
-        <p:txBody>
-          <a:bodyPr wrap="square">
-            <a:spAutoFit/>
-          </a:bodyPr>
-          <a:lstStyle/>
-          <a:p>
-            <a:pPr algn="l"/>
-            <a:r>
-              <a:rPr sz="1500" b="0" i="0">
-                <a:solidFill>
-                  <a:srgbClr val="1A1A1A"/>
-                </a:solidFill>
-                <a:latin typeface="Geist"/>
-              </a:rPr>
-              <a:t>Composio vs CData honest comparison (the "which should I use?" piece)</a:t>
-            </a:r>
-          </a:p>
-        </p:txBody>
-      </p:sp>
-      <p:sp>
-        <p:nvSpPr>
-          <p:cNvPr id="11" name="Rectangle 10"/>
-          <p:cNvSpPr/>
-          <p:nvPr/>
-        </p:nvSpPr>
-        <p:spPr>
-          <a:xfrm>
-            <a:off x="685628" y="2570000"/>
-            <a:ext cx="8000" cy="200000"/>
-          </a:xfrm>
-          <a:prstGeom prst="rect">
-            <a:avLst/>
-          </a:prstGeom>
-          <a:solidFill>
-            <a:srgbClr val="1A1A1A"/>
-          </a:solidFill>
-          <a:ln>
-            <a:noFill/>
-          </a:ln>
-        </p:spPr>
-        <p:style>
-          <a:lnRef idx="1">
-            <a:schemeClr val="accent1"/>
-          </a:lnRef>
-          <a:fillRef idx="3">
-            <a:schemeClr val="accent1"/>
-          </a:fillRef>
-          <a:effectRef idx="2">
-            <a:schemeClr val="accent1"/>
-          </a:effectRef>
-          <a:fontRef idx="minor">
-            <a:schemeClr val="lt1"/>
-          </a:fontRef>
-        </p:style>
-        <p:txBody>
-          <a:bodyPr rtlCol="0" anchor="ctr"/>
-          <a:lstStyle/>
-          <a:p>
-            <a:pPr algn="ctr"/>
-          </a:p>
-        </p:txBody>
-      </p:sp>
-      <p:sp>
-        <p:nvSpPr>
-          <p:cNvPr id="12" name="TextBox 11"/>
-          <p:cNvSpPr txBox="1"/>
-          <p:nvPr/>
-        </p:nvSpPr>
-        <p:spPr>
-          <a:xfrm>
-            <a:off x="865628" y="2510000"/>
-            <a:ext cx="4720000" cy="320000"/>
-          </a:xfrm>
-          <a:prstGeom prst="rect">
-            <a:avLst/>
-          </a:prstGeom>
-          <a:noFill/>
-        </p:spPr>
-        <p:txBody>
-          <a:bodyPr wrap="square">
-            <a:spAutoFit/>
-          </a:bodyPr>
-          <a:lstStyle/>
-          <a:p>
-            <a:pPr algn="l"/>
-            <a:r>
-              <a:rPr sz="1500" b="0" i="0">
-                <a:solidFill>
-                  <a:srgbClr val="1A1A1A"/>
-                </a:solidFill>
-                <a:latin typeface="Geist"/>
-              </a:rPr>
-              <a:t>Fix all 5 AI doc standard misses from the audit</a:t>
-            </a:r>
-          </a:p>
-        </p:txBody>
-      </p:sp>
-      <p:sp>
-        <p:nvSpPr>
-          <p:cNvPr id="13" name="Rectangle 12"/>
-          <p:cNvSpPr/>
-          <p:nvPr/>
-        </p:nvSpPr>
-        <p:spPr>
-          <a:xfrm>
-            <a:off x="5785628" y="1350000"/>
-            <a:ext cx="5000" cy="1600000"/>
-          </a:xfrm>
-          <a:prstGeom prst="rect">
-            <a:avLst/>
-          </a:prstGeom>
-          <a:solidFill>
-            <a:srgbClr val="D0D0C8"/>
-          </a:solidFill>
-          <a:ln>
-            <a:noFill/>
-          </a:ln>
-        </p:spPr>
-        <p:style>
-          <a:lnRef idx="1">
-            <a:schemeClr val="accent1"/>
-          </a:lnRef>
-          <a:fillRef idx="3">
-            <a:schemeClr val="accent1"/>
-          </a:fillRef>
-          <a:effectRef idx="2">
-            <a:schemeClr val="accent1"/>
-          </a:effectRef>
-          <a:fontRef idx="minor">
-            <a:schemeClr val="lt1"/>
-          </a:fontRef>
-        </p:style>
-        <p:txBody>
-          <a:bodyPr rtlCol="0" anchor="ctr"/>
-          <a:lstStyle/>
-          <a:p>
-            <a:pPr algn="ctr"/>
-          </a:p>
-        </p:txBody>
-      </p:sp>
-      <p:sp>
-        <p:nvSpPr>
-          <p:cNvPr id="14" name="Rectangle 13"/>
-          <p:cNvSpPr/>
-          <p:nvPr/>
-        </p:nvSpPr>
-        <p:spPr>
-          <a:xfrm>
-            <a:off x="5985628" y="1350000"/>
-            <a:ext cx="5520744" cy="280000"/>
-          </a:xfrm>
-          <a:prstGeom prst="rect">
+            <a:off x="685628" y="1900000"/>
+            <a:ext cx="10820744" cy="1600000"/>
+          </a:xfrm>
+          <a:prstGeom prst="roundRect">
             <a:avLst/>
           </a:prstGeom>
           <a:solidFill>
@@ -16295,84 +16799,49 @@
       </p:sp>
       <p:sp>
         <p:nvSpPr>
-          <p:cNvPr id="15" name="TextBox 14"/>
-          <p:cNvSpPr txBox="1"/>
-          <p:nvPr/>
-        </p:nvSpPr>
-        <p:spPr>
-          <a:xfrm>
-            <a:off x="6065628" y="1400000"/>
-            <a:ext cx="5360744" cy="200000"/>
-          </a:xfrm>
-          <a:prstGeom prst="rect">
-            <a:avLst/>
-          </a:prstGeom>
-          <a:noFill/>
-        </p:spPr>
-        <p:txBody>
-          <a:bodyPr wrap="none">
-            <a:spAutoFit/>
-          </a:bodyPr>
-          <a:lstStyle/>
-          <a:p>
-            <a:pPr algn="l"/>
-            <a:r>
-              <a:rPr sz="1300" b="0" i="0">
+          <p:cNvPr id="6" name="TextBox 5"/>
+          <p:cNvSpPr txBox="1"/>
+          <p:nvPr/>
+        </p:nvSpPr>
+        <p:spPr>
+          <a:xfrm>
+            <a:off x="1085628" y="2200000"/>
+            <a:ext cx="10020744" cy="600000"/>
+          </a:xfrm>
+          <a:prstGeom prst="rect">
+            <a:avLst/>
+          </a:prstGeom>
+          <a:noFill/>
+        </p:spPr>
+        <p:txBody>
+          <a:bodyPr wrap="square">
+            <a:spAutoFit/>
+          </a:bodyPr>
+          <a:lstStyle/>
+          <a:p>
+            <a:pPr algn="l"/>
+            <a:r>
+              <a:rPr sz="2600" b="1" i="0">
                 <a:solidFill>
                   <a:srgbClr val="1A1A1A"/>
                 </a:solidFill>
-                <a:latin typeface="Geist ExtraBold"/>
-              </a:rPr>
-              <a:t>Day 30 data decides</a:t>
-            </a:r>
-          </a:p>
-        </p:txBody>
-      </p:sp>
-      <p:sp>
-        <p:nvSpPr>
-          <p:cNvPr id="16" name="TextBox 15"/>
-          <p:cNvSpPr txBox="1"/>
-          <p:nvPr/>
-        </p:nvSpPr>
-        <p:spPr>
-          <a:xfrm>
-            <a:off x="5985628" y="1710000"/>
-            <a:ext cx="5520744" cy="200000"/>
-          </a:xfrm>
-          <a:prstGeom prst="rect">
-            <a:avLst/>
-          </a:prstGeom>
-          <a:noFill/>
-        </p:spPr>
-        <p:txBody>
-          <a:bodyPr wrap="none">
-            <a:spAutoFit/>
-          </a:bodyPr>
-          <a:lstStyle/>
-          <a:p>
-            <a:pPr algn="l"/>
-            <a:r>
-              <a:rPr sz="1400" b="0" i="0">
-                <a:solidFill>
-                  <a:srgbClr val="1A1A1A"/>
-                </a:solidFill>
-                <a:latin typeface="Geist ExtraBold"/>
-              </a:rPr>
-              <a:t>Discovery bottleneck</a:t>
-            </a:r>
-          </a:p>
-        </p:txBody>
-      </p:sp>
-      <p:sp>
-        <p:nvSpPr>
-          <p:cNvPr id="17" name="TextBox 16"/>
-          <p:cNvSpPr txBox="1"/>
-          <p:nvPr/>
-        </p:nvSpPr>
-        <p:spPr>
-          <a:xfrm>
-            <a:off x="5985628" y="1910000"/>
-            <a:ext cx="5520744" cy="180000"/>
+                <a:latin typeface="Courier New"/>
+              </a:rPr>
+              <a:t>"Building with Claude? Start here."</a:t>
+            </a:r>
+          </a:p>
+        </p:txBody>
+      </p:sp>
+      <p:sp>
+        <p:nvSpPr>
+          <p:cNvPr id="7" name="TextBox 6"/>
+          <p:cNvSpPr txBox="1"/>
+          <p:nvPr/>
+        </p:nvSpPr>
+        <p:spPr>
+          <a:xfrm>
+            <a:off x="685628" y="3800000"/>
+            <a:ext cx="10820744" cy="700000"/>
           </a:xfrm>
           <a:prstGeom prst="rect">
             <a:avLst/>
@@ -16387,62 +16856,27 @@
           <a:p>
             <a:pPr algn="l"/>
             <a:r>
-              <a:rPr sz="1300" b="0" i="0">
+              <a:rPr sz="2000" b="0" i="0">
                 <a:solidFill>
                   <a:srgbClr val="4A4A4A"/>
                 </a:solidFill>
                 <a:latin typeface="Geist"/>
               </a:rPr>
-              <a:t>→ SEO + LLM presence content</a:t>
-            </a:r>
-          </a:p>
-        </p:txBody>
-      </p:sp>
-      <p:sp>
-        <p:nvSpPr>
-          <p:cNvPr id="18" name="TextBox 17"/>
-          <p:cNvSpPr txBox="1"/>
-          <p:nvPr/>
-        </p:nvSpPr>
-        <p:spPr>
-          <a:xfrm>
-            <a:off x="5985628" y="2190000"/>
-            <a:ext cx="5520744" cy="200000"/>
-          </a:xfrm>
-          <a:prstGeom prst="rect">
-            <a:avLst/>
-          </a:prstGeom>
-          <a:noFill/>
-        </p:spPr>
-        <p:txBody>
-          <a:bodyPr wrap="none">
-            <a:spAutoFit/>
-          </a:bodyPr>
-          <a:lstStyle/>
-          <a:p>
-            <a:pPr algn="l"/>
-            <a:r>
-              <a:rPr sz="1400" b="0" i="0">
-                <a:solidFill>
-                  <a:srgbClr val="1A1A1A"/>
-                </a:solidFill>
-                <a:latin typeface="Geist ExtraBold"/>
-              </a:rPr>
-              <a:t>Evaluation drop-off</a:t>
-            </a:r>
-          </a:p>
-        </p:txBody>
-      </p:sp>
-      <p:sp>
-        <p:nvSpPr>
-          <p:cNvPr id="19" name="TextBox 18"/>
-          <p:cNvSpPr txBox="1"/>
-          <p:nvPr/>
-        </p:nvSpPr>
-        <p:spPr>
-          <a:xfrm>
-            <a:off x="5985628" y="2390000"/>
-            <a:ext cx="5520744" cy="180000"/>
+              <a:t>Build an agent-specific path into the existing quickstart. Link it from the Connect AI page.</a:t>
+            </a:r>
+          </a:p>
+        </p:txBody>
+      </p:sp>
+      <p:sp>
+        <p:nvSpPr>
+          <p:cNvPr id="8" name="TextBox 7"/>
+          <p:cNvSpPr txBox="1"/>
+          <p:nvPr/>
+        </p:nvSpPr>
+        <p:spPr>
+          <a:xfrm>
+            <a:off x="685628" y="4600000"/>
+            <a:ext cx="10820744" cy="600000"/>
           </a:xfrm>
           <a:prstGeom prst="rect">
             <a:avLst/>
@@ -16457,196 +16891,13 @@
           <a:p>
             <a:pPr algn="l"/>
             <a:r>
-              <a:rPr sz="1300" b="0" i="0">
-                <a:solidFill>
-                  <a:srgbClr val="4A4A4A"/>
+              <a:rPr sz="1800" b="0" i="0">
+                <a:solidFill>
+                  <a:srgbClr val="808080"/>
                 </a:solidFill>
                 <a:latin typeface="Geist"/>
               </a:rPr>
-              <a:t>→ Comparison content + quickstart fix</a:t>
-            </a:r>
-          </a:p>
-        </p:txBody>
-      </p:sp>
-      <p:sp>
-        <p:nvSpPr>
-          <p:cNvPr id="20" name="TextBox 19"/>
-          <p:cNvSpPr txBox="1"/>
-          <p:nvPr/>
-        </p:nvSpPr>
-        <p:spPr>
-          <a:xfrm>
-            <a:off x="5985628" y="2670000"/>
-            <a:ext cx="5520744" cy="200000"/>
-          </a:xfrm>
-          <a:prstGeom prst="rect">
-            <a:avLst/>
-          </a:prstGeom>
-          <a:noFill/>
-        </p:spPr>
-        <p:txBody>
-          <a:bodyPr wrap="none">
-            <a:spAutoFit/>
-          </a:bodyPr>
-          <a:lstStyle/>
-          <a:p>
-            <a:pPr algn="l"/>
-            <a:r>
-              <a:rPr sz="1400" b="0" i="0">
-                <a:solidFill>
-                  <a:srgbClr val="1A1A1A"/>
-                </a:solidFill>
-                <a:latin typeface="Geist ExtraBold"/>
-              </a:rPr>
-              <a:t>Activation friction</a:t>
-            </a:r>
-          </a:p>
-        </p:txBody>
-      </p:sp>
-      <p:sp>
-        <p:nvSpPr>
-          <p:cNvPr id="21" name="TextBox 20"/>
-          <p:cNvSpPr txBox="1"/>
-          <p:nvPr/>
-        </p:nvSpPr>
-        <p:spPr>
-          <a:xfrm>
-            <a:off x="5985628" y="2870000"/>
-            <a:ext cx="5520744" cy="180000"/>
-          </a:xfrm>
-          <a:prstGeom prst="rect">
-            <a:avLst/>
-          </a:prstGeom>
-          <a:noFill/>
-        </p:spPr>
-        <p:txBody>
-          <a:bodyPr wrap="square">
-            <a:spAutoFit/>
-          </a:bodyPr>
-          <a:lstStyle/>
-          <a:p>
-            <a:pPr algn="l"/>
-            <a:r>
-              <a:rPr sz="1300" b="0" i="0">
-                <a:solidFill>
-                  <a:srgbClr val="4A4A4A"/>
-                </a:solidFill>
-                <a:latin typeface="Geist"/>
-              </a:rPr>
-              <a:t>→ DX improvements + error messages</a:t>
-            </a:r>
-          </a:p>
-        </p:txBody>
-      </p:sp>
-      <p:sp>
-        <p:nvSpPr>
-          <p:cNvPr id="22" name="Rectangle 21"/>
-          <p:cNvSpPr/>
-          <p:nvPr/>
-        </p:nvSpPr>
-        <p:spPr>
-          <a:xfrm>
-            <a:off x="685628" y="3250000"/>
-            <a:ext cx="10820744" cy="600000"/>
-          </a:xfrm>
-          <a:prstGeom prst="rect">
-            <a:avLst/>
-          </a:prstGeom>
-          <a:solidFill>
-            <a:srgbClr val="ECEDE8"/>
-          </a:solidFill>
-          <a:ln>
-            <a:noFill/>
-          </a:ln>
-        </p:spPr>
-        <p:style>
-          <a:lnRef idx="1">
-            <a:schemeClr val="accent1"/>
-          </a:lnRef>
-          <a:fillRef idx="3">
-            <a:schemeClr val="accent1"/>
-          </a:fillRef>
-          <a:effectRef idx="2">
-            <a:schemeClr val="accent1"/>
-          </a:effectRef>
-          <a:fontRef idx="minor">
-            <a:schemeClr val="lt1"/>
-          </a:fontRef>
-        </p:style>
-        <p:txBody>
-          <a:bodyPr rtlCol="0" anchor="ctr"/>
-          <a:lstStyle/>
-          <a:p>
-            <a:pPr algn="ctr"/>
-          </a:p>
-        </p:txBody>
-      </p:sp>
-      <p:sp>
-        <p:nvSpPr>
-          <p:cNvPr id="23" name="TextBox 22"/>
-          <p:cNvSpPr txBox="1"/>
-          <p:nvPr/>
-        </p:nvSpPr>
-        <p:spPr>
-          <a:xfrm>
-            <a:off x="885628" y="3330000"/>
-            <a:ext cx="1900000" cy="280000"/>
-          </a:xfrm>
-          <a:prstGeom prst="rect">
-            <a:avLst/>
-          </a:prstGeom>
-          <a:noFill/>
-        </p:spPr>
-        <p:txBody>
-          <a:bodyPr wrap="none">
-            <a:spAutoFit/>
-          </a:bodyPr>
-          <a:lstStyle/>
-          <a:p>
-            <a:pPr algn="l"/>
-            <a:r>
-              <a:rPr sz="1400" b="0" i="0">
-                <a:solidFill>
-                  <a:srgbClr val="1A1A1A"/>
-                </a:solidFill>
-                <a:latin typeface="Geist ExtraBold"/>
-              </a:rPr>
-              <a:t>Product track</a:t>
-            </a:r>
-          </a:p>
-        </p:txBody>
-      </p:sp>
-      <p:sp>
-        <p:nvSpPr>
-          <p:cNvPr id="24" name="TextBox 23"/>
-          <p:cNvSpPr txBox="1"/>
-          <p:nvPr/>
-        </p:nvSpPr>
-        <p:spPr>
-          <a:xfrm>
-            <a:off x="2785628" y="3330000"/>
-            <a:ext cx="8520744" cy="400000"/>
-          </a:xfrm>
-          <a:prstGeom prst="rect">
-            <a:avLst/>
-          </a:prstGeom>
-          <a:noFill/>
-        </p:spPr>
-        <p:txBody>
-          <a:bodyPr wrap="square">
-            <a:spAutoFit/>
-          </a:bodyPr>
-          <a:lstStyle/>
-          <a:p>
-            <a:pPr algn="l"/>
-            <a:r>
-              <a:rPr sz="1400" b="0" i="0">
-                <a:solidFill>
-                  <a:srgbClr val="4A4A4A"/>
-                </a:solidFill>
-                <a:latin typeface="Geist"/>
-              </a:rPr>
-              <a:t>Take the 47-issue audit + baseline data to the product team — before/after framing, not a wish list.</a:t>
+              <a:t>This is content work, not a product change. Tested with a stopwatch before it ships.</a:t>
             </a:r>
           </a:p>
         </p:txBody>
@@ -16731,7 +16982,7 @@
                 </a:solidFill>
                 <a:latin typeface="DM Sans"/>
               </a:rPr>
-              <a:t>DAYS 61–90</a:t>
+              <a:t>DAYS 31–60</a:t>
             </a:r>
           </a:p>
         </p:txBody>
@@ -16766,23 +17017,378 @@
                 </a:solidFill>
                 <a:latin typeface="Geist ExtraBold"/>
               </a:rPr>
-              <a:t>60 days of evidence earns us the right to build this.</a:t>
-            </a:r>
-          </a:p>
-        </p:txBody>
-      </p:sp>
-      <p:sp>
-        <p:nvSpPr>
-          <p:cNvPr id="5" name="Rounded Rectangle 4"/>
+              <a:t>Two tracks. One ships Day 31 — the other follows data.</a:t>
+            </a:r>
+          </a:p>
+        </p:txBody>
+      </p:sp>
+      <p:sp>
+        <p:nvSpPr>
+          <p:cNvPr id="5" name="Rectangle 4"/>
           <p:cNvSpPr/>
           <p:nvPr/>
         </p:nvSpPr>
         <p:spPr>
           <a:xfrm>
             <a:off x="685628" y="1350000"/>
-            <a:ext cx="3483581" cy="4900000"/>
-          </a:xfrm>
-          <a:prstGeom prst="roundRect">
+            <a:ext cx="4900000" cy="280000"/>
+          </a:xfrm>
+          <a:prstGeom prst="rect">
+            <a:avLst/>
+          </a:prstGeom>
+          <a:solidFill>
+            <a:srgbClr val="FFE500"/>
+          </a:solidFill>
+          <a:ln>
+            <a:noFill/>
+          </a:ln>
+        </p:spPr>
+        <p:style>
+          <a:lnRef idx="1">
+            <a:schemeClr val="accent1"/>
+          </a:lnRef>
+          <a:fillRef idx="3">
+            <a:schemeClr val="accent1"/>
+          </a:fillRef>
+          <a:effectRef idx="2">
+            <a:schemeClr val="accent1"/>
+          </a:effectRef>
+          <a:fontRef idx="minor">
+            <a:schemeClr val="lt1"/>
+          </a:fontRef>
+        </p:style>
+        <p:txBody>
+          <a:bodyPr rtlCol="0" anchor="ctr"/>
+          <a:lstStyle/>
+          <a:p>
+            <a:pPr algn="ctr"/>
+          </a:p>
+        </p:txBody>
+      </p:sp>
+      <p:sp>
+        <p:nvSpPr>
+          <p:cNvPr id="6" name="TextBox 5"/>
+          <p:cNvSpPr txBox="1"/>
+          <p:nvPr/>
+        </p:nvSpPr>
+        <p:spPr>
+          <a:xfrm>
+            <a:off x="805628" y="1400000"/>
+            <a:ext cx="4660000" cy="200000"/>
+          </a:xfrm>
+          <a:prstGeom prst="rect">
+            <a:avLst/>
+          </a:prstGeom>
+          <a:noFill/>
+        </p:spPr>
+        <p:txBody>
+          <a:bodyPr wrap="none">
+            <a:spAutoFit/>
+          </a:bodyPr>
+          <a:lstStyle/>
+          <a:p>
+            <a:pPr algn="l"/>
+            <a:r>
+              <a:rPr sz="1300" b="0" i="0">
+                <a:solidFill>
+                  <a:srgbClr val="1A1A1A"/>
+                </a:solidFill>
+                <a:latin typeface="Geist ExtraBold"/>
+              </a:rPr>
+              <a:t>Ships Day 31 — no signal needed</a:t>
+            </a:r>
+          </a:p>
+        </p:txBody>
+      </p:sp>
+      <p:sp>
+        <p:nvSpPr>
+          <p:cNvPr id="7" name="Rectangle 6"/>
+          <p:cNvSpPr/>
+          <p:nvPr/>
+        </p:nvSpPr>
+        <p:spPr>
+          <a:xfrm>
+            <a:off x="685628" y="1770000"/>
+            <a:ext cx="8000" cy="200000"/>
+          </a:xfrm>
+          <a:prstGeom prst="rect">
+            <a:avLst/>
+          </a:prstGeom>
+          <a:solidFill>
+            <a:srgbClr val="1A1A1A"/>
+          </a:solidFill>
+          <a:ln>
+            <a:noFill/>
+          </a:ln>
+        </p:spPr>
+        <p:style>
+          <a:lnRef idx="1">
+            <a:schemeClr val="accent1"/>
+          </a:lnRef>
+          <a:fillRef idx="3">
+            <a:schemeClr val="accent1"/>
+          </a:fillRef>
+          <a:effectRef idx="2">
+            <a:schemeClr val="accent1"/>
+          </a:effectRef>
+          <a:fontRef idx="minor">
+            <a:schemeClr val="lt1"/>
+          </a:fontRef>
+        </p:style>
+        <p:txBody>
+          <a:bodyPr rtlCol="0" anchor="ctr"/>
+          <a:lstStyle/>
+          <a:p>
+            <a:pPr algn="ctr"/>
+          </a:p>
+        </p:txBody>
+      </p:sp>
+      <p:sp>
+        <p:nvSpPr>
+          <p:cNvPr id="8" name="TextBox 7"/>
+          <p:cNvSpPr txBox="1"/>
+          <p:nvPr/>
+        </p:nvSpPr>
+        <p:spPr>
+          <a:xfrm>
+            <a:off x="865628" y="1710000"/>
+            <a:ext cx="4720000" cy="320000"/>
+          </a:xfrm>
+          <a:prstGeom prst="rect">
+            <a:avLst/>
+          </a:prstGeom>
+          <a:noFill/>
+        </p:spPr>
+        <p:txBody>
+          <a:bodyPr wrap="square">
+            <a:spAutoFit/>
+          </a:bodyPr>
+          <a:lstStyle/>
+          <a:p>
+            <a:pPr algn="l"/>
+            <a:r>
+              <a:rPr sz="1500" b="0" i="0">
+                <a:solidFill>
+                  <a:srgbClr val="1A1A1A"/>
+                </a:solidFill>
+                <a:latin typeface="Geist"/>
+              </a:rPr>
+              <a:t>Re-run LLM baseline — day 60 vs day 30</a:t>
+            </a:r>
+          </a:p>
+        </p:txBody>
+      </p:sp>
+      <p:sp>
+        <p:nvSpPr>
+          <p:cNvPr id="9" name="Rectangle 8"/>
+          <p:cNvSpPr/>
+          <p:nvPr/>
+        </p:nvSpPr>
+        <p:spPr>
+          <a:xfrm>
+            <a:off x="685628" y="2170000"/>
+            <a:ext cx="8000" cy="200000"/>
+          </a:xfrm>
+          <a:prstGeom prst="rect">
+            <a:avLst/>
+          </a:prstGeom>
+          <a:solidFill>
+            <a:srgbClr val="1A1A1A"/>
+          </a:solidFill>
+          <a:ln>
+            <a:noFill/>
+          </a:ln>
+        </p:spPr>
+        <p:style>
+          <a:lnRef idx="1">
+            <a:schemeClr val="accent1"/>
+          </a:lnRef>
+          <a:fillRef idx="3">
+            <a:schemeClr val="accent1"/>
+          </a:fillRef>
+          <a:effectRef idx="2">
+            <a:schemeClr val="accent1"/>
+          </a:effectRef>
+          <a:fontRef idx="minor">
+            <a:schemeClr val="lt1"/>
+          </a:fontRef>
+        </p:style>
+        <p:txBody>
+          <a:bodyPr rtlCol="0" anchor="ctr"/>
+          <a:lstStyle/>
+          <a:p>
+            <a:pPr algn="ctr"/>
+          </a:p>
+        </p:txBody>
+      </p:sp>
+      <p:sp>
+        <p:nvSpPr>
+          <p:cNvPr id="10" name="TextBox 9"/>
+          <p:cNvSpPr txBox="1"/>
+          <p:nvPr/>
+        </p:nvSpPr>
+        <p:spPr>
+          <a:xfrm>
+            <a:off x="865628" y="2110000"/>
+            <a:ext cx="4720000" cy="320000"/>
+          </a:xfrm>
+          <a:prstGeom prst="rect">
+            <a:avLst/>
+          </a:prstGeom>
+          <a:noFill/>
+        </p:spPr>
+        <p:txBody>
+          <a:bodyPr wrap="square">
+            <a:spAutoFit/>
+          </a:bodyPr>
+          <a:lstStyle/>
+          <a:p>
+            <a:pPr algn="l"/>
+            <a:r>
+              <a:rPr sz="1500" b="0" i="0">
+                <a:solidFill>
+                  <a:srgbClr val="1A1A1A"/>
+                </a:solidFill>
+                <a:latin typeface="Geist"/>
+              </a:rPr>
+              <a:t>Composio vs CData honest comparison (the "which should I use?" piece)</a:t>
+            </a:r>
+          </a:p>
+        </p:txBody>
+      </p:sp>
+      <p:sp>
+        <p:nvSpPr>
+          <p:cNvPr id="11" name="Rectangle 10"/>
+          <p:cNvSpPr/>
+          <p:nvPr/>
+        </p:nvSpPr>
+        <p:spPr>
+          <a:xfrm>
+            <a:off x="685628" y="2570000"/>
+            <a:ext cx="8000" cy="200000"/>
+          </a:xfrm>
+          <a:prstGeom prst="rect">
+            <a:avLst/>
+          </a:prstGeom>
+          <a:solidFill>
+            <a:srgbClr val="1A1A1A"/>
+          </a:solidFill>
+          <a:ln>
+            <a:noFill/>
+          </a:ln>
+        </p:spPr>
+        <p:style>
+          <a:lnRef idx="1">
+            <a:schemeClr val="accent1"/>
+          </a:lnRef>
+          <a:fillRef idx="3">
+            <a:schemeClr val="accent1"/>
+          </a:fillRef>
+          <a:effectRef idx="2">
+            <a:schemeClr val="accent1"/>
+          </a:effectRef>
+          <a:fontRef idx="minor">
+            <a:schemeClr val="lt1"/>
+          </a:fontRef>
+        </p:style>
+        <p:txBody>
+          <a:bodyPr rtlCol="0" anchor="ctr"/>
+          <a:lstStyle/>
+          <a:p>
+            <a:pPr algn="ctr"/>
+          </a:p>
+        </p:txBody>
+      </p:sp>
+      <p:sp>
+        <p:nvSpPr>
+          <p:cNvPr id="12" name="TextBox 11"/>
+          <p:cNvSpPr txBox="1"/>
+          <p:nvPr/>
+        </p:nvSpPr>
+        <p:spPr>
+          <a:xfrm>
+            <a:off x="865628" y="2510000"/>
+            <a:ext cx="4720000" cy="320000"/>
+          </a:xfrm>
+          <a:prstGeom prst="rect">
+            <a:avLst/>
+          </a:prstGeom>
+          <a:noFill/>
+        </p:spPr>
+        <p:txBody>
+          <a:bodyPr wrap="square">
+            <a:spAutoFit/>
+          </a:bodyPr>
+          <a:lstStyle/>
+          <a:p>
+            <a:pPr algn="l"/>
+            <a:r>
+              <a:rPr sz="1500" b="0" i="0">
+                <a:solidFill>
+                  <a:srgbClr val="1A1A1A"/>
+                </a:solidFill>
+                <a:latin typeface="Geist"/>
+              </a:rPr>
+              <a:t>Fix all 5 AI doc standard misses from the audit</a:t>
+            </a:r>
+          </a:p>
+        </p:txBody>
+      </p:sp>
+      <p:sp>
+        <p:nvSpPr>
+          <p:cNvPr id="13" name="Rectangle 12"/>
+          <p:cNvSpPr/>
+          <p:nvPr/>
+        </p:nvSpPr>
+        <p:spPr>
+          <a:xfrm>
+            <a:off x="5785628" y="1350000"/>
+            <a:ext cx="5000" cy="1600000"/>
+          </a:xfrm>
+          <a:prstGeom prst="rect">
+            <a:avLst/>
+          </a:prstGeom>
+          <a:solidFill>
+            <a:srgbClr val="D0D0C8"/>
+          </a:solidFill>
+          <a:ln>
+            <a:noFill/>
+          </a:ln>
+        </p:spPr>
+        <p:style>
+          <a:lnRef idx="1">
+            <a:schemeClr val="accent1"/>
+          </a:lnRef>
+          <a:fillRef idx="3">
+            <a:schemeClr val="accent1"/>
+          </a:fillRef>
+          <a:effectRef idx="2">
+            <a:schemeClr val="accent1"/>
+          </a:effectRef>
+          <a:fontRef idx="minor">
+            <a:schemeClr val="lt1"/>
+          </a:fontRef>
+        </p:style>
+        <p:txBody>
+          <a:bodyPr rtlCol="0" anchor="ctr"/>
+          <a:lstStyle/>
+          <a:p>
+            <a:pPr algn="ctr"/>
+          </a:p>
+        </p:txBody>
+      </p:sp>
+      <p:sp>
+        <p:nvSpPr>
+          <p:cNvPr id="14" name="Rectangle 13"/>
+          <p:cNvSpPr/>
+          <p:nvPr/>
+        </p:nvSpPr>
+        <p:spPr>
+          <a:xfrm>
+            <a:off x="5985628" y="1350000"/>
+            <a:ext cx="5520744" cy="280000"/>
+          </a:xfrm>
+          <a:prstGeom prst="rect">
             <a:avLst/>
           </a:prstGeom>
           <a:solidFill>
@@ -16816,14 +17422,84 @@
       </p:sp>
       <p:sp>
         <p:nvSpPr>
-          <p:cNvPr id="6" name="TextBox 5"/>
-          <p:cNvSpPr txBox="1"/>
-          <p:nvPr/>
-        </p:nvSpPr>
-        <p:spPr>
-          <a:xfrm>
-            <a:off x="870628" y="1535000"/>
-            <a:ext cx="3113581" cy="430000"/>
+          <p:cNvPr id="15" name="TextBox 14"/>
+          <p:cNvSpPr txBox="1"/>
+          <p:nvPr/>
+        </p:nvSpPr>
+        <p:spPr>
+          <a:xfrm>
+            <a:off x="6065628" y="1400000"/>
+            <a:ext cx="5360744" cy="200000"/>
+          </a:xfrm>
+          <a:prstGeom prst="rect">
+            <a:avLst/>
+          </a:prstGeom>
+          <a:noFill/>
+        </p:spPr>
+        <p:txBody>
+          <a:bodyPr wrap="none">
+            <a:spAutoFit/>
+          </a:bodyPr>
+          <a:lstStyle/>
+          <a:p>
+            <a:pPr algn="l"/>
+            <a:r>
+              <a:rPr sz="1300" b="0" i="0">
+                <a:solidFill>
+                  <a:srgbClr val="1A1A1A"/>
+                </a:solidFill>
+                <a:latin typeface="Geist ExtraBold"/>
+              </a:rPr>
+              <a:t>Day 30 data decides</a:t>
+            </a:r>
+          </a:p>
+        </p:txBody>
+      </p:sp>
+      <p:sp>
+        <p:nvSpPr>
+          <p:cNvPr id="16" name="TextBox 15"/>
+          <p:cNvSpPr txBox="1"/>
+          <p:nvPr/>
+        </p:nvSpPr>
+        <p:spPr>
+          <a:xfrm>
+            <a:off x="5985628" y="1710000"/>
+            <a:ext cx="5520744" cy="200000"/>
+          </a:xfrm>
+          <a:prstGeom prst="rect">
+            <a:avLst/>
+          </a:prstGeom>
+          <a:noFill/>
+        </p:spPr>
+        <p:txBody>
+          <a:bodyPr wrap="none">
+            <a:spAutoFit/>
+          </a:bodyPr>
+          <a:lstStyle/>
+          <a:p>
+            <a:pPr algn="l"/>
+            <a:r>
+              <a:rPr sz="1400" b="0" i="0">
+                <a:solidFill>
+                  <a:srgbClr val="1A1A1A"/>
+                </a:solidFill>
+                <a:latin typeface="Geist ExtraBold"/>
+              </a:rPr>
+              <a:t>Discovery bottleneck</a:t>
+            </a:r>
+          </a:p>
+        </p:txBody>
+      </p:sp>
+      <p:sp>
+        <p:nvSpPr>
+          <p:cNvPr id="17" name="TextBox 16"/>
+          <p:cNvSpPr txBox="1"/>
+          <p:nvPr/>
+        </p:nvSpPr>
+        <p:spPr>
+          <a:xfrm>
+            <a:off x="5985628" y="1910000"/>
+            <a:ext cx="5520744" cy="180000"/>
           </a:xfrm>
           <a:prstGeom prst="rect">
             <a:avLst/>
@@ -16838,27 +17514,62 @@
           <a:p>
             <a:pPr algn="l"/>
             <a:r>
-              <a:rPr sz="1700" b="0" i="0">
+              <a:rPr sz="1300" b="0" i="0">
+                <a:solidFill>
+                  <a:srgbClr val="4A4A4A"/>
+                </a:solidFill>
+                <a:latin typeface="Geist"/>
+              </a:rPr>
+              <a:t>→ SEO + LLM presence content</a:t>
+            </a:r>
+          </a:p>
+        </p:txBody>
+      </p:sp>
+      <p:sp>
+        <p:nvSpPr>
+          <p:cNvPr id="18" name="TextBox 17"/>
+          <p:cNvSpPr txBox="1"/>
+          <p:nvPr/>
+        </p:nvSpPr>
+        <p:spPr>
+          <a:xfrm>
+            <a:off x="5985628" y="2190000"/>
+            <a:ext cx="5520744" cy="200000"/>
+          </a:xfrm>
+          <a:prstGeom prst="rect">
+            <a:avLst/>
+          </a:prstGeom>
+          <a:noFill/>
+        </p:spPr>
+        <p:txBody>
+          <a:bodyPr wrap="none">
+            <a:spAutoFit/>
+          </a:bodyPr>
+          <a:lstStyle/>
+          <a:p>
+            <a:pPr algn="l"/>
+            <a:r>
+              <a:rPr sz="1400" b="0" i="0">
                 <a:solidFill>
                   <a:srgbClr val="1A1A1A"/>
                 </a:solidFill>
                 <a:latin typeface="Geist ExtraBold"/>
               </a:rPr>
-              <a:t>Double Down on What Moved</a:t>
-            </a:r>
-          </a:p>
-        </p:txBody>
-      </p:sp>
-      <p:sp>
-        <p:nvSpPr>
-          <p:cNvPr id="7" name="TextBox 6"/>
-          <p:cNvSpPr txBox="1"/>
-          <p:nvPr/>
-        </p:nvSpPr>
-        <p:spPr>
-          <a:xfrm>
-            <a:off x="870628" y="1995000"/>
-            <a:ext cx="3113581" cy="4070000"/>
+              <a:t>Evaluation drop-off</a:t>
+            </a:r>
+          </a:p>
+        </p:txBody>
+      </p:sp>
+      <p:sp>
+        <p:nvSpPr>
+          <p:cNvPr id="19" name="TextBox 18"/>
+          <p:cNvSpPr txBox="1"/>
+          <p:nvPr/>
+        </p:nvSpPr>
+        <p:spPr>
+          <a:xfrm>
+            <a:off x="5985628" y="2390000"/>
+            <a:ext cx="5520744" cy="180000"/>
           </a:xfrm>
           <a:prstGeom prst="rect">
             <a:avLst/>
@@ -16873,32 +17584,99 @@
           <a:p>
             <a:pPr algn="l"/>
             <a:r>
+              <a:rPr sz="1300" b="0" i="0">
+                <a:solidFill>
+                  <a:srgbClr val="4A4A4A"/>
+                </a:solidFill>
+                <a:latin typeface="Geist"/>
+              </a:rPr>
+              <a:t>→ Comparison content + quickstart fix</a:t>
+            </a:r>
+          </a:p>
+        </p:txBody>
+      </p:sp>
+      <p:sp>
+        <p:nvSpPr>
+          <p:cNvPr id="20" name="TextBox 19"/>
+          <p:cNvSpPr txBox="1"/>
+          <p:nvPr/>
+        </p:nvSpPr>
+        <p:spPr>
+          <a:xfrm>
+            <a:off x="5985628" y="2670000"/>
+            <a:ext cx="5520744" cy="200000"/>
+          </a:xfrm>
+          <a:prstGeom prst="rect">
+            <a:avLst/>
+          </a:prstGeom>
+          <a:noFill/>
+        </p:spPr>
+        <p:txBody>
+          <a:bodyPr wrap="none">
+            <a:spAutoFit/>
+          </a:bodyPr>
+          <a:lstStyle/>
+          <a:p>
+            <a:pPr algn="l"/>
+            <a:r>
               <a:rPr sz="1400" b="0" i="0">
                 <a:solidFill>
+                  <a:srgbClr val="1A1A1A"/>
+                </a:solidFill>
+                <a:latin typeface="Geist ExtraBold"/>
+              </a:rPr>
+              <a:t>Activation friction</a:t>
+            </a:r>
+          </a:p>
+        </p:txBody>
+      </p:sp>
+      <p:sp>
+        <p:nvSpPr>
+          <p:cNvPr id="21" name="TextBox 20"/>
+          <p:cNvSpPr txBox="1"/>
+          <p:nvPr/>
+        </p:nvSpPr>
+        <p:spPr>
+          <a:xfrm>
+            <a:off x="5985628" y="2870000"/>
+            <a:ext cx="5520744" cy="180000"/>
+          </a:xfrm>
+          <a:prstGeom prst="rect">
+            <a:avLst/>
+          </a:prstGeom>
+          <a:noFill/>
+        </p:spPr>
+        <p:txBody>
+          <a:bodyPr wrap="square">
+            <a:spAutoFit/>
+          </a:bodyPr>
+          <a:lstStyle/>
+          <a:p>
+            <a:pPr algn="l"/>
+            <a:r>
+              <a:rPr sz="1300" b="0" i="0">
+                <a:solidFill>
                   <a:srgbClr val="4A4A4A"/>
                 </a:solidFill>
                 <a:latin typeface="Geist"/>
               </a:rPr>
-              <a:t>Content expands where signal is strongest.
-Comparison piece worked → SAP, NetSuite, Workday quickstarts. Enterprise sources Composio can't touch.
-Community seeding worked → conference talk + OSS working demo.
-We don't guess — we expand on proof.</a:t>
-            </a:r>
-          </a:p>
-        </p:txBody>
-      </p:sp>
-      <p:sp>
-        <p:nvSpPr>
-          <p:cNvPr id="8" name="Rounded Rectangle 7"/>
+              <a:t>→ DX improvements + error messages</a:t>
+            </a:r>
+          </a:p>
+        </p:txBody>
+      </p:sp>
+      <p:sp>
+        <p:nvSpPr>
+          <p:cNvPr id="22" name="Rectangle 21"/>
           <p:cNvSpPr/>
           <p:nvPr/>
         </p:nvSpPr>
         <p:spPr>
           <a:xfrm>
-            <a:off x="4354209" y="1350000"/>
-            <a:ext cx="3483581" cy="4900000"/>
-          </a:xfrm>
-          <a:prstGeom prst="roundRect">
+            <a:off x="685628" y="3250000"/>
+            <a:ext cx="10820744" cy="600000"/>
+          </a:xfrm>
+          <a:prstGeom prst="rect">
             <a:avLst/>
           </a:prstGeom>
           <a:solidFill>
@@ -16932,14 +17710,49 @@
       </p:sp>
       <p:sp>
         <p:nvSpPr>
-          <p:cNvPr id="9" name="TextBox 8"/>
-          <p:cNvSpPr txBox="1"/>
-          <p:nvPr/>
-        </p:nvSpPr>
-        <p:spPr>
-          <a:xfrm>
-            <a:off x="4539209" y="1535000"/>
-            <a:ext cx="3113581" cy="430000"/>
+          <p:cNvPr id="23" name="TextBox 22"/>
+          <p:cNvSpPr txBox="1"/>
+          <p:nvPr/>
+        </p:nvSpPr>
+        <p:spPr>
+          <a:xfrm>
+            <a:off x="885628" y="3330000"/>
+            <a:ext cx="1900000" cy="280000"/>
+          </a:xfrm>
+          <a:prstGeom prst="rect">
+            <a:avLst/>
+          </a:prstGeom>
+          <a:noFill/>
+        </p:spPr>
+        <p:txBody>
+          <a:bodyPr wrap="none">
+            <a:spAutoFit/>
+          </a:bodyPr>
+          <a:lstStyle/>
+          <a:p>
+            <a:pPr algn="l"/>
+            <a:r>
+              <a:rPr sz="1400" b="0" i="0">
+                <a:solidFill>
+                  <a:srgbClr val="1A1A1A"/>
+                </a:solidFill>
+                <a:latin typeface="Geist ExtraBold"/>
+              </a:rPr>
+              <a:t>Product track</a:t>
+            </a:r>
+          </a:p>
+        </p:txBody>
+      </p:sp>
+      <p:sp>
+        <p:nvSpPr>
+          <p:cNvPr id="24" name="TextBox 23"/>
+          <p:cNvSpPr txBox="1"/>
+          <p:nvPr/>
+        </p:nvSpPr>
+        <p:spPr>
+          <a:xfrm>
+            <a:off x="2785628" y="3330000"/>
+            <a:ext cx="8520744" cy="400000"/>
           </a:xfrm>
           <a:prstGeom prst="rect">
             <a:avLst/>
@@ -16954,167 +17767,13 @@
           <a:p>
             <a:pPr algn="l"/>
             <a:r>
-              <a:rPr sz="1700" b="0" i="0">
-                <a:solidFill>
-                  <a:srgbClr val="1A1A1A"/>
-                </a:solidFill>
-                <a:latin typeface="Geist ExtraBold"/>
-              </a:rPr>
-              <a:t>Sales Enablement</a:t>
-            </a:r>
-          </a:p>
-        </p:txBody>
-      </p:sp>
-      <p:sp>
-        <p:nvSpPr>
-          <p:cNvPr id="10" name="TextBox 9"/>
-          <p:cNvSpPr txBox="1"/>
-          <p:nvPr/>
-        </p:nvSpPr>
-        <p:spPr>
-          <a:xfrm>
-            <a:off x="4539209" y="1995000"/>
-            <a:ext cx="3113581" cy="4070000"/>
-          </a:xfrm>
-          <a:prstGeom prst="rect">
-            <a:avLst/>
-          </a:prstGeom>
-          <a:noFill/>
-        </p:spPr>
-        <p:txBody>
-          <a:bodyPr wrap="square">
-            <a:spAutoFit/>
-          </a:bodyPr>
-          <a:lstStyle/>
-          <a:p>
-            <a:pPr algn="l"/>
-            <a:r>
               <a:rPr sz="1400" b="0" i="0">
                 <a:solidFill>
                   <a:srgbClr val="4A4A4A"/>
                 </a:solidFill>
                 <a:latin typeface="Geist"/>
               </a:rPr>
-              <a:t>Enterprise deals stall when the AE can't answer the technical question.
-Battlecard: Connect AI vs Composio — one honest answer per objection.
-"When an engineer asks about Connect AI" — a one-page technical guide for the field.
-PMM ships this. DevRel tests it with community.</a:t>
-            </a:r>
-          </a:p>
-        </p:txBody>
-      </p:sp>
-      <p:sp>
-        <p:nvSpPr>
-          <p:cNvPr id="11" name="Rounded Rectangle 10"/>
-          <p:cNvSpPr/>
-          <p:nvPr/>
-        </p:nvSpPr>
-        <p:spPr>
-          <a:xfrm>
-            <a:off x="8022790" y="1350000"/>
-            <a:ext cx="3483581" cy="4900000"/>
-          </a:xfrm>
-          <a:prstGeom prst="roundRect">
-            <a:avLst/>
-          </a:prstGeom>
-          <a:solidFill>
-            <a:srgbClr val="ECEDE8"/>
-          </a:solidFill>
-          <a:ln>
-            <a:noFill/>
-          </a:ln>
-        </p:spPr>
-        <p:style>
-          <a:lnRef idx="1">
-            <a:schemeClr val="accent1"/>
-          </a:lnRef>
-          <a:fillRef idx="3">
-            <a:schemeClr val="accent1"/>
-          </a:fillRef>
-          <a:effectRef idx="2">
-            <a:schemeClr val="accent1"/>
-          </a:effectRef>
-          <a:fontRef idx="minor">
-            <a:schemeClr val="lt1"/>
-          </a:fontRef>
-        </p:style>
-        <p:txBody>
-          <a:bodyPr rtlCol="0" anchor="ctr"/>
-          <a:lstStyle/>
-          <a:p>
-            <a:pPr algn="ctr"/>
-          </a:p>
-        </p:txBody>
-      </p:sp>
-      <p:sp>
-        <p:nvSpPr>
-          <p:cNvPr id="12" name="TextBox 11"/>
-          <p:cNvSpPr txBox="1"/>
-          <p:nvPr/>
-        </p:nvSpPr>
-        <p:spPr>
-          <a:xfrm>
-            <a:off x="8207790" y="1535000"/>
-            <a:ext cx="3113581" cy="430000"/>
-          </a:xfrm>
-          <a:prstGeom prst="rect">
-            <a:avLst/>
-          </a:prstGeom>
-          <a:noFill/>
-        </p:spPr>
-        <p:txBody>
-          <a:bodyPr wrap="square">
-            <a:spAutoFit/>
-          </a:bodyPr>
-          <a:lstStyle/>
-          <a:p>
-            <a:pPr algn="l"/>
-            <a:r>
-              <a:rPr sz="1700" b="0" i="0">
-                <a:solidFill>
-                  <a:srgbClr val="1A1A1A"/>
-                </a:solidFill>
-                <a:latin typeface="Geist ExtraBold"/>
-              </a:rPr>
-              <a:t>Day 90: Re-run the Baseline</a:t>
-            </a:r>
-          </a:p>
-        </p:txBody>
-      </p:sp>
-      <p:sp>
-        <p:nvSpPr>
-          <p:cNvPr id="13" name="TextBox 12"/>
-          <p:cNvSpPr txBox="1"/>
-          <p:nvPr/>
-        </p:nvSpPr>
-        <p:spPr>
-          <a:xfrm>
-            <a:off x="8207790" y="1995000"/>
-            <a:ext cx="3113581" cy="4070000"/>
-          </a:xfrm>
-          <a:prstGeom prst="rect">
-            <a:avLst/>
-          </a:prstGeom>
-          <a:noFill/>
-        </p:spPr>
-        <p:txBody>
-          <a:bodyPr wrap="square">
-            <a:spAutoFit/>
-          </a:bodyPr>
-          <a:lstStyle/>
-          <a:p>
-            <a:pPr algn="l"/>
-            <a:r>
-              <a:rPr sz="1400" b="0" i="0">
-                <a:solidFill>
-                  <a:srgbClr val="4A4A4A"/>
-                </a:solidFill>
-                <a:latin typeface="Geist"/>
-              </a:rPr>
-              <a:t>Same 5 LLM queries from Day 1.
-Day 1:   0 / 5 mentioned CData.
-Target:  2–3 / 5.
-This is the number we're accountable to. Not traffic, not MQLs. The metric that proves positioning actually moved.</a:t>
+              <a:t>Take the 47-issue audit + baseline data to the product team — before/after framing, not a wish list.</a:t>
             </a:r>
           </a:p>
         </p:txBody>
@@ -17319,7 +17978,7 @@
                 </a:solidFill>
                 <a:latin typeface="DM Sans"/>
               </a:rPr>
-              <a:t>GOALS</a:t>
+              <a:t>DAYS 61–90</a:t>
             </a:r>
           </a:p>
         </p:txBody>
@@ -17333,7 +17992,7 @@
         <p:spPr>
           <a:xfrm>
             <a:off x="685628" y="620000"/>
-            <a:ext cx="10820744" cy="700000"/>
+            <a:ext cx="10820744" cy="500000"/>
           </a:xfrm>
           <a:prstGeom prst="rect">
             <a:avLst/>
@@ -17348,177 +18007,29 @@
           <a:p>
             <a:pPr algn="l"/>
             <a:r>
-              <a:rPr sz="4000" b="0" i="0">
+              <a:rPr sz="3200" b="0" i="0">
                 <a:solidFill>
                   <a:srgbClr val="1A1A1A"/>
                 </a:solidFill>
                 <a:latin typeface="Geist ExtraBold"/>
               </a:rPr>
-              <a:t>Goals framework.</a:t>
-            </a:r>
-          </a:p>
-        </p:txBody>
-      </p:sp>
-      <p:sp>
-        <p:nvSpPr>
-          <p:cNvPr id="5" name="Rectangle 4"/>
+              <a:t>60 days of evidence earns us the right to build this.</a:t>
+            </a:r>
+          </a:p>
+        </p:txBody>
+      </p:sp>
+      <p:sp>
+        <p:nvSpPr>
+          <p:cNvPr id="5" name="Rounded Rectangle 4"/>
           <p:cNvSpPr/>
           <p:nvPr/>
         </p:nvSpPr>
         <p:spPr>
           <a:xfrm>
-            <a:off x="685628" y="1700000"/>
-            <a:ext cx="10820744" cy="380000"/>
-          </a:xfrm>
-          <a:prstGeom prst="rect">
-            <a:avLst/>
-          </a:prstGeom>
-          <a:solidFill>
-            <a:srgbClr val="1A1A1A"/>
-          </a:solidFill>
-          <a:ln>
-            <a:noFill/>
-          </a:ln>
-        </p:spPr>
-        <p:style>
-          <a:lnRef idx="1">
-            <a:schemeClr val="accent1"/>
-          </a:lnRef>
-          <a:fillRef idx="3">
-            <a:schemeClr val="accent1"/>
-          </a:fillRef>
-          <a:effectRef idx="2">
-            <a:schemeClr val="accent1"/>
-          </a:effectRef>
-          <a:fontRef idx="minor">
-            <a:schemeClr val="lt1"/>
-          </a:fontRef>
-        </p:style>
-        <p:txBody>
-          <a:bodyPr rtlCol="0" anchor="ctr"/>
-          <a:lstStyle/>
-          <a:p>
-            <a:pPr algn="ctr"/>
-          </a:p>
-        </p:txBody>
-      </p:sp>
-      <p:sp>
-        <p:nvSpPr>
-          <p:cNvPr id="6" name="TextBox 5"/>
-          <p:cNvSpPr txBox="1"/>
-          <p:nvPr/>
-        </p:nvSpPr>
-        <p:spPr>
-          <a:xfrm>
-            <a:off x="865628" y="1780000"/>
-            <a:ext cx="4000000" cy="240000"/>
-          </a:xfrm>
-          <a:prstGeom prst="rect">
-            <a:avLst/>
-          </a:prstGeom>
-          <a:noFill/>
-        </p:spPr>
-        <p:txBody>
-          <a:bodyPr wrap="none">
-            <a:spAutoFit/>
-          </a:bodyPr>
-          <a:lstStyle/>
-          <a:p>
-            <a:pPr algn="l"/>
-            <a:r>
-              <a:rPr sz="1100" b="0" i="0">
-                <a:solidFill>
-                  <a:srgbClr val="FFFFFF"/>
-                </a:solidFill>
-                <a:latin typeface="Geist ExtraBold"/>
-              </a:rPr>
-              <a:t>Metric</a:t>
-            </a:r>
-          </a:p>
-        </p:txBody>
-      </p:sp>
-      <p:sp>
-        <p:nvSpPr>
-          <p:cNvPr id="7" name="TextBox 6"/>
-          <p:cNvSpPr txBox="1"/>
-          <p:nvPr/>
-        </p:nvSpPr>
-        <p:spPr>
-          <a:xfrm>
-            <a:off x="6265628" y="1780000"/>
-            <a:ext cx="4000000" cy="240000"/>
-          </a:xfrm>
-          <a:prstGeom prst="rect">
-            <a:avLst/>
-          </a:prstGeom>
-          <a:noFill/>
-        </p:spPr>
-        <p:txBody>
-          <a:bodyPr wrap="none">
-            <a:spAutoFit/>
-          </a:bodyPr>
-          <a:lstStyle/>
-          <a:p>
-            <a:pPr algn="l"/>
-            <a:r>
-              <a:rPr sz="1100" b="0" i="0">
-                <a:solidFill>
-                  <a:srgbClr val="FFFFFF"/>
-                </a:solidFill>
-                <a:latin typeface="Geist ExtraBold"/>
-              </a:rPr>
-              <a:t>Day 30 baseline</a:t>
-            </a:r>
-          </a:p>
-        </p:txBody>
-      </p:sp>
-      <p:sp>
-        <p:nvSpPr>
-          <p:cNvPr id="8" name="TextBox 7"/>
-          <p:cNvSpPr txBox="1"/>
-          <p:nvPr/>
-        </p:nvSpPr>
-        <p:spPr>
-          <a:xfrm>
-            <a:off x="9465628" y="1780000"/>
-            <a:ext cx="4000000" cy="240000"/>
-          </a:xfrm>
-          <a:prstGeom prst="rect">
-            <a:avLst/>
-          </a:prstGeom>
-          <a:noFill/>
-        </p:spPr>
-        <p:txBody>
-          <a:bodyPr wrap="none">
-            <a:spAutoFit/>
-          </a:bodyPr>
-          <a:lstStyle/>
-          <a:p>
-            <a:pPr algn="l"/>
-            <a:r>
-              <a:rPr sz="1100" b="0" i="0">
-                <a:solidFill>
-                  <a:srgbClr val="FFFFFF"/>
-                </a:solidFill>
-                <a:latin typeface="Geist ExtraBold"/>
-              </a:rPr>
-              <a:t>Day 90 target</a:t>
-            </a:r>
-          </a:p>
-        </p:txBody>
-      </p:sp>
-      <p:sp>
-        <p:nvSpPr>
-          <p:cNvPr id="9" name="Rectangle 8"/>
-          <p:cNvSpPr/>
-          <p:nvPr/>
-        </p:nvSpPr>
-        <p:spPr>
-          <a:xfrm>
-            <a:off x="685628" y="2080000"/>
-            <a:ext cx="10820744" cy="790000"/>
-          </a:xfrm>
-          <a:prstGeom prst="rect">
+            <a:off x="685628" y="1350000"/>
+            <a:ext cx="3483581" cy="4900000"/>
+          </a:xfrm>
+          <a:prstGeom prst="roundRect">
             <a:avLst/>
           </a:prstGeom>
           <a:solidFill>
@@ -17552,14 +18063,14 @@
       </p:sp>
       <p:sp>
         <p:nvSpPr>
-          <p:cNvPr id="10" name="TextBox 9"/>
-          <p:cNvSpPr txBox="1"/>
-          <p:nvPr/>
-        </p:nvSpPr>
-        <p:spPr>
-          <a:xfrm>
-            <a:off x="865628" y="2220000"/>
-            <a:ext cx="5000000" cy="560000"/>
+          <p:cNvPr id="6" name="TextBox 5"/>
+          <p:cNvSpPr txBox="1"/>
+          <p:nvPr/>
+        </p:nvSpPr>
+        <p:spPr>
+          <a:xfrm>
+            <a:off x="870628" y="1535000"/>
+            <a:ext cx="3113581" cy="430000"/>
           </a:xfrm>
           <a:prstGeom prst="rect">
             <a:avLst/>
@@ -17574,247 +18085,67 @@
           <a:p>
             <a:pPr algn="l"/>
             <a:r>
-              <a:rPr sz="1300" b="0" i="0">
+              <a:rPr sz="1700" b="0" i="0">
                 <a:solidFill>
                   <a:srgbClr val="1A1A1A"/>
                 </a:solidFill>
+                <a:latin typeface="Geist ExtraBold"/>
+              </a:rPr>
+              <a:t>Double Down on What Moved</a:t>
+            </a:r>
+          </a:p>
+        </p:txBody>
+      </p:sp>
+      <p:sp>
+        <p:nvSpPr>
+          <p:cNvPr id="7" name="TextBox 6"/>
+          <p:cNvSpPr txBox="1"/>
+          <p:nvPr/>
+        </p:nvSpPr>
+        <p:spPr>
+          <a:xfrm>
+            <a:off x="870628" y="1995000"/>
+            <a:ext cx="3113581" cy="4070000"/>
+          </a:xfrm>
+          <a:prstGeom prst="rect">
+            <a:avLst/>
+          </a:prstGeom>
+          <a:noFill/>
+        </p:spPr>
+        <p:txBody>
+          <a:bodyPr wrap="square">
+            <a:spAutoFit/>
+          </a:bodyPr>
+          <a:lstStyle/>
+          <a:p>
+            <a:pPr algn="l"/>
+            <a:r>
+              <a:rPr sz="1400" b="0" i="0">
+                <a:solidFill>
+                  <a:srgbClr val="4A4A4A"/>
+                </a:solidFill>
                 <a:latin typeface="Geist"/>
               </a:rPr>
-              <a:t>LLM discoverability (5 key queries)</a:t>
-            </a:r>
-          </a:p>
-        </p:txBody>
-      </p:sp>
-      <p:sp>
-        <p:nvSpPr>
-          <p:cNvPr id="11" name="TextBox 10"/>
-          <p:cNvSpPr txBox="1"/>
-          <p:nvPr/>
-        </p:nvSpPr>
-        <p:spPr>
-          <a:xfrm>
-            <a:off x="6265628" y="2220000"/>
-            <a:ext cx="2900000" cy="560000"/>
-          </a:xfrm>
-          <a:prstGeom prst="rect">
-            <a:avLst/>
-          </a:prstGeom>
-          <a:noFill/>
-        </p:spPr>
-        <p:txBody>
-          <a:bodyPr wrap="square">
-            <a:spAutoFit/>
-          </a:bodyPr>
-          <a:lstStyle/>
-          <a:p>
-            <a:pPr algn="l"/>
-            <a:r>
-              <a:rPr sz="1300" b="0" i="0">
-                <a:solidFill>
-                  <a:srgbClr val="4A4A4A"/>
-                </a:solidFill>
-                <a:latin typeface="Geist"/>
-              </a:rPr>
-              <a:t>0/5 — current baseline</a:t>
-            </a:r>
-          </a:p>
-        </p:txBody>
-      </p:sp>
-      <p:sp>
-        <p:nvSpPr>
-          <p:cNvPr id="12" name="TextBox 11"/>
-          <p:cNvSpPr txBox="1"/>
-          <p:nvPr/>
-        </p:nvSpPr>
-        <p:spPr>
-          <a:xfrm>
-            <a:off x="9465628" y="2220000"/>
-            <a:ext cx="2000000" cy="560000"/>
-          </a:xfrm>
-          <a:prstGeom prst="rect">
-            <a:avLst/>
-          </a:prstGeom>
-          <a:noFill/>
-        </p:spPr>
-        <p:txBody>
-          <a:bodyPr wrap="square">
-            <a:spAutoFit/>
-          </a:bodyPr>
-          <a:lstStyle/>
-          <a:p>
-            <a:pPr algn="l"/>
-            <a:r>
-              <a:rPr sz="1300" b="0" i="0">
-                <a:solidFill>
-                  <a:srgbClr val="1A1A1A"/>
-                </a:solidFill>
-                <a:latin typeface="Geist"/>
-              </a:rPr>
-              <a:t>2–3/5</a:t>
-            </a:r>
-          </a:p>
-        </p:txBody>
-      </p:sp>
-      <p:sp>
-        <p:nvSpPr>
-          <p:cNvPr id="13" name="Rectangle 12"/>
+              <a:t>Content expands where signal is strongest.
+Comparison piece worked → SAP, NetSuite, Workday quickstarts. Enterprise sources Composio can't touch.
+Community seeding worked → conference talk + OSS working demo.
+We don't guess — we expand on proof.</a:t>
+            </a:r>
+          </a:p>
+        </p:txBody>
+      </p:sp>
+      <p:sp>
+        <p:nvSpPr>
+          <p:cNvPr id="8" name="Rounded Rectangle 7"/>
           <p:cNvSpPr/>
           <p:nvPr/>
         </p:nvSpPr>
         <p:spPr>
           <a:xfrm>
-            <a:off x="685628" y="2900000"/>
-            <a:ext cx="10820744" cy="790000"/>
-          </a:xfrm>
-          <a:prstGeom prst="rect">
-            <a:avLst/>
-          </a:prstGeom>
-          <a:solidFill>
-            <a:srgbClr val="F8F8F5"/>
-          </a:solidFill>
-          <a:ln>
-            <a:noFill/>
-          </a:ln>
-        </p:spPr>
-        <p:style>
-          <a:lnRef idx="1">
-            <a:schemeClr val="accent1"/>
-          </a:lnRef>
-          <a:fillRef idx="3">
-            <a:schemeClr val="accent1"/>
-          </a:fillRef>
-          <a:effectRef idx="2">
-            <a:schemeClr val="accent1"/>
-          </a:effectRef>
-          <a:fontRef idx="minor">
-            <a:schemeClr val="lt1"/>
-          </a:fontRef>
-        </p:style>
-        <p:txBody>
-          <a:bodyPr rtlCol="0" anchor="ctr"/>
-          <a:lstStyle/>
-          <a:p>
-            <a:pPr algn="ctr"/>
-          </a:p>
-        </p:txBody>
-      </p:sp>
-      <p:sp>
-        <p:nvSpPr>
-          <p:cNvPr id="14" name="TextBox 13"/>
-          <p:cNvSpPr txBox="1"/>
-          <p:nvPr/>
-        </p:nvSpPr>
-        <p:spPr>
-          <a:xfrm>
-            <a:off x="865628" y="3040000"/>
-            <a:ext cx="5000000" cy="560000"/>
-          </a:xfrm>
-          <a:prstGeom prst="rect">
-            <a:avLst/>
-          </a:prstGeom>
-          <a:noFill/>
-        </p:spPr>
-        <p:txBody>
-          <a:bodyPr wrap="square">
-            <a:spAutoFit/>
-          </a:bodyPr>
-          <a:lstStyle/>
-          <a:p>
-            <a:pPr algn="l"/>
-            <a:r>
-              <a:rPr sz="1300" b="0" i="0">
-                <a:solidFill>
-                  <a:srgbClr val="1A1A1A"/>
-                </a:solidFill>
-                <a:latin typeface="Geist"/>
-              </a:rPr>
-              <a:t>Time-to-first-API-call</a:t>
-            </a:r>
-          </a:p>
-        </p:txBody>
-      </p:sp>
-      <p:sp>
-        <p:nvSpPr>
-          <p:cNvPr id="15" name="TextBox 14"/>
-          <p:cNvSpPr txBox="1"/>
-          <p:nvPr/>
-        </p:nvSpPr>
-        <p:spPr>
-          <a:xfrm>
-            <a:off x="6265628" y="3040000"/>
-            <a:ext cx="2900000" cy="560000"/>
-          </a:xfrm>
-          <a:prstGeom prst="rect">
-            <a:avLst/>
-          </a:prstGeom>
-          <a:noFill/>
-        </p:spPr>
-        <p:txBody>
-          <a:bodyPr wrap="square">
-            <a:spAutoFit/>
-          </a:bodyPr>
-          <a:lstStyle/>
-          <a:p>
-            <a:pPr algn="l"/>
-            <a:r>
-              <a:rPr sz="1300" b="0" i="0">
-                <a:solidFill>
-                  <a:srgbClr val="4A4A4A"/>
-                </a:solidFill>
-                <a:latin typeface="Geist"/>
-              </a:rPr>
-              <a:t>~15 min, 6 friction pts</a:t>
-            </a:r>
-          </a:p>
-        </p:txBody>
-      </p:sp>
-      <p:sp>
-        <p:nvSpPr>
-          <p:cNvPr id="16" name="TextBox 15"/>
-          <p:cNvSpPr txBox="1"/>
-          <p:nvPr/>
-        </p:nvSpPr>
-        <p:spPr>
-          <a:xfrm>
-            <a:off x="9465628" y="3040000"/>
-            <a:ext cx="2000000" cy="560000"/>
-          </a:xfrm>
-          <a:prstGeom prst="rect">
-            <a:avLst/>
-          </a:prstGeom>
-          <a:noFill/>
-        </p:spPr>
-        <p:txBody>
-          <a:bodyPr wrap="square">
-            <a:spAutoFit/>
-          </a:bodyPr>
-          <a:lstStyle/>
-          <a:p>
-            <a:pPr algn="l"/>
-            <a:r>
-              <a:rPr sz="1300" b="0" i="0">
-                <a:solidFill>
-                  <a:srgbClr val="1A1A1A"/>
-                </a:solidFill>
-                <a:latin typeface="Geist"/>
-              </a:rPr>
-              <a:t>Under 15 min, clean</a:t>
-            </a:r>
-          </a:p>
-        </p:txBody>
-      </p:sp>
-      <p:sp>
-        <p:nvSpPr>
-          <p:cNvPr id="17" name="Rectangle 16"/>
-          <p:cNvSpPr/>
-          <p:nvPr/>
-        </p:nvSpPr>
-        <p:spPr>
-          <a:xfrm>
-            <a:off x="685628" y="3720000"/>
-            <a:ext cx="10820744" cy="790000"/>
-          </a:xfrm>
-          <a:prstGeom prst="rect">
+            <a:off x="4354209" y="1350000"/>
+            <a:ext cx="3483581" cy="4900000"/>
+          </a:xfrm>
+          <a:prstGeom prst="roundRect">
             <a:avLst/>
           </a:prstGeom>
           <a:solidFill>
@@ -17848,14 +18179,14 @@
       </p:sp>
       <p:sp>
         <p:nvSpPr>
-          <p:cNvPr id="18" name="TextBox 17"/>
-          <p:cNvSpPr txBox="1"/>
-          <p:nvPr/>
-        </p:nvSpPr>
-        <p:spPr>
-          <a:xfrm>
-            <a:off x="865628" y="3860000"/>
-            <a:ext cx="5000000" cy="560000"/>
+          <p:cNvPr id="9" name="TextBox 8"/>
+          <p:cNvSpPr txBox="1"/>
+          <p:nvPr/>
+        </p:nvSpPr>
+        <p:spPr>
+          <a:xfrm>
+            <a:off x="4539209" y="1535000"/>
+            <a:ext cx="3113581" cy="430000"/>
           </a:xfrm>
           <a:prstGeom prst="rect">
             <a:avLst/>
@@ -17870,247 +18201,67 @@
           <a:p>
             <a:pPr algn="l"/>
             <a:r>
-              <a:rPr sz="1300" b="0" i="0">
+              <a:rPr sz="1700" b="0" i="0">
                 <a:solidFill>
                   <a:srgbClr val="1A1A1A"/>
                 </a:solidFill>
+                <a:latin typeface="Geist ExtraBold"/>
+              </a:rPr>
+              <a:t>Sales Enablement</a:t>
+            </a:r>
+          </a:p>
+        </p:txBody>
+      </p:sp>
+      <p:sp>
+        <p:nvSpPr>
+          <p:cNvPr id="10" name="TextBox 9"/>
+          <p:cNvSpPr txBox="1"/>
+          <p:nvPr/>
+        </p:nvSpPr>
+        <p:spPr>
+          <a:xfrm>
+            <a:off x="4539209" y="1995000"/>
+            <a:ext cx="3113581" cy="4070000"/>
+          </a:xfrm>
+          <a:prstGeom prst="rect">
+            <a:avLst/>
+          </a:prstGeom>
+          <a:noFill/>
+        </p:spPr>
+        <p:txBody>
+          <a:bodyPr wrap="square">
+            <a:spAutoFit/>
+          </a:bodyPr>
+          <a:lstStyle/>
+          <a:p>
+            <a:pPr algn="l"/>
+            <a:r>
+              <a:rPr sz="1400" b="0" i="0">
+                <a:solidFill>
+                  <a:srgbClr val="4A4A4A"/>
+                </a:solidFill>
                 <a:latin typeface="Geist"/>
               </a:rPr>
-              <a:t>Developer funnel drop-off (by stage)</a:t>
-            </a:r>
-          </a:p>
-        </p:txBody>
-      </p:sp>
-      <p:sp>
-        <p:nvSpPr>
-          <p:cNvPr id="19" name="TextBox 18"/>
-          <p:cNvSpPr txBox="1"/>
-          <p:nvPr/>
-        </p:nvSpPr>
-        <p:spPr>
-          <a:xfrm>
-            <a:off x="6265628" y="3860000"/>
-            <a:ext cx="2900000" cy="560000"/>
-          </a:xfrm>
-          <a:prstGeom prst="rect">
-            <a:avLst/>
-          </a:prstGeom>
-          <a:noFill/>
-        </p:spPr>
-        <p:txBody>
-          <a:bodyPr wrap="square">
-            <a:spAutoFit/>
-          </a:bodyPr>
-          <a:lstStyle/>
-          <a:p>
-            <a:pPr algn="l"/>
-            <a:r>
-              <a:rPr sz="1300" b="0" i="0">
-                <a:solidFill>
-                  <a:srgbClr val="4A4A4A"/>
-                </a:solidFill>
-                <a:latin typeface="Geist"/>
-              </a:rPr>
-              <a:t>Established at Day 30</a:t>
-            </a:r>
-          </a:p>
-        </p:txBody>
-      </p:sp>
-      <p:sp>
-        <p:nvSpPr>
-          <p:cNvPr id="20" name="TextBox 19"/>
-          <p:cNvSpPr txBox="1"/>
-          <p:nvPr/>
-        </p:nvSpPr>
-        <p:spPr>
-          <a:xfrm>
-            <a:off x="9465628" y="3860000"/>
-            <a:ext cx="2000000" cy="560000"/>
-          </a:xfrm>
-          <a:prstGeom prst="rect">
-            <a:avLst/>
-          </a:prstGeom>
-          <a:noFill/>
-        </p:spPr>
-        <p:txBody>
-          <a:bodyPr wrap="square">
-            <a:spAutoFit/>
-          </a:bodyPr>
-          <a:lstStyle/>
-          <a:p>
-            <a:pPr algn="l"/>
-            <a:r>
-              <a:rPr sz="1300" b="0" i="0">
-                <a:solidFill>
-                  <a:srgbClr val="1A1A1A"/>
-                </a:solidFill>
-                <a:latin typeface="Geist"/>
-              </a:rPr>
-              <a:t>20%+ improvement at highest-loss stage</a:t>
-            </a:r>
-          </a:p>
-        </p:txBody>
-      </p:sp>
-      <p:sp>
-        <p:nvSpPr>
-          <p:cNvPr id="21" name="Rectangle 20"/>
+              <a:t>Enterprise deals stall when the AE can't answer the technical question.
+Battlecard: Connect AI vs Composio — one honest answer per objection.
+"When an engineer asks about Connect AI" — a one-page technical guide for the field.
+PMM ships this. DevRel tests it with community.</a:t>
+            </a:r>
+          </a:p>
+        </p:txBody>
+      </p:sp>
+      <p:sp>
+        <p:nvSpPr>
+          <p:cNvPr id="11" name="Rounded Rectangle 10"/>
           <p:cNvSpPr/>
           <p:nvPr/>
         </p:nvSpPr>
         <p:spPr>
           <a:xfrm>
-            <a:off x="685628" y="4540000"/>
-            <a:ext cx="10820744" cy="790000"/>
-          </a:xfrm>
-          <a:prstGeom prst="rect">
-            <a:avLst/>
-          </a:prstGeom>
-          <a:solidFill>
-            <a:srgbClr val="F8F8F5"/>
-          </a:solidFill>
-          <a:ln>
-            <a:noFill/>
-          </a:ln>
-        </p:spPr>
-        <p:style>
-          <a:lnRef idx="1">
-            <a:schemeClr val="accent1"/>
-          </a:lnRef>
-          <a:fillRef idx="3">
-            <a:schemeClr val="accent1"/>
-          </a:fillRef>
-          <a:effectRef idx="2">
-            <a:schemeClr val="accent1"/>
-          </a:effectRef>
-          <a:fontRef idx="minor">
-            <a:schemeClr val="lt1"/>
-          </a:fontRef>
-        </p:style>
-        <p:txBody>
-          <a:bodyPr rtlCol="0" anchor="ctr"/>
-          <a:lstStyle/>
-          <a:p>
-            <a:pPr algn="ctr"/>
-          </a:p>
-        </p:txBody>
-      </p:sp>
-      <p:sp>
-        <p:nvSpPr>
-          <p:cNvPr id="22" name="TextBox 21"/>
-          <p:cNvSpPr txBox="1"/>
-          <p:nvPr/>
-        </p:nvSpPr>
-        <p:spPr>
-          <a:xfrm>
-            <a:off x="865628" y="4680000"/>
-            <a:ext cx="5000000" cy="560000"/>
-          </a:xfrm>
-          <a:prstGeom prst="rect">
-            <a:avLst/>
-          </a:prstGeom>
-          <a:noFill/>
-        </p:spPr>
-        <p:txBody>
-          <a:bodyPr wrap="square">
-            <a:spAutoFit/>
-          </a:bodyPr>
-          <a:lstStyle/>
-          <a:p>
-            <a:pPr algn="l"/>
-            <a:r>
-              <a:rPr sz="1300" b="0" i="0">
-                <a:solidFill>
-                  <a:srgbClr val="1A1A1A"/>
-                </a:solidFill>
-                <a:latin typeface="Geist"/>
-              </a:rPr>
-              <a:t>Keyword cluster rankings (5 clusters)</a:t>
-            </a:r>
-          </a:p>
-        </p:txBody>
-      </p:sp>
-      <p:sp>
-        <p:nvSpPr>
-          <p:cNvPr id="23" name="TextBox 22"/>
-          <p:cNvSpPr txBox="1"/>
-          <p:nvPr/>
-        </p:nvSpPr>
-        <p:spPr>
-          <a:xfrm>
-            <a:off x="6265628" y="4680000"/>
-            <a:ext cx="2900000" cy="560000"/>
-          </a:xfrm>
-          <a:prstGeom prst="rect">
-            <a:avLst/>
-          </a:prstGeom>
-          <a:noFill/>
-        </p:spPr>
-        <p:txBody>
-          <a:bodyPr wrap="square">
-            <a:spAutoFit/>
-          </a:bodyPr>
-          <a:lstStyle/>
-          <a:p>
-            <a:pPr algn="l"/>
-            <a:r>
-              <a:rPr sz="1300" b="0" i="0">
-                <a:solidFill>
-                  <a:srgbClr val="4A4A4A"/>
-                </a:solidFill>
-                <a:latin typeface="Geist"/>
-              </a:rPr>
-              <a:t>Mapped at Day 30</a:t>
-            </a:r>
-          </a:p>
-        </p:txBody>
-      </p:sp>
-      <p:sp>
-        <p:nvSpPr>
-          <p:cNvPr id="24" name="TextBox 23"/>
-          <p:cNvSpPr txBox="1"/>
-          <p:nvPr/>
-        </p:nvSpPr>
-        <p:spPr>
-          <a:xfrm>
-            <a:off x="9465628" y="4680000"/>
-            <a:ext cx="2000000" cy="560000"/>
-          </a:xfrm>
-          <a:prstGeom prst="rect">
-            <a:avLst/>
-          </a:prstGeom>
-          <a:noFill/>
-        </p:spPr>
-        <p:txBody>
-          <a:bodyPr wrap="square">
-            <a:spAutoFit/>
-          </a:bodyPr>
-          <a:lstStyle/>
-          <a:p>
-            <a:pPr algn="l"/>
-            <a:r>
-              <a:rPr sz="1300" b="0" i="0">
-                <a:solidFill>
-                  <a:srgbClr val="1A1A1A"/>
-                </a:solidFill>
-                <a:latin typeface="Geist"/>
-              </a:rPr>
-              <a:t>Movement on 3–5 clusters</a:t>
-            </a:r>
-          </a:p>
-        </p:txBody>
-      </p:sp>
-      <p:sp>
-        <p:nvSpPr>
-          <p:cNvPr id="25" name="Rectangle 24"/>
-          <p:cNvSpPr/>
-          <p:nvPr/>
-        </p:nvSpPr>
-        <p:spPr>
-          <a:xfrm>
-            <a:off x="685628" y="5360000"/>
-            <a:ext cx="10820744" cy="790000"/>
-          </a:xfrm>
-          <a:prstGeom prst="rect">
+            <a:off x="8022790" y="1350000"/>
+            <a:ext cx="3483581" cy="4900000"/>
+          </a:xfrm>
+          <a:prstGeom prst="roundRect">
             <a:avLst/>
           </a:prstGeom>
           <a:solidFill>
@@ -18144,14 +18295,14 @@
       </p:sp>
       <p:sp>
         <p:nvSpPr>
-          <p:cNvPr id="26" name="TextBox 25"/>
-          <p:cNvSpPr txBox="1"/>
-          <p:nvPr/>
-        </p:nvSpPr>
-        <p:spPr>
-          <a:xfrm>
-            <a:off x="865628" y="5500000"/>
-            <a:ext cx="5000000" cy="560000"/>
+          <p:cNvPr id="12" name="TextBox 11"/>
+          <p:cNvSpPr txBox="1"/>
+          <p:nvPr/>
+        </p:nvSpPr>
+        <p:spPr>
+          <a:xfrm>
+            <a:off x="8207790" y="1535000"/>
+            <a:ext cx="3113581" cy="430000"/>
           </a:xfrm>
           <a:prstGeom prst="rect">
             <a:avLst/>
@@ -18166,83 +18317,51 @@
           <a:p>
             <a:pPr algn="l"/>
             <a:r>
-              <a:rPr sz="1300" b="0" i="0">
+              <a:rPr sz="1700" b="0" i="0">
                 <a:solidFill>
                   <a:srgbClr val="1A1A1A"/>
                 </a:solidFill>
+                <a:latin typeface="Geist ExtraBold"/>
+              </a:rPr>
+              <a:t>Day 90: Re-run the Baseline</a:t>
+            </a:r>
+          </a:p>
+        </p:txBody>
+      </p:sp>
+      <p:sp>
+        <p:nvSpPr>
+          <p:cNvPr id="13" name="TextBox 12"/>
+          <p:cNvSpPr txBox="1"/>
+          <p:nvPr/>
+        </p:nvSpPr>
+        <p:spPr>
+          <a:xfrm>
+            <a:off x="8207790" y="1995000"/>
+            <a:ext cx="3113581" cy="4070000"/>
+          </a:xfrm>
+          <a:prstGeom prst="rect">
+            <a:avLst/>
+          </a:prstGeom>
+          <a:noFill/>
+        </p:spPr>
+        <p:txBody>
+          <a:bodyPr wrap="square">
+            <a:spAutoFit/>
+          </a:bodyPr>
+          <a:lstStyle/>
+          <a:p>
+            <a:pPr algn="l"/>
+            <a:r>
+              <a:rPr sz="1400" b="0" i="0">
+                <a:solidFill>
+                  <a:srgbClr val="4A4A4A"/>
+                </a:solidFill>
                 <a:latin typeface="Geist"/>
               </a:rPr>
-              <a:t>Community-influenced pipeline</a:t>
-            </a:r>
-          </a:p>
-        </p:txBody>
-      </p:sp>
-      <p:sp>
-        <p:nvSpPr>
-          <p:cNvPr id="27" name="TextBox 26"/>
-          <p:cNvSpPr txBox="1"/>
-          <p:nvPr/>
-        </p:nvSpPr>
-        <p:spPr>
-          <a:xfrm>
-            <a:off x="6265628" y="5500000"/>
-            <a:ext cx="2900000" cy="560000"/>
-          </a:xfrm>
-          <a:prstGeom prst="rect">
-            <a:avLst/>
-          </a:prstGeom>
-          <a:noFill/>
-        </p:spPr>
-        <p:txBody>
-          <a:bodyPr wrap="square">
-            <a:spAutoFit/>
-          </a:bodyPr>
-          <a:lstStyle/>
-          <a:p>
-            <a:pPr algn="l"/>
-            <a:r>
-              <a:rPr sz="1300" b="0" i="0">
-                <a:solidFill>
-                  <a:srgbClr val="4A4A4A"/>
-                </a:solidFill>
-                <a:latin typeface="Geist"/>
-              </a:rPr>
-              <a:t>Not attributed</a:t>
-            </a:r>
-          </a:p>
-        </p:txBody>
-      </p:sp>
-      <p:sp>
-        <p:nvSpPr>
-          <p:cNvPr id="28" name="TextBox 27"/>
-          <p:cNvSpPr txBox="1"/>
-          <p:nvPr/>
-        </p:nvSpPr>
-        <p:spPr>
-          <a:xfrm>
-            <a:off x="9465628" y="5500000"/>
-            <a:ext cx="2000000" cy="560000"/>
-          </a:xfrm>
-          <a:prstGeom prst="rect">
-            <a:avLst/>
-          </a:prstGeom>
-          <a:noFill/>
-        </p:spPr>
-        <p:txBody>
-          <a:bodyPr wrap="square">
-            <a:spAutoFit/>
-          </a:bodyPr>
-          <a:lstStyle/>
-          <a:p>
-            <a:pPr algn="l"/>
-            <a:r>
-              <a:rPr sz="1300" b="0" i="0">
-                <a:solidFill>
-                  <a:srgbClr val="1A1A1A"/>
-                </a:solidFill>
-                <a:latin typeface="Geist"/>
-              </a:rPr>
-              <a:t>Attribution established + first tagged deal</a:t>
+              <a:t>Same 5 LLM queries from Day 1.
+Day 1:   0 / 5 mentioned CData.
+Target:  2–3 / 5.
+This is the number we're accountable to. Not traffic, not MQLs. The metric that proves positioning actually moved.</a:t>
             </a:r>
           </a:p>
         </p:txBody>
@@ -18327,7 +18446,7 @@
                 </a:solidFill>
                 <a:latin typeface="DM Sans"/>
               </a:rPr>
-              <a:t>TEAM STRUCTURE</a:t>
+              <a:t>GOALS</a:t>
             </a:r>
           </a:p>
         </p:txBody>
@@ -18356,29 +18475,177 @@
           <a:p>
             <a:pPr algn="l"/>
             <a:r>
-              <a:rPr sz="4400" b="0" i="0">
+              <a:rPr sz="4000" b="0" i="0">
                 <a:solidFill>
                   <a:srgbClr val="1A1A1A"/>
                 </a:solidFill>
                 <a:latin typeface="Geist ExtraBold"/>
               </a:rPr>
-              <a:t>PMM and DevRel.</a:t>
-            </a:r>
-          </a:p>
-        </p:txBody>
-      </p:sp>
-      <p:sp>
-        <p:nvSpPr>
-          <p:cNvPr id="5" name="Rounded Rectangle 4"/>
+              <a:t>Goals framework.</a:t>
+            </a:r>
+          </a:p>
+        </p:txBody>
+      </p:sp>
+      <p:sp>
+        <p:nvSpPr>
+          <p:cNvPr id="5" name="Rectangle 4"/>
           <p:cNvSpPr/>
           <p:nvPr/>
         </p:nvSpPr>
         <p:spPr>
           <a:xfrm>
-            <a:off x="685628" y="1800000"/>
-            <a:ext cx="5300372" cy="3200000"/>
-          </a:xfrm>
-          <a:prstGeom prst="roundRect">
+            <a:off x="685628" y="1700000"/>
+            <a:ext cx="10820744" cy="380000"/>
+          </a:xfrm>
+          <a:prstGeom prst="rect">
+            <a:avLst/>
+          </a:prstGeom>
+          <a:solidFill>
+            <a:srgbClr val="1A1A1A"/>
+          </a:solidFill>
+          <a:ln>
+            <a:noFill/>
+          </a:ln>
+        </p:spPr>
+        <p:style>
+          <a:lnRef idx="1">
+            <a:schemeClr val="accent1"/>
+          </a:lnRef>
+          <a:fillRef idx="3">
+            <a:schemeClr val="accent1"/>
+          </a:fillRef>
+          <a:effectRef idx="2">
+            <a:schemeClr val="accent1"/>
+          </a:effectRef>
+          <a:fontRef idx="minor">
+            <a:schemeClr val="lt1"/>
+          </a:fontRef>
+        </p:style>
+        <p:txBody>
+          <a:bodyPr rtlCol="0" anchor="ctr"/>
+          <a:lstStyle/>
+          <a:p>
+            <a:pPr algn="ctr"/>
+          </a:p>
+        </p:txBody>
+      </p:sp>
+      <p:sp>
+        <p:nvSpPr>
+          <p:cNvPr id="6" name="TextBox 5"/>
+          <p:cNvSpPr txBox="1"/>
+          <p:nvPr/>
+        </p:nvSpPr>
+        <p:spPr>
+          <a:xfrm>
+            <a:off x="865628" y="1780000"/>
+            <a:ext cx="4000000" cy="240000"/>
+          </a:xfrm>
+          <a:prstGeom prst="rect">
+            <a:avLst/>
+          </a:prstGeom>
+          <a:noFill/>
+        </p:spPr>
+        <p:txBody>
+          <a:bodyPr wrap="none">
+            <a:spAutoFit/>
+          </a:bodyPr>
+          <a:lstStyle/>
+          <a:p>
+            <a:pPr algn="l"/>
+            <a:r>
+              <a:rPr sz="1100" b="0" i="0">
+                <a:solidFill>
+                  <a:srgbClr val="FFFFFF"/>
+                </a:solidFill>
+                <a:latin typeface="Geist ExtraBold"/>
+              </a:rPr>
+              <a:t>Metric</a:t>
+            </a:r>
+          </a:p>
+        </p:txBody>
+      </p:sp>
+      <p:sp>
+        <p:nvSpPr>
+          <p:cNvPr id="7" name="TextBox 6"/>
+          <p:cNvSpPr txBox="1"/>
+          <p:nvPr/>
+        </p:nvSpPr>
+        <p:spPr>
+          <a:xfrm>
+            <a:off x="6265628" y="1780000"/>
+            <a:ext cx="4000000" cy="240000"/>
+          </a:xfrm>
+          <a:prstGeom prst="rect">
+            <a:avLst/>
+          </a:prstGeom>
+          <a:noFill/>
+        </p:spPr>
+        <p:txBody>
+          <a:bodyPr wrap="none">
+            <a:spAutoFit/>
+          </a:bodyPr>
+          <a:lstStyle/>
+          <a:p>
+            <a:pPr algn="l"/>
+            <a:r>
+              <a:rPr sz="1100" b="0" i="0">
+                <a:solidFill>
+                  <a:srgbClr val="FFFFFF"/>
+                </a:solidFill>
+                <a:latin typeface="Geist ExtraBold"/>
+              </a:rPr>
+              <a:t>Day 30 baseline</a:t>
+            </a:r>
+          </a:p>
+        </p:txBody>
+      </p:sp>
+      <p:sp>
+        <p:nvSpPr>
+          <p:cNvPr id="8" name="TextBox 7"/>
+          <p:cNvSpPr txBox="1"/>
+          <p:nvPr/>
+        </p:nvSpPr>
+        <p:spPr>
+          <a:xfrm>
+            <a:off x="9465628" y="1780000"/>
+            <a:ext cx="4000000" cy="240000"/>
+          </a:xfrm>
+          <a:prstGeom prst="rect">
+            <a:avLst/>
+          </a:prstGeom>
+          <a:noFill/>
+        </p:spPr>
+        <p:txBody>
+          <a:bodyPr wrap="none">
+            <a:spAutoFit/>
+          </a:bodyPr>
+          <a:lstStyle/>
+          <a:p>
+            <a:pPr algn="l"/>
+            <a:r>
+              <a:rPr sz="1100" b="0" i="0">
+                <a:solidFill>
+                  <a:srgbClr val="FFFFFF"/>
+                </a:solidFill>
+                <a:latin typeface="Geist ExtraBold"/>
+              </a:rPr>
+              <a:t>Day 90 target</a:t>
+            </a:r>
+          </a:p>
+        </p:txBody>
+      </p:sp>
+      <p:sp>
+        <p:nvSpPr>
+          <p:cNvPr id="9" name="Rectangle 8"/>
+          <p:cNvSpPr/>
+          <p:nvPr/>
+        </p:nvSpPr>
+        <p:spPr>
+          <a:xfrm>
+            <a:off x="685628" y="2080000"/>
+            <a:ext cx="10820744" cy="790000"/>
+          </a:xfrm>
+          <a:prstGeom prst="rect">
             <a:avLst/>
           </a:prstGeom>
           <a:solidFill>
@@ -18412,14 +18679,14 @@
       </p:sp>
       <p:sp>
         <p:nvSpPr>
-          <p:cNvPr id="6" name="TextBox 5"/>
-          <p:cNvSpPr txBox="1"/>
-          <p:nvPr/>
-        </p:nvSpPr>
-        <p:spPr>
-          <a:xfrm>
-            <a:off x="870628" y="1985000"/>
-            <a:ext cx="4930372" cy="430000"/>
+          <p:cNvPr id="10" name="TextBox 9"/>
+          <p:cNvSpPr txBox="1"/>
+          <p:nvPr/>
+        </p:nvSpPr>
+        <p:spPr>
+          <a:xfrm>
+            <a:off x="865628" y="2220000"/>
+            <a:ext cx="5000000" cy="560000"/>
           </a:xfrm>
           <a:prstGeom prst="rect">
             <a:avLst/>
@@ -18434,27 +18701,27 @@
           <a:p>
             <a:pPr algn="l"/>
             <a:r>
-              <a:rPr sz="1700" b="0" i="0">
+              <a:rPr sz="1300" b="0" i="0">
                 <a:solidFill>
                   <a:srgbClr val="1A1A1A"/>
                 </a:solidFill>
-                <a:latin typeface="Geist ExtraBold"/>
-              </a:rPr>
-              <a:t>DevRel earns trust</a:t>
-            </a:r>
-          </a:p>
-        </p:txBody>
-      </p:sp>
-      <p:sp>
-        <p:nvSpPr>
-          <p:cNvPr id="7" name="TextBox 6"/>
-          <p:cNvSpPr txBox="1"/>
-          <p:nvPr/>
-        </p:nvSpPr>
-        <p:spPr>
-          <a:xfrm>
-            <a:off x="870628" y="2445000"/>
-            <a:ext cx="4930372" cy="2370000"/>
+                <a:latin typeface="Geist"/>
+              </a:rPr>
+              <a:t>LLM discoverability (5 key queries)</a:t>
+            </a:r>
+          </a:p>
+        </p:txBody>
+      </p:sp>
+      <p:sp>
+        <p:nvSpPr>
+          <p:cNvPr id="11" name="TextBox 10"/>
+          <p:cNvSpPr txBox="1"/>
+          <p:nvPr/>
+        </p:nvSpPr>
+        <p:spPr>
+          <a:xfrm>
+            <a:off x="6265628" y="2220000"/>
+            <a:ext cx="2900000" cy="560000"/>
           </a:xfrm>
           <a:prstGeom prst="rect">
             <a:avLst/>
@@ -18469,31 +18736,212 @@
           <a:p>
             <a:pPr algn="l"/>
             <a:r>
-              <a:rPr sz="1400" b="0" i="0">
+              <a:rPr sz="1300" b="0" i="0">
                 <a:solidFill>
                   <a:srgbClr val="4A4A4A"/>
                 </a:solidFill>
                 <a:latin typeface="Geist"/>
               </a:rPr>
-              <a:t>Discord, GitHub, conference talks, working demos.
-Builds presence where the developer actually is.
-Brings back what developers are asking and what they're struggling with.</a:t>
-            </a:r>
-          </a:p>
-        </p:txBody>
-      </p:sp>
-      <p:sp>
-        <p:nvSpPr>
-          <p:cNvPr id="8" name="Rounded Rectangle 7"/>
+              <a:t>0/5 — current baseline</a:t>
+            </a:r>
+          </a:p>
+        </p:txBody>
+      </p:sp>
+      <p:sp>
+        <p:nvSpPr>
+          <p:cNvPr id="12" name="TextBox 11"/>
+          <p:cNvSpPr txBox="1"/>
+          <p:nvPr/>
+        </p:nvSpPr>
+        <p:spPr>
+          <a:xfrm>
+            <a:off x="9465628" y="2220000"/>
+            <a:ext cx="2000000" cy="560000"/>
+          </a:xfrm>
+          <a:prstGeom prst="rect">
+            <a:avLst/>
+          </a:prstGeom>
+          <a:noFill/>
+        </p:spPr>
+        <p:txBody>
+          <a:bodyPr wrap="square">
+            <a:spAutoFit/>
+          </a:bodyPr>
+          <a:lstStyle/>
+          <a:p>
+            <a:pPr algn="l"/>
+            <a:r>
+              <a:rPr sz="1300" b="0" i="0">
+                <a:solidFill>
+                  <a:srgbClr val="1A1A1A"/>
+                </a:solidFill>
+                <a:latin typeface="Geist"/>
+              </a:rPr>
+              <a:t>2–3/5</a:t>
+            </a:r>
+          </a:p>
+        </p:txBody>
+      </p:sp>
+      <p:sp>
+        <p:nvSpPr>
+          <p:cNvPr id="13" name="Rectangle 12"/>
           <p:cNvSpPr/>
           <p:nvPr/>
         </p:nvSpPr>
         <p:spPr>
           <a:xfrm>
-            <a:off x="6206000" y="1800000"/>
-            <a:ext cx="5300372" cy="3200000"/>
-          </a:xfrm>
-          <a:prstGeom prst="roundRect">
+            <a:off x="685628" y="2900000"/>
+            <a:ext cx="10820744" cy="790000"/>
+          </a:xfrm>
+          <a:prstGeom prst="rect">
+            <a:avLst/>
+          </a:prstGeom>
+          <a:solidFill>
+            <a:srgbClr val="F8F8F5"/>
+          </a:solidFill>
+          <a:ln>
+            <a:noFill/>
+          </a:ln>
+        </p:spPr>
+        <p:style>
+          <a:lnRef idx="1">
+            <a:schemeClr val="accent1"/>
+          </a:lnRef>
+          <a:fillRef idx="3">
+            <a:schemeClr val="accent1"/>
+          </a:fillRef>
+          <a:effectRef idx="2">
+            <a:schemeClr val="accent1"/>
+          </a:effectRef>
+          <a:fontRef idx="minor">
+            <a:schemeClr val="lt1"/>
+          </a:fontRef>
+        </p:style>
+        <p:txBody>
+          <a:bodyPr rtlCol="0" anchor="ctr"/>
+          <a:lstStyle/>
+          <a:p>
+            <a:pPr algn="ctr"/>
+          </a:p>
+        </p:txBody>
+      </p:sp>
+      <p:sp>
+        <p:nvSpPr>
+          <p:cNvPr id="14" name="TextBox 13"/>
+          <p:cNvSpPr txBox="1"/>
+          <p:nvPr/>
+        </p:nvSpPr>
+        <p:spPr>
+          <a:xfrm>
+            <a:off x="865628" y="3040000"/>
+            <a:ext cx="5000000" cy="560000"/>
+          </a:xfrm>
+          <a:prstGeom prst="rect">
+            <a:avLst/>
+          </a:prstGeom>
+          <a:noFill/>
+        </p:spPr>
+        <p:txBody>
+          <a:bodyPr wrap="square">
+            <a:spAutoFit/>
+          </a:bodyPr>
+          <a:lstStyle/>
+          <a:p>
+            <a:pPr algn="l"/>
+            <a:r>
+              <a:rPr sz="1300" b="0" i="0">
+                <a:solidFill>
+                  <a:srgbClr val="1A1A1A"/>
+                </a:solidFill>
+                <a:latin typeface="Geist"/>
+              </a:rPr>
+              <a:t>Time-to-first-API-call</a:t>
+            </a:r>
+          </a:p>
+        </p:txBody>
+      </p:sp>
+      <p:sp>
+        <p:nvSpPr>
+          <p:cNvPr id="15" name="TextBox 14"/>
+          <p:cNvSpPr txBox="1"/>
+          <p:nvPr/>
+        </p:nvSpPr>
+        <p:spPr>
+          <a:xfrm>
+            <a:off x="6265628" y="3040000"/>
+            <a:ext cx="2900000" cy="560000"/>
+          </a:xfrm>
+          <a:prstGeom prst="rect">
+            <a:avLst/>
+          </a:prstGeom>
+          <a:noFill/>
+        </p:spPr>
+        <p:txBody>
+          <a:bodyPr wrap="square">
+            <a:spAutoFit/>
+          </a:bodyPr>
+          <a:lstStyle/>
+          <a:p>
+            <a:pPr algn="l"/>
+            <a:r>
+              <a:rPr sz="1300" b="0" i="0">
+                <a:solidFill>
+                  <a:srgbClr val="4A4A4A"/>
+                </a:solidFill>
+                <a:latin typeface="Geist"/>
+              </a:rPr>
+              <a:t>~15 min, 6 friction pts</a:t>
+            </a:r>
+          </a:p>
+        </p:txBody>
+      </p:sp>
+      <p:sp>
+        <p:nvSpPr>
+          <p:cNvPr id="16" name="TextBox 15"/>
+          <p:cNvSpPr txBox="1"/>
+          <p:nvPr/>
+        </p:nvSpPr>
+        <p:spPr>
+          <a:xfrm>
+            <a:off x="9465628" y="3040000"/>
+            <a:ext cx="2000000" cy="560000"/>
+          </a:xfrm>
+          <a:prstGeom prst="rect">
+            <a:avLst/>
+          </a:prstGeom>
+          <a:noFill/>
+        </p:spPr>
+        <p:txBody>
+          <a:bodyPr wrap="square">
+            <a:spAutoFit/>
+          </a:bodyPr>
+          <a:lstStyle/>
+          <a:p>
+            <a:pPr algn="l"/>
+            <a:r>
+              <a:rPr sz="1300" b="0" i="0">
+                <a:solidFill>
+                  <a:srgbClr val="1A1A1A"/>
+                </a:solidFill>
+                <a:latin typeface="Geist"/>
+              </a:rPr>
+              <a:t>Under 15 min, clean</a:t>
+            </a:r>
+          </a:p>
+        </p:txBody>
+      </p:sp>
+      <p:sp>
+        <p:nvSpPr>
+          <p:cNvPr id="17" name="Rectangle 16"/>
+          <p:cNvSpPr/>
+          <p:nvPr/>
+        </p:nvSpPr>
+        <p:spPr>
+          <a:xfrm>
+            <a:off x="685628" y="3720000"/>
+            <a:ext cx="10820744" cy="790000"/>
+          </a:xfrm>
+          <a:prstGeom prst="rect">
             <a:avLst/>
           </a:prstGeom>
           <a:solidFill>
@@ -18527,14 +18975,14 @@
       </p:sp>
       <p:sp>
         <p:nvSpPr>
-          <p:cNvPr id="9" name="TextBox 8"/>
-          <p:cNvSpPr txBox="1"/>
-          <p:nvPr/>
-        </p:nvSpPr>
-        <p:spPr>
-          <a:xfrm>
-            <a:off x="6391000" y="1985000"/>
-            <a:ext cx="4930372" cy="430000"/>
+          <p:cNvPr id="18" name="TextBox 17"/>
+          <p:cNvSpPr txBox="1"/>
+          <p:nvPr/>
+        </p:nvSpPr>
+        <p:spPr>
+          <a:xfrm>
+            <a:off x="865628" y="3860000"/>
+            <a:ext cx="5000000" cy="560000"/>
           </a:xfrm>
           <a:prstGeom prst="rect">
             <a:avLst/>
@@ -18549,27 +18997,27 @@
           <a:p>
             <a:pPr algn="l"/>
             <a:r>
-              <a:rPr sz="1700" b="0" i="0">
+              <a:rPr sz="1300" b="0" i="0">
                 <a:solidFill>
                   <a:srgbClr val="1A1A1A"/>
                 </a:solidFill>
-                <a:latin typeface="Geist ExtraBold"/>
-              </a:rPr>
-              <a:t>PMM turns trust into pipeline</a:t>
-            </a:r>
-          </a:p>
-        </p:txBody>
-      </p:sp>
-      <p:sp>
-        <p:nvSpPr>
-          <p:cNvPr id="10" name="TextBox 9"/>
-          <p:cNvSpPr txBox="1"/>
-          <p:nvPr/>
-        </p:nvSpPr>
-        <p:spPr>
-          <a:xfrm>
-            <a:off x="6391000" y="2445000"/>
-            <a:ext cx="4930372" cy="2370000"/>
+                <a:latin typeface="Geist"/>
+              </a:rPr>
+              <a:t>Developer funnel drop-off (by stage)</a:t>
+            </a:r>
+          </a:p>
+        </p:txBody>
+      </p:sp>
+      <p:sp>
+        <p:nvSpPr>
+          <p:cNvPr id="19" name="TextBox 18"/>
+          <p:cNvSpPr txBox="1"/>
+          <p:nvPr/>
+        </p:nvSpPr>
+        <p:spPr>
+          <a:xfrm>
+            <a:off x="6265628" y="3860000"/>
+            <a:ext cx="2900000" cy="560000"/>
           </a:xfrm>
           <a:prstGeom prst="rect">
             <a:avLst/>
@@ -18584,29 +19032,27 @@
           <a:p>
             <a:pPr algn="l"/>
             <a:r>
-              <a:rPr sz="1400" b="0" i="0">
+              <a:rPr sz="1300" b="0" i="0">
                 <a:solidFill>
                   <a:srgbClr val="4A4A4A"/>
                 </a:solidFill>
                 <a:latin typeface="Geist"/>
               </a:rPr>
-              <a:t>Positioning, comparison content, attribution, Sales enablement.
-Translates developer signal into commercial messaging.
-Builds the content and funnel infrastructure that connects developer adoption to enterprise deals.</a:t>
-            </a:r>
-          </a:p>
-        </p:txBody>
-      </p:sp>
-      <p:sp>
-        <p:nvSpPr>
-          <p:cNvPr id="11" name="TextBox 10"/>
-          <p:cNvSpPr txBox="1"/>
-          <p:nvPr/>
-        </p:nvSpPr>
-        <p:spPr>
-          <a:xfrm>
-            <a:off x="685628" y="5300000"/>
-            <a:ext cx="10820744" cy="500000"/>
+              <a:t>Established at Day 30</a:t>
+            </a:r>
+          </a:p>
+        </p:txBody>
+      </p:sp>
+      <p:sp>
+        <p:nvSpPr>
+          <p:cNvPr id="20" name="TextBox 19"/>
+          <p:cNvSpPr txBox="1"/>
+          <p:nvPr/>
+        </p:nvSpPr>
+        <p:spPr>
+          <a:xfrm>
+            <a:off x="9465628" y="3860000"/>
+            <a:ext cx="2000000" cy="560000"/>
           </a:xfrm>
           <a:prstGeom prst="rect">
             <a:avLst/>
@@ -18621,13 +19067,309 @@
           <a:p>
             <a:pPr algn="l"/>
             <a:r>
-              <a:rPr sz="1400" b="0" i="0">
-                <a:solidFill>
-                  <a:srgbClr val="808080"/>
+              <a:rPr sz="1300" b="0" i="0">
+                <a:solidFill>
+                  <a:srgbClr val="1A1A1A"/>
                 </a:solidFill>
                 <a:latin typeface="Geist"/>
               </a:rPr>
-              <a:t>These are different jobs. They fail when blurred. Interface: weekly sync, shared funnel definition.</a:t>
+              <a:t>20%+ improvement at highest-loss stage</a:t>
+            </a:r>
+          </a:p>
+        </p:txBody>
+      </p:sp>
+      <p:sp>
+        <p:nvSpPr>
+          <p:cNvPr id="21" name="Rectangle 20"/>
+          <p:cNvSpPr/>
+          <p:nvPr/>
+        </p:nvSpPr>
+        <p:spPr>
+          <a:xfrm>
+            <a:off x="685628" y="4540000"/>
+            <a:ext cx="10820744" cy="790000"/>
+          </a:xfrm>
+          <a:prstGeom prst="rect">
+            <a:avLst/>
+          </a:prstGeom>
+          <a:solidFill>
+            <a:srgbClr val="F8F8F5"/>
+          </a:solidFill>
+          <a:ln>
+            <a:noFill/>
+          </a:ln>
+        </p:spPr>
+        <p:style>
+          <a:lnRef idx="1">
+            <a:schemeClr val="accent1"/>
+          </a:lnRef>
+          <a:fillRef idx="3">
+            <a:schemeClr val="accent1"/>
+          </a:fillRef>
+          <a:effectRef idx="2">
+            <a:schemeClr val="accent1"/>
+          </a:effectRef>
+          <a:fontRef idx="minor">
+            <a:schemeClr val="lt1"/>
+          </a:fontRef>
+        </p:style>
+        <p:txBody>
+          <a:bodyPr rtlCol="0" anchor="ctr"/>
+          <a:lstStyle/>
+          <a:p>
+            <a:pPr algn="ctr"/>
+          </a:p>
+        </p:txBody>
+      </p:sp>
+      <p:sp>
+        <p:nvSpPr>
+          <p:cNvPr id="22" name="TextBox 21"/>
+          <p:cNvSpPr txBox="1"/>
+          <p:nvPr/>
+        </p:nvSpPr>
+        <p:spPr>
+          <a:xfrm>
+            <a:off x="865628" y="4680000"/>
+            <a:ext cx="5000000" cy="560000"/>
+          </a:xfrm>
+          <a:prstGeom prst="rect">
+            <a:avLst/>
+          </a:prstGeom>
+          <a:noFill/>
+        </p:spPr>
+        <p:txBody>
+          <a:bodyPr wrap="square">
+            <a:spAutoFit/>
+          </a:bodyPr>
+          <a:lstStyle/>
+          <a:p>
+            <a:pPr algn="l"/>
+            <a:r>
+              <a:rPr sz="1300" b="0" i="0">
+                <a:solidFill>
+                  <a:srgbClr val="1A1A1A"/>
+                </a:solidFill>
+                <a:latin typeface="Geist"/>
+              </a:rPr>
+              <a:t>Keyword cluster rankings (5 clusters)</a:t>
+            </a:r>
+          </a:p>
+        </p:txBody>
+      </p:sp>
+      <p:sp>
+        <p:nvSpPr>
+          <p:cNvPr id="23" name="TextBox 22"/>
+          <p:cNvSpPr txBox="1"/>
+          <p:nvPr/>
+        </p:nvSpPr>
+        <p:spPr>
+          <a:xfrm>
+            <a:off x="6265628" y="4680000"/>
+            <a:ext cx="2900000" cy="560000"/>
+          </a:xfrm>
+          <a:prstGeom prst="rect">
+            <a:avLst/>
+          </a:prstGeom>
+          <a:noFill/>
+        </p:spPr>
+        <p:txBody>
+          <a:bodyPr wrap="square">
+            <a:spAutoFit/>
+          </a:bodyPr>
+          <a:lstStyle/>
+          <a:p>
+            <a:pPr algn="l"/>
+            <a:r>
+              <a:rPr sz="1300" b="0" i="0">
+                <a:solidFill>
+                  <a:srgbClr val="4A4A4A"/>
+                </a:solidFill>
+                <a:latin typeface="Geist"/>
+              </a:rPr>
+              <a:t>Mapped at Day 30</a:t>
+            </a:r>
+          </a:p>
+        </p:txBody>
+      </p:sp>
+      <p:sp>
+        <p:nvSpPr>
+          <p:cNvPr id="24" name="TextBox 23"/>
+          <p:cNvSpPr txBox="1"/>
+          <p:nvPr/>
+        </p:nvSpPr>
+        <p:spPr>
+          <a:xfrm>
+            <a:off x="9465628" y="4680000"/>
+            <a:ext cx="2000000" cy="560000"/>
+          </a:xfrm>
+          <a:prstGeom prst="rect">
+            <a:avLst/>
+          </a:prstGeom>
+          <a:noFill/>
+        </p:spPr>
+        <p:txBody>
+          <a:bodyPr wrap="square">
+            <a:spAutoFit/>
+          </a:bodyPr>
+          <a:lstStyle/>
+          <a:p>
+            <a:pPr algn="l"/>
+            <a:r>
+              <a:rPr sz="1300" b="0" i="0">
+                <a:solidFill>
+                  <a:srgbClr val="1A1A1A"/>
+                </a:solidFill>
+                <a:latin typeface="Geist"/>
+              </a:rPr>
+              <a:t>Movement on 3–5 clusters</a:t>
+            </a:r>
+          </a:p>
+        </p:txBody>
+      </p:sp>
+      <p:sp>
+        <p:nvSpPr>
+          <p:cNvPr id="25" name="Rectangle 24"/>
+          <p:cNvSpPr/>
+          <p:nvPr/>
+        </p:nvSpPr>
+        <p:spPr>
+          <a:xfrm>
+            <a:off x="685628" y="5360000"/>
+            <a:ext cx="10820744" cy="790000"/>
+          </a:xfrm>
+          <a:prstGeom prst="rect">
+            <a:avLst/>
+          </a:prstGeom>
+          <a:solidFill>
+            <a:srgbClr val="ECEDE8"/>
+          </a:solidFill>
+          <a:ln>
+            <a:noFill/>
+          </a:ln>
+        </p:spPr>
+        <p:style>
+          <a:lnRef idx="1">
+            <a:schemeClr val="accent1"/>
+          </a:lnRef>
+          <a:fillRef idx="3">
+            <a:schemeClr val="accent1"/>
+          </a:fillRef>
+          <a:effectRef idx="2">
+            <a:schemeClr val="accent1"/>
+          </a:effectRef>
+          <a:fontRef idx="minor">
+            <a:schemeClr val="lt1"/>
+          </a:fontRef>
+        </p:style>
+        <p:txBody>
+          <a:bodyPr rtlCol="0" anchor="ctr"/>
+          <a:lstStyle/>
+          <a:p>
+            <a:pPr algn="ctr"/>
+          </a:p>
+        </p:txBody>
+      </p:sp>
+      <p:sp>
+        <p:nvSpPr>
+          <p:cNvPr id="26" name="TextBox 25"/>
+          <p:cNvSpPr txBox="1"/>
+          <p:nvPr/>
+        </p:nvSpPr>
+        <p:spPr>
+          <a:xfrm>
+            <a:off x="865628" y="5500000"/>
+            <a:ext cx="5000000" cy="560000"/>
+          </a:xfrm>
+          <a:prstGeom prst="rect">
+            <a:avLst/>
+          </a:prstGeom>
+          <a:noFill/>
+        </p:spPr>
+        <p:txBody>
+          <a:bodyPr wrap="square">
+            <a:spAutoFit/>
+          </a:bodyPr>
+          <a:lstStyle/>
+          <a:p>
+            <a:pPr algn="l"/>
+            <a:r>
+              <a:rPr sz="1300" b="0" i="0">
+                <a:solidFill>
+                  <a:srgbClr val="1A1A1A"/>
+                </a:solidFill>
+                <a:latin typeface="Geist"/>
+              </a:rPr>
+              <a:t>Community-influenced pipeline</a:t>
+            </a:r>
+          </a:p>
+        </p:txBody>
+      </p:sp>
+      <p:sp>
+        <p:nvSpPr>
+          <p:cNvPr id="27" name="TextBox 26"/>
+          <p:cNvSpPr txBox="1"/>
+          <p:nvPr/>
+        </p:nvSpPr>
+        <p:spPr>
+          <a:xfrm>
+            <a:off x="6265628" y="5500000"/>
+            <a:ext cx="2900000" cy="560000"/>
+          </a:xfrm>
+          <a:prstGeom prst="rect">
+            <a:avLst/>
+          </a:prstGeom>
+          <a:noFill/>
+        </p:spPr>
+        <p:txBody>
+          <a:bodyPr wrap="square">
+            <a:spAutoFit/>
+          </a:bodyPr>
+          <a:lstStyle/>
+          <a:p>
+            <a:pPr algn="l"/>
+            <a:r>
+              <a:rPr sz="1300" b="0" i="0">
+                <a:solidFill>
+                  <a:srgbClr val="4A4A4A"/>
+                </a:solidFill>
+                <a:latin typeface="Geist"/>
+              </a:rPr>
+              <a:t>Not attributed</a:t>
+            </a:r>
+          </a:p>
+        </p:txBody>
+      </p:sp>
+      <p:sp>
+        <p:nvSpPr>
+          <p:cNvPr id="28" name="TextBox 27"/>
+          <p:cNvSpPr txBox="1"/>
+          <p:nvPr/>
+        </p:nvSpPr>
+        <p:spPr>
+          <a:xfrm>
+            <a:off x="9465628" y="5500000"/>
+            <a:ext cx="2000000" cy="560000"/>
+          </a:xfrm>
+          <a:prstGeom prst="rect">
+            <a:avLst/>
+          </a:prstGeom>
+          <a:noFill/>
+        </p:spPr>
+        <p:txBody>
+          <a:bodyPr wrap="square">
+            <a:spAutoFit/>
+          </a:bodyPr>
+          <a:lstStyle/>
+          <a:p>
+            <a:pPr algn="l"/>
+            <a:r>
+              <a:rPr sz="1300" b="0" i="0">
+                <a:solidFill>
+                  <a:srgbClr val="1A1A1A"/>
+                </a:solidFill>
+                <a:latin typeface="Geist"/>
+              </a:rPr>
+              <a:t>Attribution established + first tagged deal</a:t>
             </a:r>
           </a:p>
         </p:txBody>
@@ -18646,7 +19388,7 @@
     <p:bg>
       <p:bgPr>
         <a:solidFill>
-          <a:srgbClr val="1A1A1A"/>
+          <a:srgbClr val="F5F5F0"/>
         </a:solidFill>
         <a:effectLst/>
       </p:bgPr>
@@ -18660,7 +19402,7 @@
       <p:grpSpPr/>
       <p:pic>
         <p:nvPicPr>
-          <p:cNvPr id="2" name="Picture 1" descr="cdata-logo-light.png"/>
+          <p:cNvPr id="2" name="Picture 1" descr="cdata-logo-dark.png"/>
           <p:cNvPicPr>
             <a:picLocks noChangeAspect="1"/>
           </p:cNvPicPr>
@@ -18690,8 +19432,8 @@
         </p:nvSpPr>
         <p:spPr>
           <a:xfrm>
-            <a:off x="685628" y="1400000"/>
-            <a:ext cx="10820744" cy="600000"/>
+            <a:off x="685628" y="340000"/>
+            <a:ext cx="5803500" cy="220000"/>
           </a:xfrm>
           <a:prstGeom prst="rect">
             <a:avLst/>
@@ -18706,13 +19448,13 @@
           <a:p>
             <a:pPr algn="l"/>
             <a:r>
-              <a:rPr sz="2200" b="0" i="0">
-                <a:solidFill>
-                  <a:srgbClr val="FFE500"/>
-                </a:solidFill>
-                <a:latin typeface="Geist"/>
-              </a:rPr>
-              <a:t>What developer content actually works:</a:t>
+              <a:rPr sz="1100" b="0" i="0">
+                <a:solidFill>
+                  <a:srgbClr val="1A1A1A"/>
+                </a:solidFill>
+                <a:latin typeface="DM Sans"/>
+              </a:rPr>
+              <a:t>TEAM STRUCTURE</a:t>
             </a:r>
           </a:p>
         </p:txBody>
@@ -18725,8 +19467,8 @@
         </p:nvSpPr>
         <p:spPr>
           <a:xfrm>
-            <a:off x="685628" y="2150000"/>
-            <a:ext cx="10820744" cy="1200000"/>
+            <a:off x="685628" y="620000"/>
+            <a:ext cx="10820744" cy="700000"/>
           </a:xfrm>
           <a:prstGeom prst="rect">
             <a:avLst/>
@@ -18741,33 +19483,33 @@
           <a:p>
             <a:pPr algn="l"/>
             <a:r>
-              <a:rPr sz="3800" b="0" i="0">
-                <a:solidFill>
-                  <a:srgbClr val="FFFFFF"/>
+              <a:rPr sz="4400" b="0" i="0">
+                <a:solidFill>
+                  <a:srgbClr val="1A1A1A"/>
                 </a:solidFill>
                 <a:latin typeface="Geist ExtraBold"/>
               </a:rPr>
-              <a:t>it's specific, it's runnable, and it's honest about failure modes.</a:t>
-            </a:r>
-          </a:p>
-        </p:txBody>
-      </p:sp>
-      <p:sp>
-        <p:nvSpPr>
-          <p:cNvPr id="5" name="Rectangle 4"/>
+              <a:t>PMM and DevRel.</a:t>
+            </a:r>
+          </a:p>
+        </p:txBody>
+      </p:sp>
+      <p:sp>
+        <p:nvSpPr>
+          <p:cNvPr id="5" name="Rounded Rectangle 4"/>
           <p:cNvSpPr/>
           <p:nvPr/>
         </p:nvSpPr>
         <p:spPr>
           <a:xfrm>
-            <a:off x="685628" y="3600000"/>
-            <a:ext cx="10820744" cy="40000"/>
-          </a:xfrm>
-          <a:prstGeom prst="rect">
+            <a:off x="685628" y="1800000"/>
+            <a:ext cx="5300372" cy="3200000"/>
+          </a:xfrm>
+          <a:prstGeom prst="roundRect">
             <a:avLst/>
           </a:prstGeom>
           <a:solidFill>
-            <a:srgbClr val="D0D0C8"/>
+            <a:srgbClr val="ECEDE8"/>
           </a:solidFill>
           <a:ln>
             <a:noFill/>
@@ -18803,7 +19545,194 @@
         </p:nvSpPr>
         <p:spPr>
           <a:xfrm>
-            <a:off x="685628" y="3800000"/>
+            <a:off x="870628" y="1985000"/>
+            <a:ext cx="4930372" cy="430000"/>
+          </a:xfrm>
+          <a:prstGeom prst="rect">
+            <a:avLst/>
+          </a:prstGeom>
+          <a:noFill/>
+        </p:spPr>
+        <p:txBody>
+          <a:bodyPr wrap="square">
+            <a:spAutoFit/>
+          </a:bodyPr>
+          <a:lstStyle/>
+          <a:p>
+            <a:pPr algn="l"/>
+            <a:r>
+              <a:rPr sz="1700" b="0" i="0">
+                <a:solidFill>
+                  <a:srgbClr val="1A1A1A"/>
+                </a:solidFill>
+                <a:latin typeface="Geist ExtraBold"/>
+              </a:rPr>
+              <a:t>DevRel earns trust</a:t>
+            </a:r>
+          </a:p>
+        </p:txBody>
+      </p:sp>
+      <p:sp>
+        <p:nvSpPr>
+          <p:cNvPr id="7" name="TextBox 6"/>
+          <p:cNvSpPr txBox="1"/>
+          <p:nvPr/>
+        </p:nvSpPr>
+        <p:spPr>
+          <a:xfrm>
+            <a:off x="870628" y="2445000"/>
+            <a:ext cx="4930372" cy="2370000"/>
+          </a:xfrm>
+          <a:prstGeom prst="rect">
+            <a:avLst/>
+          </a:prstGeom>
+          <a:noFill/>
+        </p:spPr>
+        <p:txBody>
+          <a:bodyPr wrap="square">
+            <a:spAutoFit/>
+          </a:bodyPr>
+          <a:lstStyle/>
+          <a:p>
+            <a:pPr algn="l"/>
+            <a:r>
+              <a:rPr sz="1400" b="0" i="0">
+                <a:solidFill>
+                  <a:srgbClr val="4A4A4A"/>
+                </a:solidFill>
+                <a:latin typeface="Geist"/>
+              </a:rPr>
+              <a:t>Discord, GitHub, conference talks, working demos.
+Builds presence where the developer actually is.
+Brings back what developers are asking and what they're struggling with.</a:t>
+            </a:r>
+          </a:p>
+        </p:txBody>
+      </p:sp>
+      <p:sp>
+        <p:nvSpPr>
+          <p:cNvPr id="8" name="Rounded Rectangle 7"/>
+          <p:cNvSpPr/>
+          <p:nvPr/>
+        </p:nvSpPr>
+        <p:spPr>
+          <a:xfrm>
+            <a:off x="6206000" y="1800000"/>
+            <a:ext cx="5300372" cy="3200000"/>
+          </a:xfrm>
+          <a:prstGeom prst="roundRect">
+            <a:avLst/>
+          </a:prstGeom>
+          <a:solidFill>
+            <a:srgbClr val="ECEDE8"/>
+          </a:solidFill>
+          <a:ln>
+            <a:noFill/>
+          </a:ln>
+        </p:spPr>
+        <p:style>
+          <a:lnRef idx="1">
+            <a:schemeClr val="accent1"/>
+          </a:lnRef>
+          <a:fillRef idx="3">
+            <a:schemeClr val="accent1"/>
+          </a:fillRef>
+          <a:effectRef idx="2">
+            <a:schemeClr val="accent1"/>
+          </a:effectRef>
+          <a:fontRef idx="minor">
+            <a:schemeClr val="lt1"/>
+          </a:fontRef>
+        </p:style>
+        <p:txBody>
+          <a:bodyPr rtlCol="0" anchor="ctr"/>
+          <a:lstStyle/>
+          <a:p>
+            <a:pPr algn="ctr"/>
+          </a:p>
+        </p:txBody>
+      </p:sp>
+      <p:sp>
+        <p:nvSpPr>
+          <p:cNvPr id="9" name="TextBox 8"/>
+          <p:cNvSpPr txBox="1"/>
+          <p:nvPr/>
+        </p:nvSpPr>
+        <p:spPr>
+          <a:xfrm>
+            <a:off x="6391000" y="1985000"/>
+            <a:ext cx="4930372" cy="430000"/>
+          </a:xfrm>
+          <a:prstGeom prst="rect">
+            <a:avLst/>
+          </a:prstGeom>
+          <a:noFill/>
+        </p:spPr>
+        <p:txBody>
+          <a:bodyPr wrap="square">
+            <a:spAutoFit/>
+          </a:bodyPr>
+          <a:lstStyle/>
+          <a:p>
+            <a:pPr algn="l"/>
+            <a:r>
+              <a:rPr sz="1700" b="0" i="0">
+                <a:solidFill>
+                  <a:srgbClr val="1A1A1A"/>
+                </a:solidFill>
+                <a:latin typeface="Geist ExtraBold"/>
+              </a:rPr>
+              <a:t>PMM turns trust into pipeline</a:t>
+            </a:r>
+          </a:p>
+        </p:txBody>
+      </p:sp>
+      <p:sp>
+        <p:nvSpPr>
+          <p:cNvPr id="10" name="TextBox 9"/>
+          <p:cNvSpPr txBox="1"/>
+          <p:nvPr/>
+        </p:nvSpPr>
+        <p:spPr>
+          <a:xfrm>
+            <a:off x="6391000" y="2445000"/>
+            <a:ext cx="4930372" cy="2370000"/>
+          </a:xfrm>
+          <a:prstGeom prst="rect">
+            <a:avLst/>
+          </a:prstGeom>
+          <a:noFill/>
+        </p:spPr>
+        <p:txBody>
+          <a:bodyPr wrap="square">
+            <a:spAutoFit/>
+          </a:bodyPr>
+          <a:lstStyle/>
+          <a:p>
+            <a:pPr algn="l"/>
+            <a:r>
+              <a:rPr sz="1400" b="0" i="0">
+                <a:solidFill>
+                  <a:srgbClr val="4A4A4A"/>
+                </a:solidFill>
+                <a:latin typeface="Geist"/>
+              </a:rPr>
+              <a:t>Positioning, comparison content, attribution, Sales enablement.
+Translates developer signal into commercial messaging.
+Builds the content and funnel infrastructure that connects developer adoption to enterprise deals.</a:t>
+            </a:r>
+          </a:p>
+        </p:txBody>
+      </p:sp>
+      <p:sp>
+        <p:nvSpPr>
+          <p:cNvPr id="11" name="TextBox 10"/>
+          <p:cNvSpPr txBox="1"/>
+          <p:nvPr/>
+        </p:nvSpPr>
+        <p:spPr>
+          <a:xfrm>
+            <a:off x="685628" y="5300000"/>
             <a:ext cx="10820744" cy="500000"/>
           </a:xfrm>
           <a:prstGeom prst="rect">
@@ -18819,48 +19748,13 @@
           <a:p>
             <a:pPr algn="l"/>
             <a:r>
-              <a:rPr sz="1800" b="0" i="0">
+              <a:rPr sz="1400" b="0" i="0">
                 <a:solidFill>
                   <a:srgbClr val="808080"/>
                 </a:solidFill>
                 <a:latin typeface="Geist"/>
               </a:rPr>
-              <a:t>"Seamless enterprise connectivity" without a code sample gets ignored.</a:t>
-            </a:r>
-          </a:p>
-        </p:txBody>
-      </p:sp>
-      <p:sp>
-        <p:nvSpPr>
-          <p:cNvPr id="7" name="TextBox 6"/>
-          <p:cNvSpPr txBox="1"/>
-          <p:nvPr/>
-        </p:nvSpPr>
-        <p:spPr>
-          <a:xfrm>
-            <a:off x="685628" y="4500000"/>
-            <a:ext cx="10820744" cy="600000"/>
-          </a:xfrm>
-          <a:prstGeom prst="rect">
-            <a:avLst/>
-          </a:prstGeom>
-          <a:noFill/>
-        </p:spPr>
-        <p:txBody>
-          <a:bodyPr wrap="square">
-            <a:spAutoFit/>
-          </a:bodyPr>
-          <a:lstStyle/>
-          <a:p>
-            <a:pPr algn="l"/>
-            <a:r>
-              <a:rPr sz="1800" b="0" i="0">
-                <a:solidFill>
-                  <a:srgbClr val="FFFFFF"/>
-                </a:solidFill>
-                <a:latin typeface="Geist ExtraBold"/>
-              </a:rPr>
-              <a:t>"Here's what happens when your PAT expires mid-query and how to handle it" gets bookmarked.</a:t>
+              <a:t>These are different jobs. They fail when blurred. Interface: weekly sync, shared funnel definition.</a:t>
             </a:r>
           </a:p>
         </p:txBody>
@@ -18923,8 +19817,8 @@
         </p:nvSpPr>
         <p:spPr>
           <a:xfrm>
-            <a:off x="685628" y="600000"/>
-            <a:ext cx="10820744" cy="700000"/>
+            <a:off x="685628" y="1400000"/>
+            <a:ext cx="10820744" cy="600000"/>
           </a:xfrm>
           <a:prstGeom prst="rect">
             <a:avLst/>
@@ -18939,33 +19833,68 @@
           <a:p>
             <a:pPr algn="l"/>
             <a:r>
-              <a:rPr sz="4000" b="0" i="0">
+              <a:rPr sz="2200" b="0" i="0">
+                <a:solidFill>
+                  <a:srgbClr val="FFE500"/>
+                </a:solidFill>
+                <a:latin typeface="Geist"/>
+              </a:rPr>
+              <a:t>What developer content actually works:</a:t>
+            </a:r>
+          </a:p>
+        </p:txBody>
+      </p:sp>
+      <p:sp>
+        <p:nvSpPr>
+          <p:cNvPr id="4" name="TextBox 3"/>
+          <p:cNvSpPr txBox="1"/>
+          <p:nvPr/>
+        </p:nvSpPr>
+        <p:spPr>
+          <a:xfrm>
+            <a:off x="685628" y="2150000"/>
+            <a:ext cx="10820744" cy="1200000"/>
+          </a:xfrm>
+          <a:prstGeom prst="rect">
+            <a:avLst/>
+          </a:prstGeom>
+          <a:noFill/>
+        </p:spPr>
+        <p:txBody>
+          <a:bodyPr wrap="square">
+            <a:spAutoFit/>
+          </a:bodyPr>
+          <a:lstStyle/>
+          <a:p>
+            <a:pPr algn="l"/>
+            <a:r>
+              <a:rPr sz="3800" b="0" i="0">
                 <a:solidFill>
                   <a:srgbClr val="FFFFFF"/>
                 </a:solidFill>
                 <a:latin typeface="Geist ExtraBold"/>
               </a:rPr>
-              <a:t>What I'm leaving behind.</a:t>
-            </a:r>
-          </a:p>
-        </p:txBody>
-      </p:sp>
-      <p:sp>
-        <p:nvSpPr>
-          <p:cNvPr id="4" name="Rectangle 3"/>
+              <a:t>it's specific, it's runnable, and it's honest about failure modes.</a:t>
+            </a:r>
+          </a:p>
+        </p:txBody>
+      </p:sp>
+      <p:sp>
+        <p:nvSpPr>
+          <p:cNvPr id="5" name="Rectangle 4"/>
           <p:cNvSpPr/>
           <p:nvPr/>
         </p:nvSpPr>
         <p:spPr>
           <a:xfrm>
-            <a:off x="685628" y="1700000"/>
-            <a:ext cx="90000" cy="90000"/>
+            <a:off x="685628" y="3600000"/>
+            <a:ext cx="10820744" cy="40000"/>
           </a:xfrm>
           <a:prstGeom prst="rect">
             <a:avLst/>
           </a:prstGeom>
           <a:solidFill>
-            <a:srgbClr val="FFE500"/>
+            <a:srgbClr val="D0D0C8"/>
           </a:solidFill>
           <a:ln>
             <a:noFill/>
@@ -18995,22 +19924,22 @@
       </p:sp>
       <p:sp>
         <p:nvSpPr>
-          <p:cNvPr id="5" name="TextBox 4"/>
-          <p:cNvSpPr txBox="1"/>
-          <p:nvPr/>
-        </p:nvSpPr>
-        <p:spPr>
-          <a:xfrm>
-            <a:off x="945628" y="1700000"/>
-            <a:ext cx="3400000" cy="380000"/>
-          </a:xfrm>
-          <a:prstGeom prst="rect">
-            <a:avLst/>
-          </a:prstGeom>
-          <a:noFill/>
-        </p:spPr>
-        <p:txBody>
-          <a:bodyPr wrap="none">
+          <p:cNvPr id="6" name="TextBox 5"/>
+          <p:cNvSpPr txBox="1"/>
+          <p:nvPr/>
+        </p:nvSpPr>
+        <p:spPr>
+          <a:xfrm>
+            <a:off x="685628" y="3800000"/>
+            <a:ext cx="10820744" cy="500000"/>
+          </a:xfrm>
+          <a:prstGeom prst="rect">
+            <a:avLst/>
+          </a:prstGeom>
+          <a:noFill/>
+        </p:spPr>
+        <p:txBody>
+          <a:bodyPr wrap="square">
             <a:spAutoFit/>
           </a:bodyPr>
           <a:lstStyle/>
@@ -19019,413 +19948,50 @@
             <a:r>
               <a:rPr sz="1800" b="0" i="0">
                 <a:solidFill>
+                  <a:srgbClr val="808080"/>
+                </a:solidFill>
+                <a:latin typeface="Geist"/>
+              </a:rPr>
+              <a:t>"Seamless enterprise connectivity" without a code sample gets ignored.</a:t>
+            </a:r>
+          </a:p>
+        </p:txBody>
+      </p:sp>
+      <p:sp>
+        <p:nvSpPr>
+          <p:cNvPr id="7" name="TextBox 6"/>
+          <p:cNvSpPr txBox="1"/>
+          <p:nvPr/>
+        </p:nvSpPr>
+        <p:spPr>
+          <a:xfrm>
+            <a:off x="685628" y="4500000"/>
+            <a:ext cx="10820744" cy="600000"/>
+          </a:xfrm>
+          <a:prstGeom prst="rect">
+            <a:avLst/>
+          </a:prstGeom>
+          <a:noFill/>
+        </p:spPr>
+        <p:txBody>
+          <a:bodyPr wrap="square">
+            <a:spAutoFit/>
+          </a:bodyPr>
+          <a:lstStyle/>
+          <a:p>
+            <a:pPr algn="l"/>
+            <a:r>
+              <a:rPr sz="1800" b="0" i="0">
+                <a:solidFill>
                   <a:srgbClr val="FFFFFF"/>
                 </a:solidFill>
                 <a:latin typeface="Geist ExtraBold"/>
               </a:rPr>
-              <a:t>Working demo</a:t>
-            </a:r>
-          </a:p>
-        </p:txBody>
-      </p:sp>
-      <p:sp>
-        <p:nvSpPr>
-          <p:cNvPr id="6" name="TextBox 5"/>
-          <p:cNvSpPr txBox="1"/>
-          <p:nvPr/>
-        </p:nvSpPr>
-        <p:spPr>
-          <a:xfrm>
-            <a:off x="945628" y="2100000"/>
-            <a:ext cx="7200000" cy="380000"/>
-          </a:xfrm>
-          <a:prstGeom prst="rect">
-            <a:avLst/>
-          </a:prstGeom>
-          <a:noFill/>
-        </p:spPr>
-        <p:txBody>
-          <a:bodyPr wrap="square">
-            <a:spAutoFit/>
-          </a:bodyPr>
-          <a:lstStyle/>
-          <a:p>
-            <a:pPr algn="l"/>
-            <a:r>
-              <a:rPr sz="1400" b="0" i="0">
-                <a:solidFill>
-                  <a:srgbClr val="808080"/>
-                </a:solidFill>
-                <a:latin typeface="Geist"/>
-              </a:rPr>
-              <a:t>github.com/JoeKarlsson/connect-ai-agent-demo — clone it and run it. The agent queries live enterprise data.</a:t>
-            </a:r>
-          </a:p>
-        </p:txBody>
-      </p:sp>
-      <p:sp>
-        <p:nvSpPr>
-          <p:cNvPr id="7" name="Rectangle 6"/>
-          <p:cNvSpPr/>
-          <p:nvPr/>
-        </p:nvSpPr>
-        <p:spPr>
-          <a:xfrm>
-            <a:off x="685628" y="2600000"/>
-            <a:ext cx="90000" cy="90000"/>
-          </a:xfrm>
-          <a:prstGeom prst="rect">
-            <a:avLst/>
-          </a:prstGeom>
-          <a:solidFill>
-            <a:srgbClr val="FFE500"/>
-          </a:solidFill>
-          <a:ln>
-            <a:noFill/>
-          </a:ln>
-        </p:spPr>
-        <p:style>
-          <a:lnRef idx="1">
-            <a:schemeClr val="accent1"/>
-          </a:lnRef>
-          <a:fillRef idx="3">
-            <a:schemeClr val="accent1"/>
-          </a:fillRef>
-          <a:effectRef idx="2">
-            <a:schemeClr val="accent1"/>
-          </a:effectRef>
-          <a:fontRef idx="minor">
-            <a:schemeClr val="lt1"/>
-          </a:fontRef>
-        </p:style>
-        <p:txBody>
-          <a:bodyPr rtlCol="0" anchor="ctr"/>
-          <a:lstStyle/>
-          <a:p>
-            <a:pPr algn="ctr"/>
-          </a:p>
-        </p:txBody>
-      </p:sp>
-      <p:sp>
-        <p:nvSpPr>
-          <p:cNvPr id="8" name="TextBox 7"/>
-          <p:cNvSpPr txBox="1"/>
-          <p:nvPr/>
-        </p:nvSpPr>
-        <p:spPr>
-          <a:xfrm>
-            <a:off x="945628" y="2600000"/>
-            <a:ext cx="3400000" cy="380000"/>
-          </a:xfrm>
-          <a:prstGeom prst="rect">
-            <a:avLst/>
-          </a:prstGeom>
-          <a:noFill/>
-        </p:spPr>
-        <p:txBody>
-          <a:bodyPr wrap="none">
-            <a:spAutoFit/>
-          </a:bodyPr>
-          <a:lstStyle/>
-          <a:p>
-            <a:pPr algn="l"/>
-            <a:r>
-              <a:rPr sz="1800" b="0" i="0">
-                <a:solidFill>
-                  <a:srgbClr val="FFFFFF"/>
-                </a:solidFill>
-                <a:latin typeface="Geist ExtraBold"/>
-              </a:rPr>
-              <a:t>47-issue DX audit</a:t>
-            </a:r>
-          </a:p>
-        </p:txBody>
-      </p:sp>
-      <p:sp>
-        <p:nvSpPr>
-          <p:cNvPr id="9" name="TextBox 8"/>
-          <p:cNvSpPr txBox="1"/>
-          <p:nvPr/>
-        </p:nvSpPr>
-        <p:spPr>
-          <a:xfrm>
-            <a:off x="945628" y="3000000"/>
-            <a:ext cx="7200000" cy="380000"/>
-          </a:xfrm>
-          <a:prstGeom prst="rect">
-            <a:avLst/>
-          </a:prstGeom>
-          <a:noFill/>
-        </p:spPr>
-        <p:txBody>
-          <a:bodyPr wrap="square">
-            <a:spAutoFit/>
-          </a:bodyPr>
-          <a:lstStyle/>
-          <a:p>
-            <a:pPr algn="l"/>
-            <a:r>
-              <a:rPr sz="1400" b="0" i="0">
-                <a:solidFill>
-                  <a:srgbClr val="808080"/>
-                </a:solidFill>
-                <a:latin typeface="Geist"/>
-              </a:rPr>
-              <a:t>docs/dx-audit.md — root causes, recommended fixes, organized by category and impact.</a:t>
-            </a:r>
-          </a:p>
-        </p:txBody>
-      </p:sp>
-      <p:sp>
-        <p:nvSpPr>
-          <p:cNvPr id="10" name="Rectangle 9"/>
-          <p:cNvSpPr/>
-          <p:nvPr/>
-        </p:nvSpPr>
-        <p:spPr>
-          <a:xfrm>
-            <a:off x="685628" y="3500000"/>
-            <a:ext cx="90000" cy="90000"/>
-          </a:xfrm>
-          <a:prstGeom prst="rect">
-            <a:avLst/>
-          </a:prstGeom>
-          <a:solidFill>
-            <a:srgbClr val="FFE500"/>
-          </a:solidFill>
-          <a:ln>
-            <a:noFill/>
-          </a:ln>
-        </p:spPr>
-        <p:style>
-          <a:lnRef idx="1">
-            <a:schemeClr val="accent1"/>
-          </a:lnRef>
-          <a:fillRef idx="3">
-            <a:schemeClr val="accent1"/>
-          </a:fillRef>
-          <a:effectRef idx="2">
-            <a:schemeClr val="accent1"/>
-          </a:effectRef>
-          <a:fontRef idx="minor">
-            <a:schemeClr val="lt1"/>
-          </a:fontRef>
-        </p:style>
-        <p:txBody>
-          <a:bodyPr rtlCol="0" anchor="ctr"/>
-          <a:lstStyle/>
-          <a:p>
-            <a:pPr algn="ctr"/>
-          </a:p>
-        </p:txBody>
-      </p:sp>
-      <p:sp>
-        <p:nvSpPr>
-          <p:cNvPr id="11" name="TextBox 10"/>
-          <p:cNvSpPr txBox="1"/>
-          <p:nvPr/>
-        </p:nvSpPr>
-        <p:spPr>
-          <a:xfrm>
-            <a:off x="945628" y="3500000"/>
-            <a:ext cx="3400000" cy="380000"/>
-          </a:xfrm>
-          <a:prstGeom prst="rect">
-            <a:avLst/>
-          </a:prstGeom>
-          <a:noFill/>
-        </p:spPr>
-        <p:txBody>
-          <a:bodyPr wrap="none">
-            <a:spAutoFit/>
-          </a:bodyPr>
-          <a:lstStyle/>
-          <a:p>
-            <a:pPr algn="l"/>
-            <a:r>
-              <a:rPr sz="1800" b="0" i="0">
-                <a:solidFill>
-                  <a:srgbClr val="FFFFFF"/>
-                </a:solidFill>
-                <a:latin typeface="Geist ExtraBold"/>
-              </a:rPr>
-              <a:t>Composio competitive brief</a:t>
-            </a:r>
-          </a:p>
-        </p:txBody>
-      </p:sp>
-      <p:sp>
-        <p:nvSpPr>
-          <p:cNvPr id="12" name="TextBox 11"/>
-          <p:cNvSpPr txBox="1"/>
-          <p:nvPr/>
-        </p:nvSpPr>
-        <p:spPr>
-          <a:xfrm>
-            <a:off x="945628" y="3900000"/>
-            <a:ext cx="7200000" cy="380000"/>
-          </a:xfrm>
-          <a:prstGeom prst="rect">
-            <a:avLst/>
-          </a:prstGeom>
-          <a:noFill/>
-        </p:spPr>
-        <p:txBody>
-          <a:bodyPr wrap="square">
-            <a:spAutoFit/>
-          </a:bodyPr>
-          <a:lstStyle/>
-          <a:p>
-            <a:pPr algn="l"/>
-            <a:r>
-              <a:rPr sz="1400" b="0" i="0">
-                <a:solidFill>
-                  <a:srgbClr val="808080"/>
-                </a:solidFill>
-                <a:latin typeface="Geist"/>
-              </a:rPr>
-              <a:t>SQL vs. action-based, enterprise data coverage, pricing comparison, CData's defensible position.</a:t>
-            </a:r>
-          </a:p>
-        </p:txBody>
-      </p:sp>
-      <p:sp>
-        <p:nvSpPr>
-          <p:cNvPr id="13" name="Rectangle 12"/>
-          <p:cNvSpPr/>
-          <p:nvPr/>
-        </p:nvSpPr>
-        <p:spPr>
-          <a:xfrm>
-            <a:off x="685628" y="4400000"/>
-            <a:ext cx="90000" cy="90000"/>
-          </a:xfrm>
-          <a:prstGeom prst="rect">
-            <a:avLst/>
-          </a:prstGeom>
-          <a:solidFill>
-            <a:srgbClr val="FFE500"/>
-          </a:solidFill>
-          <a:ln>
-            <a:noFill/>
-          </a:ln>
-        </p:spPr>
-        <p:style>
-          <a:lnRef idx="1">
-            <a:schemeClr val="accent1"/>
-          </a:lnRef>
-          <a:fillRef idx="3">
-            <a:schemeClr val="accent1"/>
-          </a:fillRef>
-          <a:effectRef idx="2">
-            <a:schemeClr val="accent1"/>
-          </a:effectRef>
-          <a:fontRef idx="minor">
-            <a:schemeClr val="lt1"/>
-          </a:fontRef>
-        </p:style>
-        <p:txBody>
-          <a:bodyPr rtlCol="0" anchor="ctr"/>
-          <a:lstStyle/>
-          <a:p>
-            <a:pPr algn="ctr"/>
-          </a:p>
-        </p:txBody>
-      </p:sp>
-      <p:sp>
-        <p:nvSpPr>
-          <p:cNvPr id="14" name="TextBox 13"/>
-          <p:cNvSpPr txBox="1"/>
-          <p:nvPr/>
-        </p:nvSpPr>
-        <p:spPr>
-          <a:xfrm>
-            <a:off x="945628" y="4400000"/>
-            <a:ext cx="3400000" cy="380000"/>
-          </a:xfrm>
-          <a:prstGeom prst="rect">
-            <a:avLst/>
-          </a:prstGeom>
-          <a:noFill/>
-        </p:spPr>
-        <p:txBody>
-          <a:bodyPr wrap="none">
-            <a:spAutoFit/>
-          </a:bodyPr>
-          <a:lstStyle/>
-          <a:p>
-            <a:pPr algn="l"/>
-            <a:r>
-              <a:rPr sz="1800" b="0" i="0">
-                <a:solidFill>
-                  <a:srgbClr val="FFFFFF"/>
-                </a:solidFill>
-                <a:latin typeface="Geist ExtraBold"/>
-              </a:rPr>
-              <a:t>LLM baseline data</a:t>
-            </a:r>
-          </a:p>
-        </p:txBody>
-      </p:sp>
-      <p:sp>
-        <p:nvSpPr>
-          <p:cNvPr id="15" name="TextBox 14"/>
-          <p:cNvSpPr txBox="1"/>
-          <p:nvPr/>
-        </p:nvSpPr>
-        <p:spPr>
-          <a:xfrm>
-            <a:off x="945628" y="4800000"/>
-            <a:ext cx="7200000" cy="380000"/>
-          </a:xfrm>
-          <a:prstGeom prst="rect">
-            <a:avLst/>
-          </a:prstGeom>
-          <a:noFill/>
-        </p:spPr>
-        <p:txBody>
-          <a:bodyPr wrap="square">
-            <a:spAutoFit/>
-          </a:bodyPr>
-          <a:lstStyle/>
-          <a:p>
-            <a:pPr algn="l"/>
-            <a:r>
-              <a:rPr sz="1400" b="0" i="0">
-                <a:solidFill>
-                  <a:srgbClr val="808080"/>
-                </a:solidFill>
-                <a:latin typeface="Geist"/>
-              </a:rPr>
-              <a:t>5 key queries run May 8, 2026. CData 0/5. Composio 5/5. The before numbers.</a:t>
-            </a:r>
-          </a:p>
-        </p:txBody>
-      </p:sp>
-      <p:pic>
-        <p:nvPicPr>
-          <p:cNvPr id="16" name="Picture 15" descr="repo-qr.png"/>
-          <p:cNvPicPr>
-            <a:picLocks noChangeAspect="1"/>
-          </p:cNvPicPr>
-          <p:nvPr/>
-        </p:nvPicPr>
-        <p:blipFill>
-          <a:blip r:embed="rId3"/>
-          <a:stretch>
-            <a:fillRect/>
-          </a:stretch>
-        </p:blipFill>
-        <p:spPr>
-          <a:xfrm>
-            <a:off x="9906372" y="2000000"/>
-            <a:ext cx="1400000" cy="1400000"/>
-          </a:xfrm>
-          <a:prstGeom prst="rect">
-            <a:avLst/>
-          </a:prstGeom>
-        </p:spPr>
-      </p:pic>
+              <a:t>"Here's what happens when your PAT expires mid-query and how to handle it" gets bookmarked.</a:t>
+            </a:r>
+          </a:p>
+        </p:txBody>
+      </p:sp>
     </p:spTree>
   </p:cSld>
   <p:clrMapOvr>
@@ -19484,8 +20050,8 @@
         </p:nvSpPr>
         <p:spPr>
           <a:xfrm>
-            <a:off x="685628" y="1000000"/>
-            <a:ext cx="10820744" cy="508000"/>
+            <a:off x="685628" y="600000"/>
+            <a:ext cx="10820744" cy="700000"/>
           </a:xfrm>
           <a:prstGeom prst="rect">
             <a:avLst/>
@@ -19500,27 +20066,218 @@
           <a:p>
             <a:pPr algn="l"/>
             <a:r>
-              <a:rPr sz="2000" b="0" i="0">
+              <a:rPr sz="4000" b="0" i="0">
+                <a:solidFill>
+                  <a:srgbClr val="FFFFFF"/>
+                </a:solidFill>
+                <a:latin typeface="Geist ExtraBold"/>
+              </a:rPr>
+              <a:t>What I'm leaving behind.</a:t>
+            </a:r>
+          </a:p>
+        </p:txBody>
+      </p:sp>
+      <p:sp>
+        <p:nvSpPr>
+          <p:cNvPr id="4" name="Rectangle 3"/>
+          <p:cNvSpPr/>
+          <p:nvPr/>
+        </p:nvSpPr>
+        <p:spPr>
+          <a:xfrm>
+            <a:off x="685628" y="1700000"/>
+            <a:ext cx="90000" cy="90000"/>
+          </a:xfrm>
+          <a:prstGeom prst="rect">
+            <a:avLst/>
+          </a:prstGeom>
+          <a:solidFill>
+            <a:srgbClr val="FFE500"/>
+          </a:solidFill>
+          <a:ln>
+            <a:noFill/>
+          </a:ln>
+        </p:spPr>
+        <p:style>
+          <a:lnRef idx="1">
+            <a:schemeClr val="accent1"/>
+          </a:lnRef>
+          <a:fillRef idx="3">
+            <a:schemeClr val="accent1"/>
+          </a:fillRef>
+          <a:effectRef idx="2">
+            <a:schemeClr val="accent1"/>
+          </a:effectRef>
+          <a:fontRef idx="minor">
+            <a:schemeClr val="lt1"/>
+          </a:fontRef>
+        </p:style>
+        <p:txBody>
+          <a:bodyPr rtlCol="0" anchor="ctr"/>
+          <a:lstStyle/>
+          <a:p>
+            <a:pPr algn="ctr"/>
+          </a:p>
+        </p:txBody>
+      </p:sp>
+      <p:sp>
+        <p:nvSpPr>
+          <p:cNvPr id="5" name="TextBox 4"/>
+          <p:cNvSpPr txBox="1"/>
+          <p:nvPr/>
+        </p:nvSpPr>
+        <p:spPr>
+          <a:xfrm>
+            <a:off x="945628" y="1700000"/>
+            <a:ext cx="3400000" cy="380000"/>
+          </a:xfrm>
+          <a:prstGeom prst="rect">
+            <a:avLst/>
+          </a:prstGeom>
+          <a:noFill/>
+        </p:spPr>
+        <p:txBody>
+          <a:bodyPr wrap="none">
+            <a:spAutoFit/>
+          </a:bodyPr>
+          <a:lstStyle/>
+          <a:p>
+            <a:pPr algn="l"/>
+            <a:r>
+              <a:rPr sz="1800" b="0" i="0">
+                <a:solidFill>
+                  <a:srgbClr val="FFFFFF"/>
+                </a:solidFill>
+                <a:latin typeface="Geist ExtraBold"/>
+              </a:rPr>
+              <a:t>Working demo</a:t>
+            </a:r>
+          </a:p>
+        </p:txBody>
+      </p:sp>
+      <p:sp>
+        <p:nvSpPr>
+          <p:cNvPr id="6" name="TextBox 5"/>
+          <p:cNvSpPr txBox="1"/>
+          <p:nvPr/>
+        </p:nvSpPr>
+        <p:spPr>
+          <a:xfrm>
+            <a:off x="945628" y="2100000"/>
+            <a:ext cx="7200000" cy="380000"/>
+          </a:xfrm>
+          <a:prstGeom prst="rect">
+            <a:avLst/>
+          </a:prstGeom>
+          <a:noFill/>
+        </p:spPr>
+        <p:txBody>
+          <a:bodyPr wrap="square">
+            <a:spAutoFit/>
+          </a:bodyPr>
+          <a:lstStyle/>
+          <a:p>
+            <a:pPr algn="l"/>
+            <a:r>
+              <a:rPr sz="1400" b="0" i="0">
                 <a:solidFill>
                   <a:srgbClr val="808080"/>
                 </a:solidFill>
                 <a:latin typeface="Geist"/>
               </a:rPr>
-              <a:t>There's a developer right now who needs to connect their AI agent to Salesforce and NetSuite in a single query.</a:t>
-            </a:r>
-          </a:p>
-        </p:txBody>
-      </p:sp>
-      <p:sp>
-        <p:nvSpPr>
-          <p:cNvPr id="4" name="TextBox 3"/>
-          <p:cNvSpPr txBox="1"/>
-          <p:nvPr/>
-        </p:nvSpPr>
-        <p:spPr>
-          <a:xfrm>
-            <a:off x="685628" y="1628000"/>
-            <a:ext cx="10820744" cy="558800"/>
+              <a:t>github.com/JoeKarlsson/connect-ai-agent-demo — clone it and run it. The agent queries live enterprise data.</a:t>
+            </a:r>
+          </a:p>
+        </p:txBody>
+      </p:sp>
+      <p:sp>
+        <p:nvSpPr>
+          <p:cNvPr id="7" name="Rectangle 6"/>
+          <p:cNvSpPr/>
+          <p:nvPr/>
+        </p:nvSpPr>
+        <p:spPr>
+          <a:xfrm>
+            <a:off x="685628" y="2600000"/>
+            <a:ext cx="90000" cy="90000"/>
+          </a:xfrm>
+          <a:prstGeom prst="rect">
+            <a:avLst/>
+          </a:prstGeom>
+          <a:solidFill>
+            <a:srgbClr val="FFE500"/>
+          </a:solidFill>
+          <a:ln>
+            <a:noFill/>
+          </a:ln>
+        </p:spPr>
+        <p:style>
+          <a:lnRef idx="1">
+            <a:schemeClr val="accent1"/>
+          </a:lnRef>
+          <a:fillRef idx="3">
+            <a:schemeClr val="accent1"/>
+          </a:fillRef>
+          <a:effectRef idx="2">
+            <a:schemeClr val="accent1"/>
+          </a:effectRef>
+          <a:fontRef idx="minor">
+            <a:schemeClr val="lt1"/>
+          </a:fontRef>
+        </p:style>
+        <p:txBody>
+          <a:bodyPr rtlCol="0" anchor="ctr"/>
+          <a:lstStyle/>
+          <a:p>
+            <a:pPr algn="ctr"/>
+          </a:p>
+        </p:txBody>
+      </p:sp>
+      <p:sp>
+        <p:nvSpPr>
+          <p:cNvPr id="8" name="TextBox 7"/>
+          <p:cNvSpPr txBox="1"/>
+          <p:nvPr/>
+        </p:nvSpPr>
+        <p:spPr>
+          <a:xfrm>
+            <a:off x="945628" y="2600000"/>
+            <a:ext cx="3400000" cy="380000"/>
+          </a:xfrm>
+          <a:prstGeom prst="rect">
+            <a:avLst/>
+          </a:prstGeom>
+          <a:noFill/>
+        </p:spPr>
+        <p:txBody>
+          <a:bodyPr wrap="none">
+            <a:spAutoFit/>
+          </a:bodyPr>
+          <a:lstStyle/>
+          <a:p>
+            <a:pPr algn="l"/>
+            <a:r>
+              <a:rPr sz="1800" b="0" i="0">
+                <a:solidFill>
+                  <a:srgbClr val="FFFFFF"/>
+                </a:solidFill>
+                <a:latin typeface="Geist ExtraBold"/>
+              </a:rPr>
+              <a:t>47-issue DX audit</a:t>
+            </a:r>
+          </a:p>
+        </p:txBody>
+      </p:sp>
+      <p:sp>
+        <p:nvSpPr>
+          <p:cNvPr id="9" name="TextBox 8"/>
+          <p:cNvSpPr txBox="1"/>
+          <p:nvPr/>
+        </p:nvSpPr>
+        <p:spPr>
+          <a:xfrm>
+            <a:off x="945628" y="3000000"/>
+            <a:ext cx="7200000" cy="380000"/>
           </a:xfrm>
           <a:prstGeom prst="rect">
             <a:avLst/>
@@ -19535,27 +20292,218 @@
           <a:p>
             <a:pPr algn="l"/>
             <a:r>
-              <a:rPr sz="2200" b="0" i="0">
+              <a:rPr sz="1400" b="0" i="0">
+                <a:solidFill>
+                  <a:srgbClr val="808080"/>
+                </a:solidFill>
+                <a:latin typeface="Geist"/>
+              </a:rPr>
+              <a:t>docs/dx-audit.md — root causes, recommended fixes, organized by category and impact.</a:t>
+            </a:r>
+          </a:p>
+        </p:txBody>
+      </p:sp>
+      <p:sp>
+        <p:nvSpPr>
+          <p:cNvPr id="10" name="Rectangle 9"/>
+          <p:cNvSpPr/>
+          <p:nvPr/>
+        </p:nvSpPr>
+        <p:spPr>
+          <a:xfrm>
+            <a:off x="685628" y="3500000"/>
+            <a:ext cx="90000" cy="90000"/>
+          </a:xfrm>
+          <a:prstGeom prst="rect">
+            <a:avLst/>
+          </a:prstGeom>
+          <a:solidFill>
+            <a:srgbClr val="FFE500"/>
+          </a:solidFill>
+          <a:ln>
+            <a:noFill/>
+          </a:ln>
+        </p:spPr>
+        <p:style>
+          <a:lnRef idx="1">
+            <a:schemeClr val="accent1"/>
+          </a:lnRef>
+          <a:fillRef idx="3">
+            <a:schemeClr val="accent1"/>
+          </a:fillRef>
+          <a:effectRef idx="2">
+            <a:schemeClr val="accent1"/>
+          </a:effectRef>
+          <a:fontRef idx="minor">
+            <a:schemeClr val="lt1"/>
+          </a:fontRef>
+        </p:style>
+        <p:txBody>
+          <a:bodyPr rtlCol="0" anchor="ctr"/>
+          <a:lstStyle/>
+          <a:p>
+            <a:pPr algn="ctr"/>
+          </a:p>
+        </p:txBody>
+      </p:sp>
+      <p:sp>
+        <p:nvSpPr>
+          <p:cNvPr id="11" name="TextBox 10"/>
+          <p:cNvSpPr txBox="1"/>
+          <p:nvPr/>
+        </p:nvSpPr>
+        <p:spPr>
+          <a:xfrm>
+            <a:off x="945628" y="3500000"/>
+            <a:ext cx="3400000" cy="380000"/>
+          </a:xfrm>
+          <a:prstGeom prst="rect">
+            <a:avLst/>
+          </a:prstGeom>
+          <a:noFill/>
+        </p:spPr>
+        <p:txBody>
+          <a:bodyPr wrap="none">
+            <a:spAutoFit/>
+          </a:bodyPr>
+          <a:lstStyle/>
+          <a:p>
+            <a:pPr algn="l"/>
+            <a:r>
+              <a:rPr sz="1800" b="0" i="0">
                 <a:solidFill>
                   <a:srgbClr val="FFFFFF"/>
                 </a:solidFill>
+                <a:latin typeface="Geist ExtraBold"/>
+              </a:rPr>
+              <a:t>Composio competitive brief</a:t>
+            </a:r>
+          </a:p>
+        </p:txBody>
+      </p:sp>
+      <p:sp>
+        <p:nvSpPr>
+          <p:cNvPr id="12" name="TextBox 11"/>
+          <p:cNvSpPr txBox="1"/>
+          <p:nvPr/>
+        </p:nvSpPr>
+        <p:spPr>
+          <a:xfrm>
+            <a:off x="945628" y="3900000"/>
+            <a:ext cx="7200000" cy="380000"/>
+          </a:xfrm>
+          <a:prstGeom prst="rect">
+            <a:avLst/>
+          </a:prstGeom>
+          <a:noFill/>
+        </p:spPr>
+        <p:txBody>
+          <a:bodyPr wrap="square">
+            <a:spAutoFit/>
+          </a:bodyPr>
+          <a:lstStyle/>
+          <a:p>
+            <a:pPr algn="l"/>
+            <a:r>
+              <a:rPr sz="1400" b="0" i="0">
+                <a:solidFill>
+                  <a:srgbClr val="808080"/>
+                </a:solidFill>
                 <a:latin typeface="Geist"/>
               </a:rPr>
-              <a:t>They're going to Google it, ask Claude, check GitHub.</a:t>
-            </a:r>
-          </a:p>
-        </p:txBody>
-      </p:sp>
-      <p:sp>
-        <p:nvSpPr>
-          <p:cNvPr id="5" name="TextBox 4"/>
-          <p:cNvSpPr txBox="1"/>
-          <p:nvPr/>
-        </p:nvSpPr>
-        <p:spPr>
-          <a:xfrm>
-            <a:off x="685628" y="2306800"/>
-            <a:ext cx="10820744" cy="609600"/>
+              <a:t>SQL vs. action-based, enterprise data coverage, pricing comparison, CData's defensible position.</a:t>
+            </a:r>
+          </a:p>
+        </p:txBody>
+      </p:sp>
+      <p:sp>
+        <p:nvSpPr>
+          <p:cNvPr id="13" name="Rectangle 12"/>
+          <p:cNvSpPr/>
+          <p:nvPr/>
+        </p:nvSpPr>
+        <p:spPr>
+          <a:xfrm>
+            <a:off x="685628" y="4400000"/>
+            <a:ext cx="90000" cy="90000"/>
+          </a:xfrm>
+          <a:prstGeom prst="rect">
+            <a:avLst/>
+          </a:prstGeom>
+          <a:solidFill>
+            <a:srgbClr val="FFE500"/>
+          </a:solidFill>
+          <a:ln>
+            <a:noFill/>
+          </a:ln>
+        </p:spPr>
+        <p:style>
+          <a:lnRef idx="1">
+            <a:schemeClr val="accent1"/>
+          </a:lnRef>
+          <a:fillRef idx="3">
+            <a:schemeClr val="accent1"/>
+          </a:fillRef>
+          <a:effectRef idx="2">
+            <a:schemeClr val="accent1"/>
+          </a:effectRef>
+          <a:fontRef idx="minor">
+            <a:schemeClr val="lt1"/>
+          </a:fontRef>
+        </p:style>
+        <p:txBody>
+          <a:bodyPr rtlCol="0" anchor="ctr"/>
+          <a:lstStyle/>
+          <a:p>
+            <a:pPr algn="ctr"/>
+          </a:p>
+        </p:txBody>
+      </p:sp>
+      <p:sp>
+        <p:nvSpPr>
+          <p:cNvPr id="14" name="TextBox 13"/>
+          <p:cNvSpPr txBox="1"/>
+          <p:nvPr/>
+        </p:nvSpPr>
+        <p:spPr>
+          <a:xfrm>
+            <a:off x="945628" y="4400000"/>
+            <a:ext cx="3400000" cy="380000"/>
+          </a:xfrm>
+          <a:prstGeom prst="rect">
+            <a:avLst/>
+          </a:prstGeom>
+          <a:noFill/>
+        </p:spPr>
+        <p:txBody>
+          <a:bodyPr wrap="none">
+            <a:spAutoFit/>
+          </a:bodyPr>
+          <a:lstStyle/>
+          <a:p>
+            <a:pPr algn="l"/>
+            <a:r>
+              <a:rPr sz="1800" b="0" i="0">
+                <a:solidFill>
+                  <a:srgbClr val="FFFFFF"/>
+                </a:solidFill>
+                <a:latin typeface="Geist ExtraBold"/>
+              </a:rPr>
+              <a:t>LLM baseline data</a:t>
+            </a:r>
+          </a:p>
+        </p:txBody>
+      </p:sp>
+      <p:sp>
+        <p:nvSpPr>
+          <p:cNvPr id="15" name="TextBox 14"/>
+          <p:cNvSpPr txBox="1"/>
+          <p:nvPr/>
+        </p:nvSpPr>
+        <p:spPr>
+          <a:xfrm>
+            <a:off x="945628" y="4800000"/>
+            <a:ext cx="7200000" cy="380000"/>
           </a:xfrm>
           <a:prstGeom prst="rect">
             <a:avLst/>
@@ -19570,122 +20518,41 @@
           <a:p>
             <a:pPr algn="l"/>
             <a:r>
-              <a:rPr sz="2400" b="0" i="0">
-                <a:solidFill>
-                  <a:srgbClr val="FFE500"/>
+              <a:rPr sz="1400" b="0" i="0">
+                <a:solidFill>
+                  <a:srgbClr val="808080"/>
                 </a:solidFill>
                 <a:latin typeface="Geist"/>
               </a:rPr>
-              <a:t>Right now, Composio comes up. CData doesn't.</a:t>
-            </a:r>
-          </a:p>
-        </p:txBody>
-      </p:sp>
-      <p:sp>
-        <p:nvSpPr>
-          <p:cNvPr id="6" name="TextBox 5"/>
-          <p:cNvSpPr txBox="1"/>
-          <p:nvPr/>
-        </p:nvSpPr>
-        <p:spPr>
-          <a:xfrm>
-            <a:off x="685628" y="3036400"/>
-            <a:ext cx="10820744" cy="558800"/>
-          </a:xfrm>
-          <a:prstGeom prst="rect">
-            <a:avLst/>
-          </a:prstGeom>
-          <a:noFill/>
-        </p:spPr>
-        <p:txBody>
-          <a:bodyPr wrap="square">
-            <a:spAutoFit/>
-          </a:bodyPr>
-          <a:lstStyle/>
-          <a:p>
-            <a:pPr algn="l"/>
-            <a:r>
-              <a:rPr sz="2200" b="0" i="0">
-                <a:solidFill>
-                  <a:srgbClr val="FFFFFF"/>
-                </a:solidFill>
-                <a:latin typeface="Geist"/>
-              </a:rPr>
-              <a:t>That's not a product problem — CData has the product.</a:t>
-            </a:r>
-          </a:p>
-        </p:txBody>
-      </p:sp>
-      <p:sp>
-        <p:nvSpPr>
-          <p:cNvPr id="7" name="TextBox 6"/>
-          <p:cNvSpPr txBox="1"/>
-          <p:nvPr/>
-        </p:nvSpPr>
-        <p:spPr>
-          <a:xfrm>
-            <a:off x="685628" y="3715200"/>
-            <a:ext cx="10820744" cy="558800"/>
-          </a:xfrm>
-          <a:prstGeom prst="rect">
-            <a:avLst/>
-          </a:prstGeom>
-          <a:noFill/>
-        </p:spPr>
-        <p:txBody>
-          <a:bodyPr wrap="square">
-            <a:spAutoFit/>
-          </a:bodyPr>
-          <a:lstStyle/>
-          <a:p>
-            <a:pPr algn="l"/>
-            <a:r>
-              <a:rPr sz="2200" b="0" i="0">
-                <a:solidFill>
-                  <a:srgbClr val="FFFFFF"/>
-                </a:solidFill>
-                <a:latin typeface="Geist"/>
-              </a:rPr>
-              <a:t>Getting there is a messaging, content, and distribution problem.</a:t>
-            </a:r>
-          </a:p>
-        </p:txBody>
-      </p:sp>
-      <p:sp>
-        <p:nvSpPr>
-          <p:cNvPr id="8" name="TextBox 7"/>
-          <p:cNvSpPr txBox="1"/>
-          <p:nvPr/>
-        </p:nvSpPr>
-        <p:spPr>
-          <a:xfrm>
-            <a:off x="685628" y="4394000"/>
-            <a:ext cx="10820744" cy="711200"/>
-          </a:xfrm>
-          <a:prstGeom prst="rect">
-            <a:avLst/>
-          </a:prstGeom>
-          <a:noFill/>
-        </p:spPr>
-        <p:txBody>
-          <a:bodyPr wrap="square">
-            <a:spAutoFit/>
-          </a:bodyPr>
-          <a:lstStyle/>
-          <a:p>
-            <a:pPr algn="l"/>
-            <a:r>
-              <a:rPr sz="2800" b="0" i="0">
-                <a:solidFill>
-                  <a:srgbClr val="FFE500"/>
-                </a:solidFill>
-                <a:latin typeface="Geist"/>
-              </a:rPr>
-              <a:t>That's exactly what I do.</a:t>
-            </a:r>
-          </a:p>
-        </p:txBody>
-      </p:sp>
+              <a:t>5 key queries run May 8, 2026. CData 0/5. Composio 5/5. The before numbers.</a:t>
+            </a:r>
+          </a:p>
+        </p:txBody>
+      </p:sp>
+      <p:pic>
+        <p:nvPicPr>
+          <p:cNvPr id="16" name="Picture 15" descr="repo-qr.png"/>
+          <p:cNvPicPr>
+            <a:picLocks noChangeAspect="1"/>
+          </p:cNvPicPr>
+          <p:nvPr/>
+        </p:nvPicPr>
+        <p:blipFill>
+          <a:blip r:embed="rId3"/>
+          <a:stretch>
+            <a:fillRect/>
+          </a:stretch>
+        </p:blipFill>
+        <p:spPr>
+          <a:xfrm>
+            <a:off x="9906372" y="2000000"/>
+            <a:ext cx="1400000" cy="1400000"/>
+          </a:xfrm>
+          <a:prstGeom prst="rect">
+            <a:avLst/>
+          </a:prstGeom>
+        </p:spPr>
+      </p:pic>
     </p:spTree>
   </p:cSld>
   <p:clrMapOvr>
@@ -19695,6 +20562,266 @@
 </file>
 
 <file path=ppt/slides/slide45.xml><?xml version="1.0" encoding="utf-8"?>
+<p:sld xmlns:a="http://schemas.openxmlformats.org/drawingml/2006/main" xmlns:p="http://schemas.openxmlformats.org/presentationml/2006/main" xmlns:r="http://schemas.openxmlformats.org/officeDocument/2006/relationships">
+  <p:cSld>
+    <p:bg>
+      <p:bgPr>
+        <a:solidFill>
+          <a:srgbClr val="1A1A1A"/>
+        </a:solidFill>
+        <a:effectLst/>
+      </p:bgPr>
+    </p:bg>
+    <p:spTree>
+      <p:nvGrpSpPr>
+        <p:cNvPr id="1" name=""/>
+        <p:cNvGrpSpPr/>
+        <p:nvPr/>
+      </p:nvGrpSpPr>
+      <p:grpSpPr/>
+      <p:pic>
+        <p:nvPicPr>
+          <p:cNvPr id="2" name="Picture 1" descr="cdata-logo-light.png"/>
+          <p:cNvPicPr>
+            <a:picLocks noChangeAspect="1"/>
+          </p:cNvPicPr>
+          <p:nvPr/>
+        </p:nvPicPr>
+        <p:blipFill>
+          <a:blip r:embed="rId2"/>
+          <a:stretch>
+            <a:fillRect/>
+          </a:stretch>
+        </p:blipFill>
+        <p:spPr>
+          <a:xfrm>
+            <a:off x="10099706" y="260000"/>
+            <a:ext cx="1406666" cy="380000"/>
+          </a:xfrm>
+          <a:prstGeom prst="rect">
+            <a:avLst/>
+          </a:prstGeom>
+        </p:spPr>
+      </p:pic>
+      <p:sp>
+        <p:nvSpPr>
+          <p:cNvPr id="3" name="TextBox 2"/>
+          <p:cNvSpPr txBox="1"/>
+          <p:nvPr/>
+        </p:nvSpPr>
+        <p:spPr>
+          <a:xfrm>
+            <a:off x="685628" y="1000000"/>
+            <a:ext cx="10820744" cy="508000"/>
+          </a:xfrm>
+          <a:prstGeom prst="rect">
+            <a:avLst/>
+          </a:prstGeom>
+          <a:noFill/>
+        </p:spPr>
+        <p:txBody>
+          <a:bodyPr wrap="square">
+            <a:spAutoFit/>
+          </a:bodyPr>
+          <a:lstStyle/>
+          <a:p>
+            <a:pPr algn="l"/>
+            <a:r>
+              <a:rPr sz="2000" b="0" i="0">
+                <a:solidFill>
+                  <a:srgbClr val="808080"/>
+                </a:solidFill>
+                <a:latin typeface="Geist"/>
+              </a:rPr>
+              <a:t>There's a developer right now who needs to connect their AI agent to Salesforce and NetSuite in a single query.</a:t>
+            </a:r>
+          </a:p>
+        </p:txBody>
+      </p:sp>
+      <p:sp>
+        <p:nvSpPr>
+          <p:cNvPr id="4" name="TextBox 3"/>
+          <p:cNvSpPr txBox="1"/>
+          <p:nvPr/>
+        </p:nvSpPr>
+        <p:spPr>
+          <a:xfrm>
+            <a:off x="685628" y="1628000"/>
+            <a:ext cx="10820744" cy="558800"/>
+          </a:xfrm>
+          <a:prstGeom prst="rect">
+            <a:avLst/>
+          </a:prstGeom>
+          <a:noFill/>
+        </p:spPr>
+        <p:txBody>
+          <a:bodyPr wrap="square">
+            <a:spAutoFit/>
+          </a:bodyPr>
+          <a:lstStyle/>
+          <a:p>
+            <a:pPr algn="l"/>
+            <a:r>
+              <a:rPr sz="2200" b="0" i="0">
+                <a:solidFill>
+                  <a:srgbClr val="FFFFFF"/>
+                </a:solidFill>
+                <a:latin typeface="Geist"/>
+              </a:rPr>
+              <a:t>They're going to Google it, ask Claude, check GitHub.</a:t>
+            </a:r>
+          </a:p>
+        </p:txBody>
+      </p:sp>
+      <p:sp>
+        <p:nvSpPr>
+          <p:cNvPr id="5" name="TextBox 4"/>
+          <p:cNvSpPr txBox="1"/>
+          <p:nvPr/>
+        </p:nvSpPr>
+        <p:spPr>
+          <a:xfrm>
+            <a:off x="685628" y="2306800"/>
+            <a:ext cx="10820744" cy="609600"/>
+          </a:xfrm>
+          <a:prstGeom prst="rect">
+            <a:avLst/>
+          </a:prstGeom>
+          <a:noFill/>
+        </p:spPr>
+        <p:txBody>
+          <a:bodyPr wrap="square">
+            <a:spAutoFit/>
+          </a:bodyPr>
+          <a:lstStyle/>
+          <a:p>
+            <a:pPr algn="l"/>
+            <a:r>
+              <a:rPr sz="2400" b="0" i="0">
+                <a:solidFill>
+                  <a:srgbClr val="FFE500"/>
+                </a:solidFill>
+                <a:latin typeface="Geist"/>
+              </a:rPr>
+              <a:t>Right now, Composio comes up. CData doesn't.</a:t>
+            </a:r>
+          </a:p>
+        </p:txBody>
+      </p:sp>
+      <p:sp>
+        <p:nvSpPr>
+          <p:cNvPr id="6" name="TextBox 5"/>
+          <p:cNvSpPr txBox="1"/>
+          <p:nvPr/>
+        </p:nvSpPr>
+        <p:spPr>
+          <a:xfrm>
+            <a:off x="685628" y="3036400"/>
+            <a:ext cx="10820744" cy="558800"/>
+          </a:xfrm>
+          <a:prstGeom prst="rect">
+            <a:avLst/>
+          </a:prstGeom>
+          <a:noFill/>
+        </p:spPr>
+        <p:txBody>
+          <a:bodyPr wrap="square">
+            <a:spAutoFit/>
+          </a:bodyPr>
+          <a:lstStyle/>
+          <a:p>
+            <a:pPr algn="l"/>
+            <a:r>
+              <a:rPr sz="2200" b="0" i="0">
+                <a:solidFill>
+                  <a:srgbClr val="FFFFFF"/>
+                </a:solidFill>
+                <a:latin typeface="Geist"/>
+              </a:rPr>
+              <a:t>That's not a product problem — CData has the product.</a:t>
+            </a:r>
+          </a:p>
+        </p:txBody>
+      </p:sp>
+      <p:sp>
+        <p:nvSpPr>
+          <p:cNvPr id="7" name="TextBox 6"/>
+          <p:cNvSpPr txBox="1"/>
+          <p:nvPr/>
+        </p:nvSpPr>
+        <p:spPr>
+          <a:xfrm>
+            <a:off x="685628" y="3715200"/>
+            <a:ext cx="10820744" cy="558800"/>
+          </a:xfrm>
+          <a:prstGeom prst="rect">
+            <a:avLst/>
+          </a:prstGeom>
+          <a:noFill/>
+        </p:spPr>
+        <p:txBody>
+          <a:bodyPr wrap="square">
+            <a:spAutoFit/>
+          </a:bodyPr>
+          <a:lstStyle/>
+          <a:p>
+            <a:pPr algn="l"/>
+            <a:r>
+              <a:rPr sz="2200" b="0" i="0">
+                <a:solidFill>
+                  <a:srgbClr val="FFFFFF"/>
+                </a:solidFill>
+                <a:latin typeface="Geist"/>
+              </a:rPr>
+              <a:t>Getting there is a messaging, content, and distribution problem.</a:t>
+            </a:r>
+          </a:p>
+        </p:txBody>
+      </p:sp>
+      <p:sp>
+        <p:nvSpPr>
+          <p:cNvPr id="8" name="TextBox 7"/>
+          <p:cNvSpPr txBox="1"/>
+          <p:nvPr/>
+        </p:nvSpPr>
+        <p:spPr>
+          <a:xfrm>
+            <a:off x="685628" y="4394000"/>
+            <a:ext cx="10820744" cy="711200"/>
+          </a:xfrm>
+          <a:prstGeom prst="rect">
+            <a:avLst/>
+          </a:prstGeom>
+          <a:noFill/>
+        </p:spPr>
+        <p:txBody>
+          <a:bodyPr wrap="square">
+            <a:spAutoFit/>
+          </a:bodyPr>
+          <a:lstStyle/>
+          <a:p>
+            <a:pPr algn="l"/>
+            <a:r>
+              <a:rPr sz="2800" b="0" i="0">
+                <a:solidFill>
+                  <a:srgbClr val="FFE500"/>
+                </a:solidFill>
+                <a:latin typeface="Geist"/>
+              </a:rPr>
+              <a:t>That's exactly what I do.</a:t>
+            </a:r>
+          </a:p>
+        </p:txBody>
+      </p:sp>
+    </p:spTree>
+  </p:cSld>
+  <p:clrMapOvr>
+    <a:masterClrMapping/>
+  </p:clrMapOvr>
+</p:sld>
+</file>
+
+<file path=ppt/slides/slide46.xml><?xml version="1.0" encoding="utf-8"?>
 <p:sld xmlns:a="http://schemas.openxmlformats.org/drawingml/2006/main" xmlns:p="http://schemas.openxmlformats.org/presentationml/2006/main" xmlns:r="http://schemas.openxmlformats.org/officeDocument/2006/relationships">
   <p:cSld>
     <p:bg>
